--- a/Module_ELC_Yield_User_Guide.pptx
+++ b/Module_ELC_Yield_User_Guide.pptx
@@ -15,6 +15,8 @@
     <p:sldId id="263" r:id="rId14"/>
     <p:sldId id="264" r:id="rId15"/>
     <p:sldId id="265" r:id="rId16"/>
+    <p:sldId id="266" r:id="rId17"/>
+    <p:sldId id="267" r:id="rId18"/>
   </p:sldIdLst>
   <p:sldSz cx="12191695" cy="6858000" type="screen4x3"/>
   <p:notesSz cx="6858000" cy="9144000"/>
@@ -3112,7 +3114,7 @@
             <a:avLst/>
           </a:prstGeom>
           <a:solidFill>
-            <a:srgbClr val="1A237E"/>
+            <a:srgbClr val="003366"/>
           </a:solidFill>
           <a:ln>
             <a:noFill/>
@@ -3157,7 +3159,7 @@
           <a:noFill/>
         </p:spPr>
         <p:txBody>
-          <a:bodyPr wrap="none">
+          <a:bodyPr wrap="square">
             <a:spAutoFit/>
           </a:bodyPr>
           <a:lstStyle/>
@@ -3170,32 +3172,9 @@
               </a:defRPr>
             </a:pPr>
             <a:r>
-              <a:t>Module ELC Yield Analysis</a:t>
-            </a:r>
-          </a:p>
-        </p:txBody>
-      </p:sp>
-      <p:sp>
-        <p:nvSpPr>
-          <p:cNvPr id="4" name="TextBox 3"/>
-          <p:cNvSpPr txBox="1"/>
-          <p:nvPr/>
-        </p:nvSpPr>
-        <p:spPr>
-          <a:xfrm>
-            <a:off x="457200" y="3840480"/>
-            <a:ext cx="11277295" cy="914400"/>
-          </a:xfrm>
-          <a:prstGeom prst="rect">
-            <a:avLst/>
-          </a:prstGeom>
-          <a:noFill/>
-        </p:spPr>
-        <p:txBody>
-          <a:bodyPr wrap="none">
-            <a:spAutoFit/>
-          </a:bodyPr>
-          <a:lstStyle/>
+              <a:t>Module ELC Yield Tab</a:t>
+            </a:r>
+          </a:p>
           <a:p>
             <a:pPr algn="ctr">
               <a:defRPr sz="2400">
@@ -3205,7 +3184,7 @@
               </a:defRPr>
             </a:pPr>
             <a:r>
-              <a:t>Step-by-Step User Guide | Module Yield Dashboard</a:t>
+              <a:t>Step-by-Step User Guide</a:t>
             </a:r>
           </a:p>
         </p:txBody>
@@ -3237,13 +3216,13 @@
         <p:spPr>
           <a:xfrm>
             <a:off x="0" y="0"/>
-            <a:ext cx="12191695" cy="914400"/>
+            <a:ext cx="12191695" cy="1097280"/>
           </a:xfrm>
           <a:prstGeom prst="rect">
             <a:avLst/>
           </a:prstGeom>
           <a:solidFill>
-            <a:srgbClr val="1A237E"/>
+            <a:srgbClr val="003366"/>
           </a:solidFill>
           <a:ln>
             <a:noFill/>
@@ -3279,8 +3258,8 @@
         </p:nvSpPr>
         <p:spPr>
           <a:xfrm>
-            <a:off x="457200" y="182880"/>
-            <a:ext cx="10972800" cy="548640"/>
+            <a:off x="457200" y="274320"/>
+            <a:ext cx="10972800" cy="731520"/>
           </a:xfrm>
           <a:prstGeom prst="rect">
             <a:avLst/>
@@ -3294,14 +3273,14 @@
           <a:lstStyle/>
           <a:p>
             <a:pPr>
-              <a:defRPr sz="2800" b="1">
+              <a:defRPr sz="3200" b="1">
                 <a:solidFill>
                   <a:srgbClr val="FFFFFF"/>
                 </a:solidFill>
               </a:defRPr>
             </a:pPr>
             <a:r>
-              <a:t>Quick Reference</a:t>
+              <a:t>Available Target Configurations</a:t>
             </a:r>
           </a:p>
         </p:txBody>
@@ -3314,8 +3293,8 @@
         </p:nvSpPr>
         <p:spPr>
           <a:xfrm>
-            <a:off x="457200" y="1188720"/>
-            <a:ext cx="11277295" cy="5029200"/>
+            <a:off x="457200" y="1371600"/>
+            <a:ext cx="5029200" cy="5029200"/>
           </a:xfrm>
           <a:prstGeom prst="rect">
             <a:avLst/>
@@ -3329,151 +3308,322 @@
           <a:lstStyle/>
           <a:p>
             <a:pPr>
-              <a:spcBef>
-                <a:spcPts val="1400"/>
-              </a:spcBef>
-              <a:defRPr sz="1800" b="1">
-                <a:solidFill>
-                  <a:srgbClr val="3F51B5"/>
-                </a:solidFill>
-              </a:defRPr>
-            </a:pPr>
-            <a:r>
-              <a:t>Available Configs</a:t>
-            </a:r>
-          </a:p>
-          <a:p>
-            <a:pPr>
-              <a:spcBef>
-                <a:spcPts val="600"/>
-              </a:spcBef>
-              <a:defRPr sz="1600"/>
-            </a:pPr>
-            <a:r>
-              <a:t>Y42M: 32GB/64GB/128GB (8533/6400)</a:t>
-            </a:r>
-          </a:p>
-          <a:p>
-            <a:pPr>
-              <a:spcBef>
-                <a:spcPts val="600"/>
-              </a:spcBef>
-              <a:defRPr sz="1600"/>
-            </a:pPr>
-            <a:r>
-              <a:t>Y62P: 32GB/64GB/128GB (6400/7500/8533/9600)</a:t>
-            </a:r>
-          </a:p>
-          <a:p>
-            <a:pPr>
-              <a:spcBef>
-                <a:spcPts val="600"/>
-              </a:spcBef>
-              <a:defRPr sz="1600"/>
-            </a:pPr>
-            <a:r>
-              <a:t>Y6CP: 48GB/96GB/192GB (7500/9600)</a:t>
-            </a:r>
-          </a:p>
-          <a:p>
-            <a:pPr>
-              <a:spcBef>
-                <a:spcPts val="600"/>
-              </a:spcBef>
-              <a:defRPr sz="1600"/>
-            </a:pPr>
-            <a:r>
-              <a:t>Y63N: 64GB/128GB/256GB (7500/8533/9600)</a:t>
-            </a:r>
-          </a:p>
-          <a:p>
-            <a:pPr>
-              <a:spcBef>
-                <a:spcPts val="600"/>
-              </a:spcBef>
-              <a:defRPr sz="1600"/>
-            </a:pPr>
-            <a:r>
-              <a:t>Y73P: 64GB/128GB/256GB (starts Apr'27)</a:t>
-            </a:r>
-          </a:p>
-          <a:p>
-            <a:pPr>
-              <a:spcBef>
-                <a:spcPts val="600"/>
-              </a:spcBef>
-              <a:defRPr sz="1600"/>
-            </a:pPr>
-          </a:p>
-          <a:p>
-            <a:pPr>
-              <a:spcBef>
-                <a:spcPts val="1400"/>
-              </a:spcBef>
-              <a:defRPr sz="1800" b="1">
-                <a:solidFill>
-                  <a:srgbClr val="3F51B5"/>
-                </a:solidFill>
-              </a:defRPr>
-            </a:pPr>
-            <a:r>
-              <a:t>D1 Targets (May'26+)</a:t>
-            </a:r>
-          </a:p>
-          <a:p>
-            <a:pPr>
-              <a:spcBef>
-                <a:spcPts val="600"/>
-              </a:spcBef>
-              <a:defRPr sz="1600"/>
-            </a:pPr>
-            <a:r>
-              <a:t>HMFN: 99.5% most configs</a:t>
-            </a:r>
-          </a:p>
-          <a:p>
-            <a:pPr>
-              <a:spcBef>
-                <a:spcPts val="600"/>
-              </a:spcBef>
-              <a:defRPr sz="1600"/>
-            </a:pPr>
-            <a:r>
-              <a:t>SLT: 97-99% varies by config</a:t>
-            </a:r>
-          </a:p>
-          <a:p>
-            <a:pPr>
-              <a:spcBef>
-                <a:spcPts val="600"/>
-              </a:spcBef>
-              <a:defRPr sz="1600"/>
-            </a:pPr>
-            <a:r>
-              <a:t>ELC: 97-98.51% (HMFN x SLT)</a:t>
-            </a:r>
-          </a:p>
-          <a:p>
-            <a:pPr>
-              <a:spcBef>
-                <a:spcPts val="600"/>
-              </a:spcBef>
-              <a:defRPr sz="1600"/>
-            </a:pPr>
-          </a:p>
-          <a:p>
-            <a:pPr>
-              <a:spcBef>
-                <a:spcPts val="1400"/>
-              </a:spcBef>
-              <a:defRPr sz="1800" b="1">
-                <a:solidFill>
-                  <a:srgbClr val="3F51B5"/>
-                </a:solidFill>
-              </a:defRPr>
-            </a:pPr>
-            <a:r>
-              <a:t>Dashboard: http://bolpedh03.micron.com:8502</a:t>
+              <a:spcAft>
+                <a:spcPts val="1200"/>
+              </a:spcAft>
+              <a:defRPr sz="1800">
+                <a:solidFill>
+                  <a:srgbClr val="323232"/>
+                </a:solidFill>
+              </a:defRPr>
+            </a:pPr>
+            <a:r>
+              <a:t>D1 targets are defined for</a:t>
+            </a:r>
+          </a:p>
+          <a:p>
+            <a:pPr>
+              <a:spcAft>
+                <a:spcPts val="1200"/>
+              </a:spcAft>
+              <a:defRPr sz="1800">
+                <a:solidFill>
+                  <a:srgbClr val="323232"/>
+                </a:solidFill>
+              </a:defRPr>
+            </a:pPr>
+            <a:r>
+              <a:t>these DID + Density + Speed</a:t>
+            </a:r>
+          </a:p>
+          <a:p>
+            <a:pPr>
+              <a:spcAft>
+                <a:spcPts val="1200"/>
+              </a:spcAft>
+              <a:defRPr sz="1800">
+                <a:solidFill>
+                  <a:srgbClr val="323232"/>
+                </a:solidFill>
+              </a:defRPr>
+            </a:pPr>
+            <a:r>
+              <a:t>combinations:</a:t>
+            </a:r>
+          </a:p>
+          <a:p>
+            <a:pPr>
+              <a:spcAft>
+                <a:spcPts val="1200"/>
+              </a:spcAft>
+              <a:defRPr sz="1800">
+                <a:solidFill>
+                  <a:srgbClr val="323232"/>
+                </a:solidFill>
+              </a:defRPr>
+            </a:pPr>
+          </a:p>
+          <a:p>
+            <a:pPr>
+              <a:spcAft>
+                <a:spcPts val="1200"/>
+              </a:spcAft>
+              <a:defRPr sz="1800">
+                <a:solidFill>
+                  <a:srgbClr val="323232"/>
+                </a:solidFill>
+              </a:defRPr>
+            </a:pPr>
+            <a:r>
+              <a:t>If your config is not listed,</a:t>
+            </a:r>
+          </a:p>
+          <a:p>
+            <a:pPr>
+              <a:spcAft>
+                <a:spcPts val="1200"/>
+              </a:spcAft>
+              <a:defRPr sz="1800">
+                <a:solidFill>
+                  <a:srgbClr val="323232"/>
+                </a:solidFill>
+              </a:defRPr>
+            </a:pPr>
+            <a:r>
+              <a:t>targets will not appear.</a:t>
+            </a:r>
+          </a:p>
+          <a:p>
+            <a:pPr>
+              <a:spcAft>
+                <a:spcPts val="1200"/>
+              </a:spcAft>
+              <a:defRPr sz="1800">
+                <a:solidFill>
+                  <a:srgbClr val="323232"/>
+                </a:solidFill>
+              </a:defRPr>
+            </a:pPr>
+          </a:p>
+          <a:p>
+            <a:pPr>
+              <a:spcAft>
+                <a:spcPts val="1200"/>
+              </a:spcAft>
+              <a:defRPr sz="1800">
+                <a:solidFill>
+                  <a:srgbClr val="323232"/>
+                </a:solidFill>
+              </a:defRPr>
+            </a:pPr>
+            <a:r>
+              <a:t>Timeline: Oct'25 - Feb'29</a:t>
+            </a:r>
+          </a:p>
+          <a:p>
+            <a:pPr>
+              <a:spcAft>
+                <a:spcPts val="1200"/>
+              </a:spcAft>
+              <a:defRPr sz="1800">
+                <a:solidFill>
+                  <a:srgbClr val="323232"/>
+                </a:solidFill>
+              </a:defRPr>
+            </a:pPr>
+          </a:p>
+          <a:p>
+            <a:pPr>
+              <a:spcAft>
+                <a:spcPts val="1200"/>
+              </a:spcAft>
+              <a:defRPr sz="1800">
+                <a:solidFill>
+                  <a:srgbClr val="323232"/>
+                </a:solidFill>
+              </a:defRPr>
+            </a:pPr>
+            <a:r>
+              <a:t>New configs added:</a:t>
+            </a:r>
+          </a:p>
+          <a:p>
+            <a:pPr>
+              <a:spcAft>
+                <a:spcPts val="1200"/>
+              </a:spcAft>
+              <a:defRPr sz="1800">
+                <a:solidFill>
+                  <a:srgbClr val="323232"/>
+                </a:solidFill>
+              </a:defRPr>
+            </a:pPr>
+            <a:r>
+              <a:t>• Y73P (starts Apr'27)</a:t>
+            </a:r>
+          </a:p>
+          <a:p>
+            <a:pPr>
+              <a:spcAft>
+                <a:spcPts val="1200"/>
+              </a:spcAft>
+              <a:defRPr sz="1800">
+                <a:solidFill>
+                  <a:srgbClr val="323232"/>
+                </a:solidFill>
+              </a:defRPr>
+            </a:pPr>
+            <a:r>
+              <a:t>• Y63N_256GB_8533MTPS</a:t>
+            </a:r>
+          </a:p>
+        </p:txBody>
+      </p:sp>
+      <p:sp>
+        <p:nvSpPr>
+          <p:cNvPr id="5" name="Rounded Rectangle 4"/>
+          <p:cNvSpPr/>
+          <p:nvPr/>
+        </p:nvSpPr>
+        <p:spPr>
+          <a:xfrm>
+            <a:off x="5943600" y="1371600"/>
+            <a:ext cx="5760720" cy="5029200"/>
+          </a:xfrm>
+          <a:prstGeom prst="roundRect">
+            <a:avLst/>
+          </a:prstGeom>
+          <a:solidFill>
+            <a:srgbClr val="F0F0F0"/>
+          </a:solidFill>
+          <a:ln>
+            <a:solidFill>
+              <a:srgbClr val="969696"/>
+            </a:solidFill>
+          </a:ln>
+        </p:spPr>
+        <p:style>
+          <a:lnRef idx="1">
+            <a:schemeClr val="accent1"/>
+          </a:lnRef>
+          <a:fillRef idx="3">
+            <a:schemeClr val="accent1"/>
+          </a:fillRef>
+          <a:effectRef idx="2">
+            <a:schemeClr val="accent1"/>
+          </a:effectRef>
+          <a:fontRef idx="minor">
+            <a:schemeClr val="lt1"/>
+          </a:fontRef>
+        </p:style>
+        <p:txBody>
+          <a:bodyPr rtlCol="0" anchor="ctr"/>
+          <a:lstStyle/>
+          <a:p>
+            <a:pPr algn="ctr"/>
+          </a:p>
+        </p:txBody>
+      </p:sp>
+      <p:sp>
+        <p:nvSpPr>
+          <p:cNvPr id="6" name="TextBox 5"/>
+          <p:cNvSpPr txBox="1"/>
+          <p:nvPr/>
+        </p:nvSpPr>
+        <p:spPr>
+          <a:xfrm>
+            <a:off x="6126480" y="1554480"/>
+            <a:ext cx="5394960" cy="4663440"/>
+          </a:xfrm>
+          <a:prstGeom prst="rect">
+            <a:avLst/>
+          </a:prstGeom>
+          <a:noFill/>
+        </p:spPr>
+        <p:txBody>
+          <a:bodyPr wrap="square">
+            <a:spAutoFit/>
+          </a:bodyPr>
+          <a:lstStyle/>
+          <a:p>
+            <a:pPr>
+              <a:defRPr sz="1000">
+                <a:solidFill>
+                  <a:srgbClr val="323232"/>
+                </a:solidFill>
+                <a:latin typeface="Courier New"/>
+              </a:defRPr>
+            </a:pPr>
+            <a:r>
+              <a:t>┌─────────────────────────────────────────────────┐</a:t>
+            </a:r>
+            <a:br/>
+            <a:r>
+              <a:t>│  AVAILABLE D1 TARGET CONFIGURATIONS             │</a:t>
+            </a:r>
+            <a:br/>
+            <a:r>
+              <a:t>├─────────────────────────────────────────────────┤</a:t>
+            </a:r>
+            <a:br/>
+            <a:r>
+              <a:t>│                                                 │</a:t>
+            </a:r>
+            <a:br/>
+            <a:r>
+              <a:t>│  Y42M:  32GB_8533, 64GB_8533, 128GB_6400       │</a:t>
+            </a:r>
+            <a:br/>
+            <a:r>
+              <a:t>│                                                 │</a:t>
+            </a:r>
+            <a:br/>
+            <a:r>
+              <a:t>│  Y62P:  32GB_9600, 64GB_9600, 64GB_8533        │</a:t>
+            </a:r>
+            <a:br/>
+            <a:r>
+              <a:t>│         128GB_6400, 128GB_7500, 128GB_8533      │</a:t>
+            </a:r>
+            <a:br/>
+            <a:r>
+              <a:t>│                                                 │</a:t>
+            </a:r>
+            <a:br/>
+            <a:r>
+              <a:t>│  Y6CP:  48GB_9600, 96GB_9600, 192GB_7500       │</a:t>
+            </a:r>
+            <a:br/>
+            <a:r>
+              <a:t>│                                                 │</a:t>
+            </a:r>
+            <a:br/>
+            <a:r>
+              <a:t>│  Y63N:  64GB_9600, 128GB_9600                   │</a:t>
+            </a:r>
+            <a:br/>
+            <a:r>
+              <a:t>│         256GB_7500, 256GB_8533                  │</a:t>
+            </a:r>
+            <a:br/>
+            <a:r>
+              <a:t>│                                                 │</a:t>
+            </a:r>
+            <a:br/>
+            <a:r>
+              <a:t>│  Y73P:  64GB_8533, 128GB_8533, 256GB_4800      │</a:t>
+            </a:r>
+            <a:br/>
+            <a:r>
+              <a:t>│         (Starts Apr'27)                         │</a:t>
+            </a:r>
+            <a:br/>
+            <a:r>
+              <a:t>│                                                 │</a:t>
+            </a:r>
+            <a:br/>
+            <a:r>
+              <a:t>└─────────────────────────────────────────────────┘</a:t>
             </a:r>
           </a:p>
         </p:txBody>
@@ -3486,7 +3636,7 @@
 </p:sld>
 </file>
 
-<file path=ppt/slides/slide2.xml><?xml version="1.0" encoding="utf-8"?>
+<file path=ppt/slides/slide11.xml><?xml version="1.0" encoding="utf-8"?>
 <p:sld xmlns:a="http://schemas.openxmlformats.org/drawingml/2006/main" xmlns:p="http://schemas.openxmlformats.org/presentationml/2006/main" xmlns:r="http://schemas.openxmlformats.org/officeDocument/2006/relationships">
   <p:cSld>
     <p:spTree>
@@ -3505,13 +3655,13 @@
         <p:spPr>
           <a:xfrm>
             <a:off x="0" y="0"/>
-            <a:ext cx="12191695" cy="914400"/>
+            <a:ext cx="12191695" cy="1097280"/>
           </a:xfrm>
           <a:prstGeom prst="rect">
             <a:avLst/>
           </a:prstGeom>
           <a:solidFill>
-            <a:srgbClr val="1A237E"/>
+            <a:srgbClr val="003366"/>
           </a:solidFill>
           <a:ln>
             <a:noFill/>
@@ -3547,8 +3697,8 @@
         </p:nvSpPr>
         <p:spPr>
           <a:xfrm>
-            <a:off x="457200" y="182880"/>
-            <a:ext cx="10972800" cy="548640"/>
+            <a:off x="457200" y="274320"/>
+            <a:ext cx="10972800" cy="731520"/>
           </a:xfrm>
           <a:prstGeom prst="rect">
             <a:avLst/>
@@ -3562,14 +3712,14 @@
           <a:lstStyle/>
           <a:p>
             <a:pPr>
-              <a:defRPr sz="2800" b="1">
+              <a:defRPr sz="3200" b="1">
                 <a:solidFill>
                   <a:srgbClr val="FFFFFF"/>
                 </a:solidFill>
               </a:defRPr>
             </a:pPr>
             <a:r>
-              <a:t>Overview: Module ELC Yield Tab</a:t>
+              <a:t>Pro Tips</a:t>
             </a:r>
           </a:p>
         </p:txBody>
@@ -3582,7 +3732,7 @@
         </p:nvSpPr>
         <p:spPr>
           <a:xfrm>
-            <a:off x="457200" y="1188720"/>
+            <a:off x="457200" y="1371600"/>
             <a:ext cx="11277295" cy="5029200"/>
           </a:xfrm>
           <a:prstGeom prst="rect">
@@ -3597,140 +3747,227 @@
           <a:lstStyle/>
           <a:p>
             <a:pPr>
-              <a:spcBef>
-                <a:spcPts val="1400"/>
-              </a:spcBef>
-              <a:defRPr sz="1800" b="1">
-                <a:solidFill>
-                  <a:srgbClr val="3F51B5"/>
-                </a:solidFill>
-              </a:defRPr>
-            </a:pPr>
-            <a:r>
-              <a:t>What This Tab Does</a:t>
-            </a:r>
-          </a:p>
-          <a:p>
-            <a:pPr>
-              <a:spcBef>
-                <a:spcPts val="600"/>
-              </a:spcBef>
-              <a:defRPr sz="1600"/>
-            </a:pPr>
-            <a:r>
-              <a:t>Track HMFN, SLT, and ELC yields over time</a:t>
-            </a:r>
-          </a:p>
-          <a:p>
-            <a:pPr>
-              <a:spcBef>
-                <a:spcPts val="600"/>
-              </a:spcBef>
-              <a:defRPr sz="1600"/>
-            </a:pPr>
-            <a:r>
-              <a:t>Compare actual performance vs D1 projection targets</a:t>
-            </a:r>
-          </a:p>
-          <a:p>
-            <a:pPr>
-              <a:spcBef>
-                <a:spcPts val="600"/>
-              </a:spcBef>
-              <a:defRPr sz="1600"/>
-            </a:pPr>
-            <a:r>
-              <a:t>Filter by DID, Density, Speed, and Work Week</a:t>
-            </a:r>
-          </a:p>
-          <a:p>
-            <a:pPr>
-              <a:spcBef>
-                <a:spcPts val="600"/>
-              </a:spcBef>
-              <a:defRPr sz="1600"/>
-            </a:pPr>
-          </a:p>
-          <a:p>
-            <a:pPr>
-              <a:spcBef>
-                <a:spcPts val="1400"/>
-              </a:spcBef>
-              <a:defRPr sz="1800" b="1">
-                <a:solidFill>
-                  <a:srgbClr val="3F51B5"/>
-                </a:solidFill>
-              </a:defRPr>
-            </a:pPr>
-            <a:r>
-              <a:t>Key Features</a:t>
-            </a:r>
-          </a:p>
-          <a:p>
-            <a:pPr>
-              <a:spcBef>
-                <a:spcPts val="600"/>
-              </a:spcBef>
-              <a:defRPr sz="1600"/>
-            </a:pPr>
-            <a:r>
-              <a:t>Multi-series selection (compare different configs)</a:t>
-            </a:r>
-          </a:p>
-          <a:p>
-            <a:pPr>
-              <a:spcBef>
-                <a:spcPts val="600"/>
-              </a:spcBef>
-              <a:defRPr sz="1600"/>
-            </a:pPr>
-            <a:r>
-              <a:t>D1 Target curves with future projections (+8 weeks)</a:t>
-            </a:r>
-          </a:p>
-          <a:p>
-            <a:pPr>
-              <a:spcBef>
-                <a:spcPts val="600"/>
-              </a:spcBef>
-              <a:defRPr sz="1600"/>
-            </a:pPr>
-            <a:r>
-              <a:t>Historical curve comparison (D0 vs D1)</a:t>
-            </a:r>
-          </a:p>
-          <a:p>
-            <a:pPr>
-              <a:spcBef>
-                <a:spcPts val="600"/>
-              </a:spcBef>
-              <a:defRPr sz="1600"/>
-            </a:pPr>
-          </a:p>
-          <a:p>
-            <a:pPr>
-              <a:spcBef>
-                <a:spcPts val="1400"/>
-              </a:spcBef>
-              <a:defRPr sz="1800" b="1">
-                <a:solidFill>
-                  <a:srgbClr val="3F51B5"/>
-                </a:solidFill>
-              </a:defRPr>
-            </a:pPr>
-            <a:r>
-              <a:t>When to Use</a:t>
-            </a:r>
-          </a:p>
-          <a:p>
-            <a:pPr>
-              <a:spcBef>
-                <a:spcPts val="600"/>
-              </a:spcBef>
-              <a:defRPr sz="1600"/>
-            </a:pPr>
-            <a:r>
-              <a:t>Weekly yield reviews and gap-to-target analysis</a:t>
+              <a:spcAft>
+                <a:spcPts val="1200"/>
+              </a:spcAft>
+              <a:defRPr sz="1800">
+                <a:solidFill>
+                  <a:srgbClr val="323232"/>
+                </a:solidFill>
+              </a:defRPr>
+            </a:pPr>
+            <a:r>
+              <a:t>💡 Quick Reference:</a:t>
+            </a:r>
+          </a:p>
+          <a:p>
+            <a:pPr>
+              <a:spcAft>
+                <a:spcPts val="1200"/>
+              </a:spcAft>
+              <a:defRPr sz="1800">
+                <a:solidFill>
+                  <a:srgbClr val="323232"/>
+                </a:solidFill>
+              </a:defRPr>
+            </a:pPr>
+          </a:p>
+          <a:p>
+            <a:pPr>
+              <a:spcAft>
+                <a:spcPts val="1200"/>
+              </a:spcAft>
+              <a:defRPr sz="1800">
+                <a:solidFill>
+                  <a:srgbClr val="323232"/>
+                </a:solidFill>
+              </a:defRPr>
+            </a:pPr>
+            <a:r>
+              <a:t>1. Always start with narrow filters</a:t>
+            </a:r>
+          </a:p>
+          <a:p>
+            <a:pPr>
+              <a:spcAft>
+                <a:spcPts val="1200"/>
+              </a:spcAft>
+              <a:defRPr sz="1800">
+                <a:solidFill>
+                  <a:srgbClr val="323232"/>
+                </a:solidFill>
+              </a:defRPr>
+            </a:pPr>
+            <a:r>
+              <a:t>   (single DID, single form factor)</a:t>
+            </a:r>
+          </a:p>
+          <a:p>
+            <a:pPr>
+              <a:spcAft>
+                <a:spcPts val="1200"/>
+              </a:spcAft>
+              <a:defRPr sz="1800">
+                <a:solidFill>
+                  <a:srgbClr val="323232"/>
+                </a:solidFill>
+              </a:defRPr>
+            </a:pPr>
+          </a:p>
+          <a:p>
+            <a:pPr>
+              <a:spcAft>
+                <a:spcPts val="1200"/>
+              </a:spcAft>
+              <a:defRPr sz="1800">
+                <a:solidFill>
+                  <a:srgbClr val="323232"/>
+                </a:solidFill>
+              </a:defRPr>
+            </a:pPr>
+            <a:r>
+              <a:t>2. Select all 3 steps (HMFN, SLT, ELC)</a:t>
+            </a:r>
+          </a:p>
+          <a:p>
+            <a:pPr>
+              <a:spcAft>
+                <a:spcPts val="1200"/>
+              </a:spcAft>
+              <a:defRPr sz="1800">
+                <a:solidFill>
+                  <a:srgbClr val="323232"/>
+                </a:solidFill>
+              </a:defRPr>
+            </a:pPr>
+            <a:r>
+              <a:t>   to see the complete yield flow</a:t>
+            </a:r>
+          </a:p>
+          <a:p>
+            <a:pPr>
+              <a:spcAft>
+                <a:spcPts val="1200"/>
+              </a:spcAft>
+              <a:defRPr sz="1800">
+                <a:solidFill>
+                  <a:srgbClr val="323232"/>
+                </a:solidFill>
+              </a:defRPr>
+            </a:pPr>
+          </a:p>
+          <a:p>
+            <a:pPr>
+              <a:spcAft>
+                <a:spcPts val="1200"/>
+              </a:spcAft>
+              <a:defRPr sz="1800">
+                <a:solidFill>
+                  <a:srgbClr val="323232"/>
+                </a:solidFill>
+              </a:defRPr>
+            </a:pPr>
+            <a:r>
+              <a:t>3. Use 'Select All' then uncheck</a:t>
+            </a:r>
+          </a:p>
+          <a:p>
+            <a:pPr>
+              <a:spcAft>
+                <a:spcPts val="1200"/>
+              </a:spcAft>
+              <a:defRPr sz="1800">
+                <a:solidFill>
+                  <a:srgbClr val="323232"/>
+                </a:solidFill>
+              </a:defRPr>
+            </a:pPr>
+            <a:r>
+              <a:t>   unwanted configs</a:t>
+            </a:r>
+          </a:p>
+          <a:p>
+            <a:pPr>
+              <a:spcAft>
+                <a:spcPts val="1200"/>
+              </a:spcAft>
+              <a:defRPr sz="1800">
+                <a:solidFill>
+                  <a:srgbClr val="323232"/>
+                </a:solidFill>
+              </a:defRPr>
+            </a:pPr>
+          </a:p>
+          <a:p>
+            <a:pPr>
+              <a:spcAft>
+                <a:spcPts val="1200"/>
+              </a:spcAft>
+              <a:defRPr sz="1800">
+                <a:solidFill>
+                  <a:srgbClr val="323232"/>
+                </a:solidFill>
+              </a:defRPr>
+            </a:pPr>
+            <a:r>
+              <a:t>4. Hover over chart points for</a:t>
+            </a:r>
+          </a:p>
+          <a:p>
+            <a:pPr>
+              <a:spcAft>
+                <a:spcPts val="1200"/>
+              </a:spcAft>
+              <a:defRPr sz="1800">
+                <a:solidFill>
+                  <a:srgbClr val="323232"/>
+                </a:solidFill>
+              </a:defRPr>
+            </a:pPr>
+            <a:r>
+              <a:t>   exact yield values</a:t>
+            </a:r>
+          </a:p>
+          <a:p>
+            <a:pPr>
+              <a:spcAft>
+                <a:spcPts val="1200"/>
+              </a:spcAft>
+              <a:defRPr sz="1800">
+                <a:solidFill>
+                  <a:srgbClr val="323232"/>
+                </a:solidFill>
+              </a:defRPr>
+            </a:pPr>
+          </a:p>
+          <a:p>
+            <a:pPr>
+              <a:spcAft>
+                <a:spcPts val="1200"/>
+              </a:spcAft>
+              <a:defRPr sz="1800">
+                <a:solidFill>
+                  <a:srgbClr val="323232"/>
+                </a:solidFill>
+              </a:defRPr>
+            </a:pPr>
+            <a:r>
+              <a:t>5. Use 4-week rolling average</a:t>
+            </a:r>
+          </a:p>
+          <a:p>
+            <a:pPr>
+              <a:spcAft>
+                <a:spcPts val="1200"/>
+              </a:spcAft>
+              <a:defRPr sz="1800">
+                <a:solidFill>
+                  <a:srgbClr val="323232"/>
+                </a:solidFill>
+              </a:defRPr>
+            </a:pPr>
+            <a:r>
+              <a:t>   to smooth out weekly noise</a:t>
             </a:r>
           </a:p>
         </p:txBody>
@@ -3743,7 +3980,7 @@
 </p:sld>
 </file>
 
-<file path=ppt/slides/slide3.xml><?xml version="1.0" encoding="utf-8"?>
+<file path=ppt/slides/slide12.xml><?xml version="1.0" encoding="utf-8"?>
 <p:sld xmlns:a="http://schemas.openxmlformats.org/drawingml/2006/main" xmlns:p="http://schemas.openxmlformats.org/presentationml/2006/main" xmlns:r="http://schemas.openxmlformats.org/officeDocument/2006/relationships">
   <p:cSld>
     <p:spTree>
@@ -3762,13 +3999,13 @@
         <p:spPr>
           <a:xfrm>
             <a:off x="0" y="0"/>
-            <a:ext cx="12191695" cy="914400"/>
+            <a:ext cx="12191695" cy="1097280"/>
           </a:xfrm>
           <a:prstGeom prst="rect">
             <a:avLst/>
           </a:prstGeom>
           <a:solidFill>
-            <a:srgbClr val="1A237E"/>
+            <a:srgbClr val="003366"/>
           </a:solidFill>
           <a:ln>
             <a:noFill/>
@@ -3804,8 +4041,8 @@
         </p:nvSpPr>
         <p:spPr>
           <a:xfrm>
-            <a:off x="457200" y="182880"/>
-            <a:ext cx="10972800" cy="548640"/>
+            <a:off x="457200" y="274320"/>
+            <a:ext cx="10972800" cy="731520"/>
           </a:xfrm>
           <a:prstGeom prst="rect">
             <a:avLst/>
@@ -3819,14 +4056,14 @@
           <a:lstStyle/>
           <a:p>
             <a:pPr>
-              <a:defRPr sz="2800" b="1">
+              <a:defRPr sz="3200" b="1">
                 <a:solidFill>
                   <a:srgbClr val="FFFFFF"/>
                 </a:solidFill>
               </a:defRPr>
             </a:pPr>
             <a:r>
-              <a:t>Step 1: Configure Sidebar Filters</a:t>
+              <a:t>Quick Reference Card</a:t>
             </a:r>
           </a:p>
         </p:txBody>
@@ -3839,7 +4076,7 @@
         </p:nvSpPr>
         <p:spPr>
           <a:xfrm>
-            <a:off x="457200" y="1188720"/>
+            <a:off x="457200" y="1371600"/>
             <a:ext cx="5029200" cy="5029200"/>
           </a:xfrm>
           <a:prstGeom prst="rect">
@@ -3854,159 +4091,170 @@
           <a:lstStyle/>
           <a:p>
             <a:pPr>
-              <a:spcBef>
-                <a:spcPts val="1400"/>
-              </a:spcBef>
-              <a:defRPr sz="1800" b="1">
-                <a:solidFill>
-                  <a:srgbClr val="3F51B5"/>
-                </a:solidFill>
-              </a:defRPr>
-            </a:pPr>
-            <a:r>
-              <a:t>Required Filters</a:t>
-            </a:r>
-          </a:p>
-          <a:p>
-            <a:pPr>
-              <a:spcBef>
-                <a:spcPts val="600"/>
-              </a:spcBef>
-              <a:defRPr sz="1600"/>
-            </a:pPr>
-            <a:r>
-              <a:t>Form Factor: SOCAMM or SOCAMM2</a:t>
-            </a:r>
-          </a:p>
-          <a:p>
-            <a:pPr>
-              <a:spcBef>
-                <a:spcPts val="600"/>
-              </a:spcBef>
-              <a:defRPr sz="1600"/>
-            </a:pPr>
-            <a:r>
-              <a:t>Test Step: Select HMFN, HMB1, QMON</a:t>
-            </a:r>
-          </a:p>
-          <a:p>
-            <a:pPr>
-              <a:spcBef>
-                <a:spcPts val="600"/>
-              </a:spcBef>
-              <a:defRPr sz="1600"/>
-            </a:pPr>
-            <a:r>
-              <a:t>Design ID: Y62P, Y6CP, Y63N, etc.</a:t>
-            </a:r>
-          </a:p>
-          <a:p>
-            <a:pPr>
-              <a:spcBef>
-                <a:spcPts val="600"/>
-              </a:spcBef>
-              <a:defRPr sz="1600"/>
-            </a:pPr>
-            <a:r>
-              <a:t>Work Week: Select year and week range</a:t>
-            </a:r>
-          </a:p>
-          <a:p>
-            <a:pPr>
-              <a:spcBef>
-                <a:spcPts val="600"/>
-              </a:spcBef>
-              <a:defRPr sz="1600"/>
-            </a:pPr>
-          </a:p>
-          <a:p>
-            <a:pPr>
-              <a:spcBef>
-                <a:spcPts val="1400"/>
-              </a:spcBef>
-              <a:defRPr sz="1800" b="1">
-                <a:solidFill>
-                  <a:srgbClr val="3F51B5"/>
-                </a:solidFill>
-              </a:defRPr>
-            </a:pPr>
-            <a:r>
-              <a:t>For Target Lines (Important!)</a:t>
-            </a:r>
-          </a:p>
-          <a:p>
-            <a:pPr>
-              <a:spcBef>
-                <a:spcPts val="600"/>
-              </a:spcBef>
-              <a:defRPr sz="1600"/>
-            </a:pPr>
-            <a:r>
-              <a:t>Select SINGLE value for:</a:t>
-            </a:r>
-          </a:p>
-          <a:p>
-            <a:pPr>
-              <a:spcBef>
-                <a:spcPts val="400"/>
-              </a:spcBef>
-              <a:defRPr sz="1400">
-                <a:solidFill>
-                  <a:srgbClr val="505050"/>
-                </a:solidFill>
-              </a:defRPr>
-            </a:pPr>
-            <a:r>
-              <a:t>  - DID (one design ID)</a:t>
-            </a:r>
-          </a:p>
-          <a:p>
-            <a:pPr>
-              <a:spcBef>
-                <a:spcPts val="400"/>
-              </a:spcBef>
-              <a:defRPr sz="1400">
-                <a:solidFill>
-                  <a:srgbClr val="505050"/>
-                </a:solidFill>
-              </a:defRPr>
-            </a:pPr>
-            <a:r>
-              <a:t>  - Density (one density)</a:t>
-            </a:r>
-          </a:p>
-          <a:p>
-            <a:pPr>
-              <a:spcBef>
-                <a:spcPts val="400"/>
-              </a:spcBef>
-              <a:defRPr sz="1400">
-                <a:solidFill>
-                  <a:srgbClr val="505050"/>
-                </a:solidFill>
-              </a:defRPr>
-            </a:pPr>
-            <a:r>
-              <a:t>  - Speed (one speed)</a:t>
-            </a:r>
-          </a:p>
-          <a:p>
-            <a:pPr>
-              <a:spcBef>
-                <a:spcPts val="600"/>
-              </a:spcBef>
-              <a:defRPr sz="1600"/>
-            </a:pPr>
-          </a:p>
-          <a:p>
-            <a:pPr>
-              <a:spcBef>
-                <a:spcPts val="600"/>
-              </a:spcBef>
-              <a:defRPr sz="1600"/>
-            </a:pPr>
-            <a:r>
-              <a:t>Click 'Fetch Data' when ready</a:t>
+              <a:spcAft>
+                <a:spcPts val="1200"/>
+              </a:spcAft>
+              <a:defRPr sz="1800">
+                <a:solidFill>
+                  <a:srgbClr val="323232"/>
+                </a:solidFill>
+              </a:defRPr>
+            </a:pPr>
+            <a:r>
+              <a:t>Bookmark this slide!</a:t>
+            </a:r>
+          </a:p>
+          <a:p>
+            <a:pPr>
+              <a:spcAft>
+                <a:spcPts val="1200"/>
+              </a:spcAft>
+              <a:defRPr sz="1800">
+                <a:solidFill>
+                  <a:srgbClr val="323232"/>
+                </a:solidFill>
+              </a:defRPr>
+            </a:pPr>
+          </a:p>
+          <a:p>
+            <a:pPr>
+              <a:spcAft>
+                <a:spcPts val="1200"/>
+              </a:spcAft>
+              <a:defRPr sz="1800">
+                <a:solidFill>
+                  <a:srgbClr val="323232"/>
+                </a:solidFill>
+              </a:defRPr>
+            </a:pPr>
+            <a:r>
+              <a:t>Dashboard URL:</a:t>
+            </a:r>
+          </a:p>
+          <a:p>
+            <a:pPr>
+              <a:spcAft>
+                <a:spcPts val="1200"/>
+              </a:spcAft>
+              <a:defRPr sz="1800">
+                <a:solidFill>
+                  <a:srgbClr val="323232"/>
+                </a:solidFill>
+              </a:defRPr>
+            </a:pPr>
+            <a:r>
+              <a:t>http://bolpedh03.micron.com:8502</a:t>
+            </a:r>
+          </a:p>
+          <a:p>
+            <a:pPr>
+              <a:spcAft>
+                <a:spcPts val="1200"/>
+              </a:spcAft>
+              <a:defRPr sz="1800">
+                <a:solidFill>
+                  <a:srgbClr val="323232"/>
+                </a:solidFill>
+              </a:defRPr>
+            </a:pPr>
+          </a:p>
+          <a:p>
+            <a:pPr>
+              <a:spcAft>
+                <a:spcPts val="1200"/>
+              </a:spcAft>
+              <a:defRPr sz="1800">
+                <a:solidFill>
+                  <a:srgbClr val="323232"/>
+                </a:solidFill>
+              </a:defRPr>
+            </a:pPr>
+            <a:r>
+              <a:t>Key Contact:</a:t>
+            </a:r>
+          </a:p>
+          <a:p>
+            <a:pPr>
+              <a:spcAft>
+                <a:spcPts val="1200"/>
+              </a:spcAft>
+              <a:defRPr sz="1800">
+                <a:solidFill>
+                  <a:srgbClr val="323232"/>
+                </a:solidFill>
+              </a:defRPr>
+            </a:pPr>
+            <a:r>
+              <a:t>Asegaran (Dashboard Owner)</a:t>
+            </a:r>
+          </a:p>
+          <a:p>
+            <a:pPr>
+              <a:spcAft>
+                <a:spcPts val="1200"/>
+              </a:spcAft>
+              <a:defRPr sz="1800">
+                <a:solidFill>
+                  <a:srgbClr val="323232"/>
+                </a:solidFill>
+              </a:defRPr>
+            </a:pPr>
+          </a:p>
+          <a:p>
+            <a:pPr>
+              <a:spcAft>
+                <a:spcPts val="1200"/>
+              </a:spcAft>
+              <a:defRPr sz="1800">
+                <a:solidFill>
+                  <a:srgbClr val="323232"/>
+                </a:solidFill>
+              </a:defRPr>
+            </a:pPr>
+            <a:r>
+              <a:t>Data Source:</a:t>
+            </a:r>
+          </a:p>
+          <a:p>
+            <a:pPr>
+              <a:spcAft>
+                <a:spcPts val="1200"/>
+              </a:spcAft>
+              <a:defRPr sz="1800">
+                <a:solidFill>
+                  <a:srgbClr val="323232"/>
+                </a:solidFill>
+              </a:defRPr>
+            </a:pPr>
+            <a:r>
+              <a:t>frpt/mtsums commands</a:t>
+            </a:r>
+          </a:p>
+          <a:p>
+            <a:pPr>
+              <a:spcAft>
+                <a:spcPts val="1200"/>
+              </a:spcAft>
+              <a:defRPr sz="1800">
+                <a:solidFill>
+                  <a:srgbClr val="323232"/>
+                </a:solidFill>
+              </a:defRPr>
+            </a:pPr>
+          </a:p>
+          <a:p>
+            <a:pPr>
+              <a:spcAft>
+                <a:spcPts val="1200"/>
+              </a:spcAft>
+              <a:defRPr sz="1800">
+                <a:solidFill>
+                  <a:srgbClr val="323232"/>
+                </a:solidFill>
+              </a:defRPr>
+            </a:pPr>
+            <a:r>
+              <a:t>Last Updated: Apr 2026</a:t>
             </a:r>
           </a:p>
         </p:txBody>
@@ -4019,18 +4267,18 @@
         </p:nvSpPr>
         <p:spPr>
           <a:xfrm>
-            <a:off x="5760720" y="1188720"/>
-            <a:ext cx="5943600" cy="5029200"/>
+            <a:off x="5943600" y="1371600"/>
+            <a:ext cx="5760720" cy="5029200"/>
           </a:xfrm>
           <a:prstGeom prst="roundRect">
             <a:avLst/>
           </a:prstGeom>
           <a:solidFill>
-            <a:srgbClr val="F5F5F5"/>
+            <a:srgbClr val="F0F0F0"/>
           </a:solidFill>
           <a:ln>
             <a:solidFill>
-              <a:srgbClr val="C8C8C8"/>
+              <a:srgbClr val="969696"/>
             </a:solidFill>
           </a:ln>
         </p:spPr>
@@ -4064,8 +4312,8 @@
         </p:nvSpPr>
         <p:spPr>
           <a:xfrm>
-            <a:off x="5943600" y="3474720"/>
-            <a:ext cx="5486400" cy="457200"/>
+            <a:off x="6126480" y="1554480"/>
+            <a:ext cx="5394960" cy="4663440"/>
           </a:xfrm>
           <a:prstGeom prst="rect">
             <a:avLst/>
@@ -4073,20 +4321,105 @@
           <a:noFill/>
         </p:spPr>
         <p:txBody>
-          <a:bodyPr wrap="none">
+          <a:bodyPr wrap="square">
             <a:spAutoFit/>
           </a:bodyPr>
           <a:lstStyle/>
           <a:p>
-            <a:pPr algn="ctr">
-              <a:defRPr sz="1400">
-                <a:solidFill>
-                  <a:srgbClr val="787878"/>
-                </a:solidFill>
-              </a:defRPr>
-            </a:pPr>
-            <a:r>
-              <a:t>[Screenshot: Sidebar filters]</a:t>
+            <a:pPr>
+              <a:defRPr sz="1000">
+                <a:solidFill>
+                  <a:srgbClr val="323232"/>
+                </a:solidFill>
+                <a:latin typeface="Courier New"/>
+              </a:defRPr>
+            </a:pPr>
+            <a:r>
+              <a:t>┌─────────────────────────────────────────────────┐</a:t>
+            </a:r>
+            <a:br/>
+            <a:r>
+              <a:t>│            QUICK REFERENCE CARD                 │</a:t>
+            </a:r>
+            <a:br/>
+            <a:r>
+              <a:t>├─────────────────────────────────────────────────┤</a:t>
+            </a:r>
+            <a:br/>
+            <a:r>
+              <a:t>│                                                 │</a:t>
+            </a:r>
+            <a:br/>
+            <a:r>
+              <a:t>│  TARGET LINE COLORS:                            │</a:t>
+            </a:r>
+            <a:br/>
+            <a:r>
+              <a:t>│  ┄┄┄ Blue   = HMFN Target                      │</a:t>
+            </a:r>
+            <a:br/>
+            <a:r>
+              <a:t>│  ┄┄┄ Red    = SLT Target                       │</a:t>
+            </a:r>
+            <a:br/>
+            <a:r>
+              <a:t>│  ┄┄┄ Green  = ELC Target                       │</a:t>
+            </a:r>
+            <a:br/>
+            <a:r>
+              <a:t>│                                                 │</a:t>
+            </a:r>
+            <a:br/>
+            <a:r>
+              <a:t>│  YIELD CALCULATION:                             │</a:t>
+            </a:r>
+            <a:br/>
+            <a:r>
+              <a:t>│  ELC = HMFN × SLT                              │</a:t>
+            </a:r>
+            <a:br/>
+            <a:r>
+              <a:t>│  SLT = HMB1 × QMON                             │</a:t>
+            </a:r>
+            <a:br/>
+            <a:r>
+              <a:t>│                                                 │</a:t>
+            </a:r>
+            <a:br/>
+            <a:r>
+              <a:t>│  KEY TARGETS (Typical):                         │</a:t>
+            </a:r>
+            <a:br/>
+            <a:r>
+              <a:t>│  HMFN: 99% → 99.5%                             │</a:t>
+            </a:r>
+            <a:br/>
+            <a:r>
+              <a:t>│  SLT:  97% → 99%                               │</a:t>
+            </a:r>
+            <a:br/>
+            <a:r>
+              <a:t>│  ELC:  95.54% → 98.51%                         │</a:t>
+            </a:r>
+            <a:br/>
+            <a:r>
+              <a:t>│                                                 │</a:t>
+            </a:r>
+            <a:br/>
+            <a:r>
+              <a:t>│  TROUBLESHOOTING:                               │</a:t>
+            </a:r>
+            <a:br/>
+            <a:r>
+              <a:t>│  No targets? → Select single config            │</a:t>
+            </a:r>
+            <a:br/>
+            <a:r>
+              <a:t>│  Warning? → Configs don't match                │</a:t>
+            </a:r>
+            <a:br/>
+            <a:r>
+              <a:t>└─────────────────────────────────────────────────┘</a:t>
             </a:r>
           </a:p>
         </p:txBody>
@@ -4099,7 +4432,7 @@
 </p:sld>
 </file>
 
-<file path=ppt/slides/slide4.xml><?xml version="1.0" encoding="utf-8"?>
+<file path=ppt/slides/slide2.xml><?xml version="1.0" encoding="utf-8"?>
 <p:sld xmlns:a="http://schemas.openxmlformats.org/drawingml/2006/main" xmlns:p="http://schemas.openxmlformats.org/presentationml/2006/main" xmlns:r="http://schemas.openxmlformats.org/officeDocument/2006/relationships">
   <p:cSld>
     <p:spTree>
@@ -4118,13 +4451,13 @@
         <p:spPr>
           <a:xfrm>
             <a:off x="0" y="0"/>
-            <a:ext cx="12191695" cy="914400"/>
+            <a:ext cx="12191695" cy="1097280"/>
           </a:xfrm>
           <a:prstGeom prst="rect">
             <a:avLst/>
           </a:prstGeom>
           <a:solidFill>
-            <a:srgbClr val="1A237E"/>
+            <a:srgbClr val="003366"/>
           </a:solidFill>
           <a:ln>
             <a:noFill/>
@@ -4160,8 +4493,8 @@
         </p:nvSpPr>
         <p:spPr>
           <a:xfrm>
-            <a:off x="457200" y="182880"/>
-            <a:ext cx="10972800" cy="548640"/>
+            <a:off x="457200" y="274320"/>
+            <a:ext cx="10972800" cy="731520"/>
           </a:xfrm>
           <a:prstGeom prst="rect">
             <a:avLst/>
@@ -4175,14 +4508,14 @@
           <a:lstStyle/>
           <a:p>
             <a:pPr>
-              <a:defRPr sz="2800" b="1">
+              <a:defRPr sz="3200" b="1">
                 <a:solidFill>
                   <a:srgbClr val="FFFFFF"/>
                 </a:solidFill>
               </a:defRPr>
             </a:pPr>
             <a:r>
-              <a:t>Step 2: Select Series to Display</a:t>
+              <a:t>What is the Module ELC Yield Tab?</a:t>
             </a:r>
           </a:p>
         </p:txBody>
@@ -4195,8 +4528,8 @@
         </p:nvSpPr>
         <p:spPr>
           <a:xfrm>
-            <a:off x="457200" y="1188720"/>
-            <a:ext cx="5029200" cy="5029200"/>
+            <a:off x="457200" y="1371600"/>
+            <a:ext cx="11277295" cy="5029200"/>
           </a:xfrm>
           <a:prstGeom prst="rect">
             <a:avLst/>
@@ -4210,235 +4543,146 @@
           <a:lstStyle/>
           <a:p>
             <a:pPr>
-              <a:spcBef>
-                <a:spcPts val="1400"/>
-              </a:spcBef>
-              <a:defRPr sz="1800" b="1">
-                <a:solidFill>
-                  <a:srgbClr val="3F51B5"/>
-                </a:solidFill>
-              </a:defRPr>
-            </a:pPr>
-            <a:r>
-              <a:t>Series Selector (Section 2)</a:t>
-            </a:r>
-          </a:p>
-          <a:p>
-            <a:pPr>
-              <a:spcBef>
-                <a:spcPts val="600"/>
-              </a:spcBef>
-              <a:defRPr sz="1600"/>
-            </a:pPr>
-            <a:r>
-              <a:t>Format: DID_STEP_DENSITY_SPEED</a:t>
-            </a:r>
-          </a:p>
-          <a:p>
-            <a:pPr>
-              <a:spcBef>
-                <a:spcPts val="600"/>
-              </a:spcBef>
-              <a:defRPr sz="1600"/>
-            </a:pPr>
-            <a:r>
-              <a:t>Example: Y62P_ELC_128GB_6400MTPS</a:t>
-            </a:r>
-          </a:p>
-          <a:p>
-            <a:pPr>
-              <a:spcBef>
-                <a:spcPts val="600"/>
-              </a:spcBef>
-              <a:defRPr sz="1600"/>
-            </a:pPr>
-          </a:p>
-          <a:p>
-            <a:pPr>
-              <a:spcBef>
-                <a:spcPts val="1400"/>
-              </a:spcBef>
-              <a:defRPr sz="1800" b="1">
-                <a:solidFill>
-                  <a:srgbClr val="3F51B5"/>
-                </a:solidFill>
-              </a:defRPr>
-            </a:pPr>
-            <a:r>
-              <a:t>Quick Selection Buttons</a:t>
-            </a:r>
-          </a:p>
-          <a:p>
-            <a:pPr>
-              <a:spcBef>
-                <a:spcPts val="600"/>
-              </a:spcBef>
-              <a:defRPr sz="1600"/>
-            </a:pPr>
-            <a:r>
-              <a:t>'Select All HMFN' - adds all HMFN series</a:t>
-            </a:r>
-          </a:p>
-          <a:p>
-            <a:pPr>
-              <a:spcBef>
-                <a:spcPts val="600"/>
-              </a:spcBef>
-              <a:defRPr sz="1600"/>
-            </a:pPr>
-            <a:r>
-              <a:t>'Select All SLT' - adds all SLT series</a:t>
-            </a:r>
-          </a:p>
-          <a:p>
-            <a:pPr>
-              <a:spcBef>
-                <a:spcPts val="600"/>
-              </a:spcBef>
-              <a:defRPr sz="1600"/>
-            </a:pPr>
-            <a:r>
-              <a:t>'Select All ELC' - adds all ELC series</a:t>
-            </a:r>
-          </a:p>
-          <a:p>
-            <a:pPr>
-              <a:spcBef>
-                <a:spcPts val="600"/>
-              </a:spcBef>
-              <a:defRPr sz="1600"/>
-            </a:pPr>
-          </a:p>
-          <a:p>
-            <a:pPr>
-              <a:spcBef>
-                <a:spcPts val="1400"/>
-              </a:spcBef>
-              <a:defRPr sz="1800" b="1">
-                <a:solidFill>
-                  <a:srgbClr val="3F51B5"/>
-                </a:solidFill>
-              </a:defRPr>
-            </a:pPr>
-            <a:r>
-              <a:t>For Target Lines</a:t>
-            </a:r>
-          </a:p>
-          <a:p>
-            <a:pPr>
-              <a:spcBef>
-                <a:spcPts val="600"/>
-              </a:spcBef>
-              <a:defRPr sz="1600"/>
-            </a:pPr>
-            <a:r>
-              <a:t>All selected series must share:</a:t>
-            </a:r>
-          </a:p>
-          <a:p>
-            <a:pPr>
-              <a:spcBef>
-                <a:spcPts val="400"/>
-              </a:spcBef>
-              <a:defRPr sz="1400">
-                <a:solidFill>
-                  <a:srgbClr val="505050"/>
-                </a:solidFill>
-              </a:defRPr>
-            </a:pPr>
-            <a:r>
-              <a:t>  - Same DID + Same Density + Same Speed</a:t>
-            </a:r>
-          </a:p>
-          <a:p>
-            <a:pPr>
-              <a:spcBef>
-                <a:spcPts val="600"/>
-              </a:spcBef>
-              <a:defRPr sz="1600"/>
-            </a:pPr>
-            <a:r>
-              <a:t>Mixed configs = warning shown</a:t>
-            </a:r>
-          </a:p>
-        </p:txBody>
-      </p:sp>
-      <p:sp>
-        <p:nvSpPr>
-          <p:cNvPr id="5" name="Rounded Rectangle 4"/>
-          <p:cNvSpPr/>
-          <p:nvPr/>
-        </p:nvSpPr>
-        <p:spPr>
-          <a:xfrm>
-            <a:off x="5760720" y="1188720"/>
-            <a:ext cx="5943600" cy="5029200"/>
-          </a:xfrm>
-          <a:prstGeom prst="roundRect">
-            <a:avLst/>
-          </a:prstGeom>
-          <a:solidFill>
-            <a:srgbClr val="F5F5F5"/>
-          </a:solidFill>
-          <a:ln>
-            <a:solidFill>
-              <a:srgbClr val="C8C8C8"/>
-            </a:solidFill>
-          </a:ln>
-        </p:spPr>
-        <p:style>
-          <a:lnRef idx="1">
-            <a:schemeClr val="accent1"/>
-          </a:lnRef>
-          <a:fillRef idx="3">
-            <a:schemeClr val="accent1"/>
-          </a:fillRef>
-          <a:effectRef idx="2">
-            <a:schemeClr val="accent1"/>
-          </a:effectRef>
-          <a:fontRef idx="minor">
-            <a:schemeClr val="lt1"/>
-          </a:fontRef>
-        </p:style>
-        <p:txBody>
-          <a:bodyPr rtlCol="0" anchor="ctr"/>
-          <a:lstStyle/>
-          <a:p>
-            <a:pPr algn="ctr"/>
-          </a:p>
-        </p:txBody>
-      </p:sp>
-      <p:sp>
-        <p:nvSpPr>
-          <p:cNvPr id="6" name="TextBox 5"/>
-          <p:cNvSpPr txBox="1"/>
-          <p:nvPr/>
-        </p:nvSpPr>
-        <p:spPr>
-          <a:xfrm>
-            <a:off x="5943600" y="3474720"/>
-            <a:ext cx="5486400" cy="457200"/>
-          </a:xfrm>
-          <a:prstGeom prst="rect">
-            <a:avLst/>
-          </a:prstGeom>
-          <a:noFill/>
-        </p:spPr>
-        <p:txBody>
-          <a:bodyPr wrap="none">
-            <a:spAutoFit/>
-          </a:bodyPr>
-          <a:lstStyle/>
-          <a:p>
-            <a:pPr algn="ctr">
-              <a:defRPr sz="1400">
-                <a:solidFill>
-                  <a:srgbClr val="787878"/>
-                </a:solidFill>
-              </a:defRPr>
-            </a:pPr>
-            <a:r>
-              <a:t>[Screenshot: Series selector]</a:t>
+              <a:spcAft>
+                <a:spcPts val="1200"/>
+              </a:spcAft>
+              <a:defRPr sz="1800">
+                <a:solidFill>
+                  <a:srgbClr val="323232"/>
+                </a:solidFill>
+              </a:defRPr>
+            </a:pPr>
+            <a:r>
+              <a:t>📊 Purpose: Track weekly yield trends for HMFN, SLT, and ELC steps</a:t>
+            </a:r>
+          </a:p>
+          <a:p>
+            <a:pPr>
+              <a:spcAft>
+                <a:spcPts val="1200"/>
+              </a:spcAft>
+              <a:defRPr sz="1800">
+                <a:solidFill>
+                  <a:srgbClr val="323232"/>
+                </a:solidFill>
+              </a:defRPr>
+            </a:pPr>
+          </a:p>
+          <a:p>
+            <a:pPr>
+              <a:spcAft>
+                <a:spcPts val="1200"/>
+              </a:spcAft>
+              <a:defRPr sz="1800">
+                <a:solidFill>
+                  <a:srgbClr val="323232"/>
+                </a:solidFill>
+              </a:defRPr>
+            </a:pPr>
+            <a:r>
+              <a:t>📈 Features:</a:t>
+            </a:r>
+          </a:p>
+          <a:p>
+            <a:pPr>
+              <a:spcAft>
+                <a:spcPts val="1200"/>
+              </a:spcAft>
+              <a:defRPr sz="1800">
+                <a:solidFill>
+                  <a:srgbClr val="323232"/>
+                </a:solidFill>
+              </a:defRPr>
+            </a:pPr>
+            <a:r>
+              <a:t>   • Multi-series yield comparison across configs</a:t>
+            </a:r>
+          </a:p>
+          <a:p>
+            <a:pPr>
+              <a:spcAft>
+                <a:spcPts val="1200"/>
+              </a:spcAft>
+              <a:defRPr sz="1800">
+                <a:solidFill>
+                  <a:srgbClr val="323232"/>
+                </a:solidFill>
+              </a:defRPr>
+            </a:pPr>
+            <a:r>
+              <a:t>   • D1 projection curves showing targets</a:t>
+            </a:r>
+          </a:p>
+          <a:p>
+            <a:pPr>
+              <a:spcAft>
+                <a:spcPts val="1200"/>
+              </a:spcAft>
+              <a:defRPr sz="1800">
+                <a:solidFill>
+                  <a:srgbClr val="323232"/>
+                </a:solidFill>
+              </a:defRPr>
+            </a:pPr>
+            <a:r>
+              <a:t>   • HMFN × SLT = ELC calculation verification</a:t>
+            </a:r>
+          </a:p>
+          <a:p>
+            <a:pPr>
+              <a:spcAft>
+                <a:spcPts val="1200"/>
+              </a:spcAft>
+              <a:defRPr sz="1800">
+                <a:solidFill>
+                  <a:srgbClr val="323232"/>
+                </a:solidFill>
+              </a:defRPr>
+            </a:pPr>
+            <a:r>
+              <a:t>   • 4-week rolling yield averages</a:t>
+            </a:r>
+          </a:p>
+          <a:p>
+            <a:pPr>
+              <a:spcAft>
+                <a:spcPts val="1200"/>
+              </a:spcAft>
+              <a:defRPr sz="1800">
+                <a:solidFill>
+                  <a:srgbClr val="323232"/>
+                </a:solidFill>
+              </a:defRPr>
+            </a:pPr>
+          </a:p>
+          <a:p>
+            <a:pPr>
+              <a:spcAft>
+                <a:spcPts val="1200"/>
+              </a:spcAft>
+              <a:defRPr sz="1800">
+                <a:solidFill>
+                  <a:srgbClr val="323232"/>
+                </a:solidFill>
+              </a:defRPr>
+            </a:pPr>
+            <a:r>
+              <a:t>⚙️ Key Capability:</a:t>
+            </a:r>
+          </a:p>
+          <a:p>
+            <a:pPr>
+              <a:spcAft>
+                <a:spcPts val="1200"/>
+              </a:spcAft>
+              <a:defRPr sz="1800">
+                <a:solidFill>
+                  <a:srgbClr val="323232"/>
+                </a:solidFill>
+              </a:defRPr>
+            </a:pPr>
+            <a:r>
+              <a:t>   Enable target projection lines to compare actual vs D1 targets</a:t>
             </a:r>
           </a:p>
         </p:txBody>
@@ -4451,7 +4695,7 @@
 </p:sld>
 </file>
 
-<file path=ppt/slides/slide5.xml><?xml version="1.0" encoding="utf-8"?>
+<file path=ppt/slides/slide3.xml><?xml version="1.0" encoding="utf-8"?>
 <p:sld xmlns:a="http://schemas.openxmlformats.org/drawingml/2006/main" xmlns:p="http://schemas.openxmlformats.org/presentationml/2006/main" xmlns:r="http://schemas.openxmlformats.org/officeDocument/2006/relationships">
   <p:cSld>
     <p:spTree>
@@ -4470,13 +4714,13 @@
         <p:spPr>
           <a:xfrm>
             <a:off x="0" y="0"/>
-            <a:ext cx="12191695" cy="914400"/>
+            <a:ext cx="12191695" cy="1097280"/>
           </a:xfrm>
           <a:prstGeom prst="rect">
             <a:avLst/>
           </a:prstGeom>
           <a:solidFill>
-            <a:srgbClr val="1A237E"/>
+            <a:srgbClr val="003366"/>
           </a:solidFill>
           <a:ln>
             <a:noFill/>
@@ -4512,8 +4756,8 @@
         </p:nvSpPr>
         <p:spPr>
           <a:xfrm>
-            <a:off x="457200" y="182880"/>
-            <a:ext cx="10972800" cy="548640"/>
+            <a:off x="457200" y="274320"/>
+            <a:ext cx="10972800" cy="731520"/>
           </a:xfrm>
           <a:prstGeom prst="rect">
             <a:avLst/>
@@ -4527,14 +4771,14 @@
           <a:lstStyle/>
           <a:p>
             <a:pPr>
-              <a:defRPr sz="2800" b="1">
+              <a:defRPr sz="3200" b="1">
                 <a:solidFill>
                   <a:srgbClr val="FFFFFF"/>
                 </a:solidFill>
               </a:defRPr>
             </a:pPr>
             <a:r>
-              <a:t>Step 3: Enable Target Curves</a:t>
+              <a:t>Step 1: Configure Sidebar Filters</a:t>
             </a:r>
           </a:p>
         </p:txBody>
@@ -4547,7 +4791,7 @@
         </p:nvSpPr>
         <p:spPr>
           <a:xfrm>
-            <a:off x="457200" y="1188720"/>
+            <a:off x="457200" y="1371600"/>
             <a:ext cx="5029200" cy="5029200"/>
           </a:xfrm>
           <a:prstGeom prst="rect">
@@ -4562,144 +4806,200 @@
           <a:lstStyle/>
           <a:p>
             <a:pPr>
-              <a:spcBef>
-                <a:spcPts val="1400"/>
-              </a:spcBef>
-              <a:defRPr sz="1800" b="1">
-                <a:solidFill>
-                  <a:srgbClr val="3F51B5"/>
-                </a:solidFill>
-              </a:defRPr>
-            </a:pPr>
-            <a:r>
-              <a:t>Target Controls (Above Chart)</a:t>
-            </a:r>
-          </a:p>
-          <a:p>
-            <a:pPr>
-              <a:spcBef>
-                <a:spcPts val="600"/>
-              </a:spcBef>
-              <a:defRPr sz="1600"/>
-            </a:pPr>
-            <a:r>
-              <a:t>Target Curve dropdown: Select D1 or D0</a:t>
-            </a:r>
-          </a:p>
-          <a:p>
-            <a:pPr>
-              <a:spcBef>
-                <a:spcPts val="400"/>
-              </a:spcBef>
-              <a:defRPr sz="1400">
-                <a:solidFill>
-                  <a:srgbClr val="505050"/>
-                </a:solidFill>
-              </a:defRPr>
-            </a:pPr>
-            <a:r>
-              <a:t>  - D1 = Active projection (use this)</a:t>
-            </a:r>
-          </a:p>
-          <a:p>
-            <a:pPr>
-              <a:spcBef>
-                <a:spcPts val="400"/>
-              </a:spcBef>
-              <a:defRPr sz="1400">
-                <a:solidFill>
-                  <a:srgbClr val="505050"/>
-                </a:solidFill>
-              </a:defRPr>
-            </a:pPr>
-            <a:r>
-              <a:t>  - D0 = Historical reference</a:t>
-            </a:r>
-          </a:p>
-          <a:p>
-            <a:pPr>
-              <a:spcBef>
-                <a:spcPts val="600"/>
-              </a:spcBef>
-              <a:defRPr sz="1600"/>
-            </a:pPr>
-          </a:p>
-          <a:p>
-            <a:pPr>
-              <a:spcBef>
-                <a:spcPts val="600"/>
-              </a:spcBef>
-              <a:defRPr sz="1600"/>
-            </a:pPr>
-            <a:r>
-              <a:t>Show Targets checkbox: Enable target lines</a:t>
-            </a:r>
-          </a:p>
-          <a:p>
-            <a:pPr>
-              <a:spcBef>
-                <a:spcPts val="600"/>
-              </a:spcBef>
-              <a:defRPr sz="1600"/>
-            </a:pPr>
-            <a:r>
-              <a:t>+ Future (8wk): Extend targets 8 weeks</a:t>
-            </a:r>
-          </a:p>
-          <a:p>
-            <a:pPr>
-              <a:spcBef>
-                <a:spcPts val="600"/>
-              </a:spcBef>
-              <a:defRPr sz="1600"/>
-            </a:pPr>
-          </a:p>
-          <a:p>
-            <a:pPr>
-              <a:spcBef>
-                <a:spcPts val="1400"/>
-              </a:spcBef>
-              <a:defRPr sz="1800" b="1">
-                <a:solidFill>
-                  <a:srgbClr val="3F51B5"/>
-                </a:solidFill>
-              </a:defRPr>
-            </a:pPr>
-            <a:r>
-              <a:t>Target Line Colors</a:t>
-            </a:r>
-          </a:p>
-          <a:p>
-            <a:pPr>
-              <a:spcBef>
-                <a:spcPts val="600"/>
-              </a:spcBef>
-              <a:defRPr sz="1600"/>
-            </a:pPr>
-            <a:r>
-              <a:t>HMFN: Blue dotted line</a:t>
-            </a:r>
-          </a:p>
-          <a:p>
-            <a:pPr>
-              <a:spcBef>
-                <a:spcPts val="600"/>
-              </a:spcBef>
-              <a:defRPr sz="1600"/>
-            </a:pPr>
-            <a:r>
-              <a:t>SLT: Red dotted line</a:t>
-            </a:r>
-          </a:p>
-          <a:p>
-            <a:pPr>
-              <a:spcBef>
-                <a:spcPts val="600"/>
-              </a:spcBef>
-              <a:defRPr sz="1600"/>
-            </a:pPr>
-            <a:r>
-              <a:t>ELC: Green dotted line</a:t>
+              <a:spcAft>
+                <a:spcPts val="1200"/>
+              </a:spcAft>
+              <a:defRPr sz="1800">
+                <a:solidFill>
+                  <a:srgbClr val="323232"/>
+                </a:solidFill>
+              </a:defRPr>
+            </a:pPr>
+            <a:r>
+              <a:t>1. Select Form Factor(s):</a:t>
+            </a:r>
+          </a:p>
+          <a:p>
+            <a:pPr>
+              <a:spcAft>
+                <a:spcPts val="1200"/>
+              </a:spcAft>
+              <a:defRPr sz="1800">
+                <a:solidFill>
+                  <a:srgbClr val="323232"/>
+                </a:solidFill>
+              </a:defRPr>
+            </a:pPr>
+            <a:r>
+              <a:t>   SOCAMM or SOCAMM2</a:t>
+            </a:r>
+          </a:p>
+          <a:p>
+            <a:pPr>
+              <a:spcAft>
+                <a:spcPts val="1200"/>
+              </a:spcAft>
+              <a:defRPr sz="1800">
+                <a:solidFill>
+                  <a:srgbClr val="323232"/>
+                </a:solidFill>
+              </a:defRPr>
+            </a:pPr>
+          </a:p>
+          <a:p>
+            <a:pPr>
+              <a:spcAft>
+                <a:spcPts val="1200"/>
+              </a:spcAft>
+              <a:defRPr sz="1800">
+                <a:solidFill>
+                  <a:srgbClr val="323232"/>
+                </a:solidFill>
+              </a:defRPr>
+            </a:pPr>
+            <a:r>
+              <a:t>2. Select Test Step(s):</a:t>
+            </a:r>
+          </a:p>
+          <a:p>
+            <a:pPr>
+              <a:spcAft>
+                <a:spcPts val="1200"/>
+              </a:spcAft>
+              <a:defRPr sz="1800">
+                <a:solidFill>
+                  <a:srgbClr val="323232"/>
+                </a:solidFill>
+              </a:defRPr>
+            </a:pPr>
+            <a:r>
+              <a:t>   HMFN, HMB1, QMON</a:t>
+            </a:r>
+          </a:p>
+          <a:p>
+            <a:pPr>
+              <a:spcAft>
+                <a:spcPts val="1200"/>
+              </a:spcAft>
+              <a:defRPr sz="1800">
+                <a:solidFill>
+                  <a:srgbClr val="323232"/>
+                </a:solidFill>
+              </a:defRPr>
+            </a:pPr>
+          </a:p>
+          <a:p>
+            <a:pPr>
+              <a:spcAft>
+                <a:spcPts val="1200"/>
+              </a:spcAft>
+              <a:defRPr sz="1800">
+                <a:solidFill>
+                  <a:srgbClr val="323232"/>
+                </a:solidFill>
+              </a:defRPr>
+            </a:pPr>
+            <a:r>
+              <a:t>3. Select Design ID(s):</a:t>
+            </a:r>
+          </a:p>
+          <a:p>
+            <a:pPr>
+              <a:spcAft>
+                <a:spcPts val="1200"/>
+              </a:spcAft>
+              <a:defRPr sz="1800">
+                <a:solidFill>
+                  <a:srgbClr val="323232"/>
+                </a:solidFill>
+              </a:defRPr>
+            </a:pPr>
+            <a:r>
+              <a:t>   Y42M, Y62P, Y6CP, Y63N, Y73P</a:t>
+            </a:r>
+          </a:p>
+          <a:p>
+            <a:pPr>
+              <a:spcAft>
+                <a:spcPts val="1200"/>
+              </a:spcAft>
+              <a:defRPr sz="1800">
+                <a:solidFill>
+                  <a:srgbClr val="323232"/>
+                </a:solidFill>
+              </a:defRPr>
+            </a:pPr>
+          </a:p>
+          <a:p>
+            <a:pPr>
+              <a:spcAft>
+                <a:spcPts val="1200"/>
+              </a:spcAft>
+              <a:defRPr sz="1800">
+                <a:solidFill>
+                  <a:srgbClr val="323232"/>
+                </a:solidFill>
+              </a:defRPr>
+            </a:pPr>
+            <a:r>
+              <a:t>4. Select Facility:</a:t>
+            </a:r>
+          </a:p>
+          <a:p>
+            <a:pPr>
+              <a:spcAft>
+                <a:spcPts val="1200"/>
+              </a:spcAft>
+              <a:defRPr sz="1800">
+                <a:solidFill>
+                  <a:srgbClr val="323232"/>
+                </a:solidFill>
+              </a:defRPr>
+            </a:pPr>
+            <a:r>
+              <a:t>   PENANG, FAB10B, etc.</a:t>
+            </a:r>
+          </a:p>
+          <a:p>
+            <a:pPr>
+              <a:spcAft>
+                <a:spcPts val="1200"/>
+              </a:spcAft>
+              <a:defRPr sz="1800">
+                <a:solidFill>
+                  <a:srgbClr val="323232"/>
+                </a:solidFill>
+              </a:defRPr>
+            </a:pPr>
+          </a:p>
+          <a:p>
+            <a:pPr>
+              <a:spcAft>
+                <a:spcPts val="1200"/>
+              </a:spcAft>
+              <a:defRPr sz="1800">
+                <a:solidFill>
+                  <a:srgbClr val="323232"/>
+                </a:solidFill>
+              </a:defRPr>
+            </a:pPr>
+            <a:r>
+              <a:t>5. Set Work Week Range:</a:t>
+            </a:r>
+          </a:p>
+          <a:p>
+            <a:pPr>
+              <a:spcAft>
+                <a:spcPts val="1200"/>
+              </a:spcAft>
+              <a:defRPr sz="1800">
+                <a:solidFill>
+                  <a:srgbClr val="323232"/>
+                </a:solidFill>
+              </a:defRPr>
+            </a:pPr>
+            <a:r>
+              <a:t>   Year + Start/End weeks</a:t>
             </a:r>
           </a:p>
         </p:txBody>
@@ -4712,18 +5012,18 @@
         </p:nvSpPr>
         <p:spPr>
           <a:xfrm>
-            <a:off x="5760720" y="1188720"/>
-            <a:ext cx="5943600" cy="5029200"/>
+            <a:off x="5943600" y="1371600"/>
+            <a:ext cx="5760720" cy="5029200"/>
           </a:xfrm>
           <a:prstGeom prst="roundRect">
             <a:avLst/>
           </a:prstGeom>
           <a:solidFill>
-            <a:srgbClr val="F5F5F5"/>
+            <a:srgbClr val="F0F0F0"/>
           </a:solidFill>
           <a:ln>
             <a:solidFill>
-              <a:srgbClr val="C8C8C8"/>
+              <a:srgbClr val="969696"/>
             </a:solidFill>
           </a:ln>
         </p:spPr>
@@ -4757,8 +5057,8 @@
         </p:nvSpPr>
         <p:spPr>
           <a:xfrm>
-            <a:off x="5943600" y="3474720"/>
-            <a:ext cx="5486400" cy="457200"/>
+            <a:off x="6126480" y="1554480"/>
+            <a:ext cx="5394960" cy="4663440"/>
           </a:xfrm>
           <a:prstGeom prst="rect">
             <a:avLst/>
@@ -4766,20 +5066,105 @@
           <a:noFill/>
         </p:spPr>
         <p:txBody>
-          <a:bodyPr wrap="none">
+          <a:bodyPr wrap="square">
             <a:spAutoFit/>
           </a:bodyPr>
           <a:lstStyle/>
           <a:p>
-            <a:pPr algn="ctr">
-              <a:defRPr sz="1400">
-                <a:solidFill>
-                  <a:srgbClr val="787878"/>
-                </a:solidFill>
-              </a:defRPr>
-            </a:pPr>
-            <a:r>
-              <a:t>[Screenshot: Target controls]</a:t>
+            <a:pPr>
+              <a:defRPr sz="1000">
+                <a:solidFill>
+                  <a:srgbClr val="323232"/>
+                </a:solidFill>
+                <a:latin typeface="Courier New"/>
+              </a:defRPr>
+            </a:pPr>
+            <a:r>
+              <a:t>┌──────────────────────┐</a:t>
+            </a:r>
+            <a:br/>
+            <a:r>
+              <a:t>│  🎯 Module Yield     │</a:t>
+            </a:r>
+            <a:br/>
+            <a:r>
+              <a:t>│     Dashboard        │</a:t>
+            </a:r>
+            <a:br/>
+            <a:r>
+              <a:t>├──────────────────────┤</a:t>
+            </a:r>
+            <a:br/>
+            <a:r>
+              <a:t>│ Form Factor          │</a:t>
+            </a:r>
+            <a:br/>
+            <a:r>
+              <a:t>│ [■] SOCAMM           │</a:t>
+            </a:r>
+            <a:br/>
+            <a:r>
+              <a:t>│ [■] SOCAMM2          │</a:t>
+            </a:r>
+            <a:br/>
+            <a:r>
+              <a:t>├──────────────────────┤</a:t>
+            </a:r>
+            <a:br/>
+            <a:r>
+              <a:t>│ Test Step            │</a:t>
+            </a:r>
+            <a:br/>
+            <a:r>
+              <a:t>│ [■] HMFN             │</a:t>
+            </a:r>
+            <a:br/>
+            <a:r>
+              <a:t>│ [■] HMB1             │</a:t>
+            </a:r>
+            <a:br/>
+            <a:r>
+              <a:t>│ [■] QMON             │</a:t>
+            </a:r>
+            <a:br/>
+            <a:r>
+              <a:t>├──────────────────────┤</a:t>
+            </a:r>
+            <a:br/>
+            <a:r>
+              <a:t>│ Design ID            │</a:t>
+            </a:r>
+            <a:br/>
+            <a:r>
+              <a:t>│ [■] Y6CP             │</a:t>
+            </a:r>
+            <a:br/>
+            <a:r>
+              <a:t>├──────────────────────┤</a:t>
+            </a:r>
+            <a:br/>
+            <a:r>
+              <a:t>│ Facility             │</a:t>
+            </a:r>
+            <a:br/>
+            <a:r>
+              <a:t>│ [■] PENANG           │</a:t>
+            </a:r>
+            <a:br/>
+            <a:r>
+              <a:t>├──────────────────────┤</a:t>
+            </a:r>
+            <a:br/>
+            <a:r>
+              <a:t>│ Work Week: 2026      │</a:t>
+            </a:r>
+            <a:br/>
+            <a:r>
+              <a:t>│ Start: 06  End: 15   │</a:t>
+            </a:r>
+            <a:br/>
+            <a:r>
+              <a:t>└──────────────────────┘</a:t>
             </a:r>
           </a:p>
         </p:txBody>
@@ -4792,7 +5177,7 @@
 </p:sld>
 </file>
 
-<file path=ppt/slides/slide6.xml><?xml version="1.0" encoding="utf-8"?>
+<file path=ppt/slides/slide4.xml><?xml version="1.0" encoding="utf-8"?>
 <p:sld xmlns:a="http://schemas.openxmlformats.org/drawingml/2006/main" xmlns:p="http://schemas.openxmlformats.org/presentationml/2006/main" xmlns:r="http://schemas.openxmlformats.org/officeDocument/2006/relationships">
   <p:cSld>
     <p:spTree>
@@ -4811,13 +5196,13 @@
         <p:spPr>
           <a:xfrm>
             <a:off x="0" y="0"/>
-            <a:ext cx="12191695" cy="914400"/>
+            <a:ext cx="12191695" cy="1097280"/>
           </a:xfrm>
           <a:prstGeom prst="rect">
             <a:avLst/>
           </a:prstGeom>
           <a:solidFill>
-            <a:srgbClr val="1A237E"/>
+            <a:srgbClr val="003366"/>
           </a:solidFill>
           <a:ln>
             <a:noFill/>
@@ -4853,8 +5238,8 @@
         </p:nvSpPr>
         <p:spPr>
           <a:xfrm>
-            <a:off x="457200" y="182880"/>
-            <a:ext cx="10972800" cy="548640"/>
+            <a:off x="457200" y="274320"/>
+            <a:ext cx="10972800" cy="731520"/>
           </a:xfrm>
           <a:prstGeom prst="rect">
             <a:avLst/>
@@ -4868,14 +5253,14 @@
           <a:lstStyle/>
           <a:p>
             <a:pPr>
-              <a:defRPr sz="2800" b="1">
+              <a:defRPr sz="3200" b="1">
                 <a:solidFill>
                   <a:srgbClr val="FFFFFF"/>
                 </a:solidFill>
               </a:defRPr>
             </a:pPr>
             <a:r>
-              <a:t>Step 4: Interpret the Chart</a:t>
+              <a:t>Step 2: Navigate to Module ELC Yield Tab</a:t>
             </a:r>
           </a:p>
         </p:txBody>
@@ -4888,7 +5273,7 @@
         </p:nvSpPr>
         <p:spPr>
           <a:xfrm>
-            <a:off x="457200" y="1188720"/>
+            <a:off x="457200" y="1371600"/>
             <a:ext cx="5029200" cy="5029200"/>
           </a:xfrm>
           <a:prstGeom prst="rect">
@@ -4903,151 +5288,140 @@
           <a:lstStyle/>
           <a:p>
             <a:pPr>
-              <a:spcBef>
-                <a:spcPts val="1400"/>
-              </a:spcBef>
-              <a:defRPr sz="1800" b="1">
-                <a:solidFill>
-                  <a:srgbClr val="3F51B5"/>
-                </a:solidFill>
-              </a:defRPr>
-            </a:pPr>
-            <a:r>
-              <a:t>Solid Lines = Actual Yield</a:t>
-            </a:r>
-          </a:p>
-          <a:p>
-            <a:pPr>
-              <a:spcBef>
-                <a:spcPts val="600"/>
-              </a:spcBef>
-              <a:defRPr sz="1600"/>
-            </a:pPr>
-            <a:r>
-              <a:t>Your real production performance</a:t>
-            </a:r>
-          </a:p>
-          <a:p>
-            <a:pPr>
-              <a:spcBef>
-                <a:spcPts val="600"/>
-              </a:spcBef>
-              <a:defRPr sz="1600"/>
-            </a:pPr>
-            <a:r>
-              <a:t>Each config has unique color</a:t>
-            </a:r>
-          </a:p>
-          <a:p>
-            <a:pPr>
-              <a:spcBef>
-                <a:spcPts val="600"/>
-              </a:spcBef>
-              <a:defRPr sz="1600"/>
-            </a:pPr>
-          </a:p>
-          <a:p>
-            <a:pPr>
-              <a:spcBef>
-                <a:spcPts val="1400"/>
-              </a:spcBef>
-              <a:defRPr sz="1800" b="1">
-                <a:solidFill>
-                  <a:srgbClr val="3F51B5"/>
-                </a:solidFill>
-              </a:defRPr>
-            </a:pPr>
-            <a:r>
-              <a:t>Dotted Lines = Target</a:t>
-            </a:r>
-          </a:p>
-          <a:p>
-            <a:pPr>
-              <a:spcBef>
-                <a:spcPts val="600"/>
-              </a:spcBef>
-              <a:defRPr sz="1600"/>
-            </a:pPr>
-            <a:r>
-              <a:t>D1 projection for that config</a:t>
-            </a:r>
-          </a:p>
-          <a:p>
-            <a:pPr>
-              <a:spcBef>
-                <a:spcPts val="600"/>
-              </a:spcBef>
-              <a:defRPr sz="1600"/>
-            </a:pPr>
-            <a:r>
-              <a:t>Gap = Actual - Target</a:t>
-            </a:r>
-          </a:p>
-          <a:p>
-            <a:pPr>
-              <a:spcBef>
-                <a:spcPts val="600"/>
-              </a:spcBef>
-              <a:defRPr sz="1600"/>
-            </a:pPr>
-          </a:p>
-          <a:p>
-            <a:pPr>
-              <a:spcBef>
-                <a:spcPts val="1400"/>
-              </a:spcBef>
-              <a:defRPr sz="1800" b="1">
-                <a:solidFill>
-                  <a:srgbClr val="3F51B5"/>
-                </a:solidFill>
-              </a:defRPr>
-            </a:pPr>
-            <a:r>
-              <a:t>Chart Controls</a:t>
-            </a:r>
-          </a:p>
-          <a:p>
-            <a:pPr>
-              <a:spcBef>
-                <a:spcPts val="600"/>
-              </a:spcBef>
-              <a:defRPr sz="1600"/>
-            </a:pPr>
-            <a:r>
-              <a:t>Y-axis min %: Zoom in (set to 90+)</a:t>
-            </a:r>
-          </a:p>
-          <a:p>
-            <a:pPr>
-              <a:spcBef>
-                <a:spcPts val="600"/>
-              </a:spcBef>
-              <a:defRPr sz="1600"/>
-            </a:pPr>
-            <a:r>
-              <a:t>Show data labels: Values on points</a:t>
-            </a:r>
-          </a:p>
-          <a:p>
-            <a:pPr>
-              <a:spcBef>
-                <a:spcPts val="600"/>
-              </a:spcBef>
-              <a:defRPr sz="1600"/>
-            </a:pPr>
-            <a:r>
-              <a:t>Hover: See exact values</a:t>
-            </a:r>
-          </a:p>
-          <a:p>
-            <a:pPr>
-              <a:spcBef>
-                <a:spcPts val="600"/>
-              </a:spcBef>
-              <a:defRPr sz="1600"/>
-            </a:pPr>
-            <a:r>
-              <a:t>Click legend: Show/hide series</a:t>
+              <a:spcAft>
+                <a:spcPts val="1200"/>
+              </a:spcAft>
+              <a:defRPr sz="1800">
+                <a:solidFill>
+                  <a:srgbClr val="323232"/>
+                </a:solidFill>
+              </a:defRPr>
+            </a:pPr>
+            <a:r>
+              <a:t>After setting filters:</a:t>
+            </a:r>
+          </a:p>
+          <a:p>
+            <a:pPr>
+              <a:spcAft>
+                <a:spcPts val="1200"/>
+              </a:spcAft>
+              <a:defRPr sz="1800">
+                <a:solidFill>
+                  <a:srgbClr val="323232"/>
+                </a:solidFill>
+              </a:defRPr>
+            </a:pPr>
+          </a:p>
+          <a:p>
+            <a:pPr>
+              <a:spcAft>
+                <a:spcPts val="1200"/>
+              </a:spcAft>
+              <a:defRPr sz="1800">
+                <a:solidFill>
+                  <a:srgbClr val="323232"/>
+                </a:solidFill>
+              </a:defRPr>
+            </a:pPr>
+            <a:r>
+              <a:t>1. Look at the main content area</a:t>
+            </a:r>
+          </a:p>
+          <a:p>
+            <a:pPr>
+              <a:spcAft>
+                <a:spcPts val="1200"/>
+              </a:spcAft>
+              <a:defRPr sz="1800">
+                <a:solidFill>
+                  <a:srgbClr val="323232"/>
+                </a:solidFill>
+              </a:defRPr>
+            </a:pPr>
+          </a:p>
+          <a:p>
+            <a:pPr>
+              <a:spcAft>
+                <a:spcPts val="1200"/>
+              </a:spcAft>
+              <a:defRPr sz="1800">
+                <a:solidFill>
+                  <a:srgbClr val="323232"/>
+                </a:solidFill>
+              </a:defRPr>
+            </a:pPr>
+            <a:r>
+              <a:t>2. Find the tab bar at the top</a:t>
+            </a:r>
+          </a:p>
+          <a:p>
+            <a:pPr>
+              <a:spcAft>
+                <a:spcPts val="1200"/>
+              </a:spcAft>
+              <a:defRPr sz="1800">
+                <a:solidFill>
+                  <a:srgbClr val="323232"/>
+                </a:solidFill>
+              </a:defRPr>
+            </a:pPr>
+          </a:p>
+          <a:p>
+            <a:pPr>
+              <a:spcAft>
+                <a:spcPts val="1200"/>
+              </a:spcAft>
+              <a:defRPr sz="1800">
+                <a:solidFill>
+                  <a:srgbClr val="323232"/>
+                </a:solidFill>
+              </a:defRPr>
+            </a:pPr>
+            <a:r>
+              <a:t>3. Click on 'Module ELC Yield' tab</a:t>
+            </a:r>
+          </a:p>
+          <a:p>
+            <a:pPr>
+              <a:spcAft>
+                <a:spcPts val="1200"/>
+              </a:spcAft>
+              <a:defRPr sz="1800">
+                <a:solidFill>
+                  <a:srgbClr val="323232"/>
+                </a:solidFill>
+              </a:defRPr>
+            </a:pPr>
+          </a:p>
+          <a:p>
+            <a:pPr>
+              <a:spcAft>
+                <a:spcPts val="1200"/>
+              </a:spcAft>
+              <a:defRPr sz="1800">
+                <a:solidFill>
+                  <a:srgbClr val="323232"/>
+                </a:solidFill>
+              </a:defRPr>
+            </a:pPr>
+            <a:r>
+              <a:t>4. The tab will load yield data</a:t>
+            </a:r>
+          </a:p>
+          <a:p>
+            <a:pPr>
+              <a:spcAft>
+                <a:spcPts val="1200"/>
+              </a:spcAft>
+              <a:defRPr sz="1800">
+                <a:solidFill>
+                  <a:srgbClr val="323232"/>
+                </a:solidFill>
+              </a:defRPr>
+            </a:pPr>
+            <a:r>
+              <a:t>   based on your filter selections</a:t>
             </a:r>
           </a:p>
         </p:txBody>
@@ -5060,18 +5434,18 @@
         </p:nvSpPr>
         <p:spPr>
           <a:xfrm>
-            <a:off x="5760720" y="1188720"/>
-            <a:ext cx="5943600" cy="5029200"/>
+            <a:off x="5943600" y="1371600"/>
+            <a:ext cx="5760720" cy="5029200"/>
           </a:xfrm>
           <a:prstGeom prst="roundRect">
             <a:avLst/>
           </a:prstGeom>
           <a:solidFill>
-            <a:srgbClr val="F5F5F5"/>
+            <a:srgbClr val="F0F0F0"/>
           </a:solidFill>
           <a:ln>
             <a:solidFill>
-              <a:srgbClr val="C8C8C8"/>
+              <a:srgbClr val="969696"/>
             </a:solidFill>
           </a:ln>
         </p:spPr>
@@ -5105,8 +5479,8 @@
         </p:nvSpPr>
         <p:spPr>
           <a:xfrm>
-            <a:off x="5943600" y="3474720"/>
-            <a:ext cx="5486400" cy="457200"/>
+            <a:off x="6126480" y="1554480"/>
+            <a:ext cx="5394960" cy="4663440"/>
           </a:xfrm>
           <a:prstGeom prst="rect">
             <a:avLst/>
@@ -5114,20 +5488,77 @@
           <a:noFill/>
         </p:spPr>
         <p:txBody>
-          <a:bodyPr wrap="none">
+          <a:bodyPr wrap="square">
             <a:spAutoFit/>
           </a:bodyPr>
           <a:lstStyle/>
           <a:p>
-            <a:pPr algn="ctr">
-              <a:defRPr sz="1400">
-                <a:solidFill>
-                  <a:srgbClr val="787878"/>
-                </a:solidFill>
-              </a:defRPr>
-            </a:pPr>
-            <a:r>
-              <a:t>[Screenshot: Chart with targets]</a:t>
+            <a:pPr>
+              <a:defRPr sz="1000">
+                <a:solidFill>
+                  <a:srgbClr val="323232"/>
+                </a:solidFill>
+                <a:latin typeface="Courier New"/>
+              </a:defRPr>
+            </a:pPr>
+            <a:r>
+              <a:t>┌─────────────────────────────────────────────────┐</a:t>
+            </a:r>
+            <a:br/>
+            <a:r>
+              <a:t>│                                                 │</a:t>
+            </a:r>
+            <a:br/>
+            <a:r>
+              <a:t>│  ┌───────────┐ ┌──────────────┐ ┌────────────┐ │</a:t>
+            </a:r>
+            <a:br/>
+            <a:r>
+              <a:t>│  │ Yield     │ │ Module ELC   │ │ Pareto     │ │</a:t>
+            </a:r>
+            <a:br/>
+            <a:r>
+              <a:t>│  │ Analysis  │ │ Yield  ←←←←  │ │ Analysis   │ │</a:t>
+            </a:r>
+            <a:br/>
+            <a:r>
+              <a:t>│  └───────────┘ └──────────────┘ └────────────┘ │</a:t>
+            </a:r>
+            <a:br/>
+            <a:r>
+              <a:t>│                                                 │</a:t>
+            </a:r>
+            <a:br/>
+            <a:r>
+              <a:t>│  ┌────────────┐ ┌──────────────────┐           │</a:t>
+            </a:r>
+            <a:br/>
+            <a:r>
+              <a:t>│  │ Fail       │ │ Machine Trend    │           │</a:t>
+            </a:r>
+            <a:br/>
+            <a:r>
+              <a:t>│  │ Viewer     │ │ Analysis         │           │</a:t>
+            </a:r>
+            <a:br/>
+            <a:r>
+              <a:t>│  └────────────┘ └──────────────────┘           │</a:t>
+            </a:r>
+            <a:br/>
+            <a:r>
+              <a:t>│                                                 │</a:t>
+            </a:r>
+            <a:br/>
+            <a:r>
+              <a:t>│         Click "Module ELC Yield" tab           │</a:t>
+            </a:r>
+            <a:br/>
+            <a:r>
+              <a:t>│                                                 │</a:t>
+            </a:r>
+            <a:br/>
+            <a:r>
+              <a:t>└─────────────────────────────────────────────────┘</a:t>
             </a:r>
           </a:p>
         </p:txBody>
@@ -5140,7 +5571,7 @@
 </p:sld>
 </file>
 
-<file path=ppt/slides/slide7.xml><?xml version="1.0" encoding="utf-8"?>
+<file path=ppt/slides/slide5.xml><?xml version="1.0" encoding="utf-8"?>
 <p:sld xmlns:a="http://schemas.openxmlformats.org/drawingml/2006/main" xmlns:p="http://schemas.openxmlformats.org/presentationml/2006/main" xmlns:r="http://schemas.openxmlformats.org/officeDocument/2006/relationships">
   <p:cSld>
     <p:spTree>
@@ -5159,13 +5590,13 @@
         <p:spPr>
           <a:xfrm>
             <a:off x="0" y="0"/>
-            <a:ext cx="12191695" cy="914400"/>
+            <a:ext cx="12191695" cy="1097280"/>
           </a:xfrm>
           <a:prstGeom prst="rect">
             <a:avLst/>
           </a:prstGeom>
           <a:solidFill>
-            <a:srgbClr val="1A237E"/>
+            <a:srgbClr val="003366"/>
           </a:solidFill>
           <a:ln>
             <a:noFill/>
@@ -5201,8 +5632,8 @@
         </p:nvSpPr>
         <p:spPr>
           <a:xfrm>
-            <a:off x="457200" y="182880"/>
-            <a:ext cx="10972800" cy="548640"/>
+            <a:off x="457200" y="274320"/>
+            <a:ext cx="10972800" cy="731520"/>
           </a:xfrm>
           <a:prstGeom prst="rect">
             <a:avLst/>
@@ -5216,14 +5647,14 @@
           <a:lstStyle/>
           <a:p>
             <a:pPr>
-              <a:defRPr sz="2800" b="1">
+              <a:defRPr sz="3200" b="1">
                 <a:solidFill>
                   <a:srgbClr val="FFFFFF"/>
                 </a:solidFill>
               </a:defRPr>
             </a:pPr>
             <a:r>
-              <a:t>Understanding the Warning Message</a:t>
+              <a:t>Step 3: Select Series to Plot</a:t>
             </a:r>
           </a:p>
         </p:txBody>
@@ -5236,7 +5667,7 @@
         </p:nvSpPr>
         <p:spPr>
           <a:xfrm>
-            <a:off x="457200" y="1188720"/>
+            <a:off x="457200" y="1371600"/>
             <a:ext cx="5029200" cy="5029200"/>
           </a:xfrm>
           <a:prstGeom prst="rect">
@@ -5251,159 +5682,146 @@
           <a:lstStyle/>
           <a:p>
             <a:pPr>
-              <a:spcBef>
-                <a:spcPts val="1400"/>
-              </a:spcBef>
-              <a:defRPr sz="1800" b="1">
-                <a:solidFill>
-                  <a:srgbClr val="3F51B5"/>
-                </a:solidFill>
-              </a:defRPr>
-            </a:pPr>
-            <a:r>
-              <a:t>When You See This Warning:</a:t>
-            </a:r>
-          </a:p>
-          <a:p>
-            <a:pPr>
-              <a:spcBef>
-                <a:spcPts val="600"/>
-              </a:spcBef>
-              <a:defRPr sz="1600"/>
-            </a:pPr>
-            <a:r>
-              <a:t>'Targets require single config. Select series</a:t>
-            </a:r>
-          </a:p>
-          <a:p>
-            <a:pPr>
-              <a:spcBef>
-                <a:spcPts val="600"/>
-              </a:spcBef>
-              <a:defRPr sz="1600"/>
-            </a:pPr>
-            <a:r>
-              <a:t>with same DID + Density + Speed to show targets.'</a:t>
-            </a:r>
-          </a:p>
-          <a:p>
-            <a:pPr>
-              <a:spcBef>
-                <a:spcPts val="600"/>
-              </a:spcBef>
-              <a:defRPr sz="1600"/>
-            </a:pPr>
-          </a:p>
-          <a:p>
-            <a:pPr>
-              <a:spcBef>
-                <a:spcPts val="1400"/>
-              </a:spcBef>
-              <a:defRPr sz="1800" b="1">
-                <a:solidFill>
-                  <a:srgbClr val="3F51B5"/>
-                </a:solidFill>
-              </a:defRPr>
-            </a:pPr>
-            <a:r>
-              <a:t>Why It Appears</a:t>
-            </a:r>
-          </a:p>
-          <a:p>
-            <a:pPr>
-              <a:spcBef>
-                <a:spcPts val="600"/>
-              </a:spcBef>
-              <a:defRPr sz="1600"/>
-            </a:pPr>
-            <a:r>
-              <a:t>You selected series with DIFFERENT configs:</a:t>
-            </a:r>
-          </a:p>
-          <a:p>
-            <a:pPr>
-              <a:spcBef>
-                <a:spcPts val="400"/>
-              </a:spcBef>
-              <a:defRPr sz="1400">
-                <a:solidFill>
-                  <a:srgbClr val="505050"/>
-                </a:solidFill>
-              </a:defRPr>
-            </a:pPr>
-            <a:r>
-              <a:t>  - Y62P_ELC_128GB_6400MTPS</a:t>
-            </a:r>
-          </a:p>
-          <a:p>
-            <a:pPr>
-              <a:spcBef>
-                <a:spcPts val="400"/>
-              </a:spcBef>
-              <a:defRPr sz="1400">
-                <a:solidFill>
-                  <a:srgbClr val="505050"/>
-                </a:solidFill>
-              </a:defRPr>
-            </a:pPr>
-            <a:r>
-              <a:t>  - Y62P_ELC_64GB_8533MTPS  &lt;- Different!</a:t>
-            </a:r>
-          </a:p>
-          <a:p>
-            <a:pPr>
-              <a:spcBef>
-                <a:spcPts val="600"/>
-              </a:spcBef>
-              <a:defRPr sz="1600"/>
-            </a:pPr>
-          </a:p>
-          <a:p>
-            <a:pPr>
-              <a:spcBef>
-                <a:spcPts val="1400"/>
-              </a:spcBef>
-              <a:defRPr sz="1800" b="1">
-                <a:solidFill>
-                  <a:srgbClr val="3F51B5"/>
-                </a:solidFill>
-              </a:defRPr>
-            </a:pPr>
-            <a:r>
-              <a:t>How to Fix</a:t>
-            </a:r>
-          </a:p>
-          <a:p>
-            <a:pPr>
-              <a:spcBef>
-                <a:spcPts val="600"/>
-              </a:spcBef>
-              <a:defRPr sz="1600"/>
-            </a:pPr>
-            <a:r>
-              <a:t>Option 1: Select only ONE config's series</a:t>
-            </a:r>
-          </a:p>
-          <a:p>
-            <a:pPr>
-              <a:spcBef>
-                <a:spcPts val="600"/>
-              </a:spcBef>
-              <a:defRPr sz="1600"/>
-            </a:pPr>
-            <a:r>
-              <a:t>Option 2: Use sidebar filters to restrict to single config</a:t>
-            </a:r>
-          </a:p>
-          <a:p>
-            <a:pPr>
-              <a:spcBef>
-                <a:spcPts val="600"/>
-              </a:spcBef>
-              <a:defRPr sz="1600"/>
-            </a:pPr>
-            <a:r>
-              <a:t>Option 3: Compare without targets (disable checkbox)</a:t>
+              <a:spcAft>
+                <a:spcPts val="1200"/>
+              </a:spcAft>
+              <a:defRPr sz="1800">
+                <a:solidFill>
+                  <a:srgbClr val="323232"/>
+                </a:solidFill>
+              </a:defRPr>
+            </a:pPr>
+            <a:r>
+              <a:t>The series selector shows all</a:t>
+            </a:r>
+          </a:p>
+          <a:p>
+            <a:pPr>
+              <a:spcAft>
+                <a:spcPts val="1200"/>
+              </a:spcAft>
+              <a:defRPr sz="1800">
+                <a:solidFill>
+                  <a:srgbClr val="323232"/>
+                </a:solidFill>
+              </a:defRPr>
+            </a:pPr>
+            <a:r>
+              <a:t>available configurations:</a:t>
+            </a:r>
+          </a:p>
+          <a:p>
+            <a:pPr>
+              <a:spcAft>
+                <a:spcPts val="1200"/>
+              </a:spcAft>
+              <a:defRPr sz="1800">
+                <a:solidFill>
+                  <a:srgbClr val="323232"/>
+                </a:solidFill>
+              </a:defRPr>
+            </a:pPr>
+          </a:p>
+          <a:p>
+            <a:pPr>
+              <a:spcAft>
+                <a:spcPts val="1200"/>
+              </a:spcAft>
+              <a:defRPr sz="1800">
+                <a:solidFill>
+                  <a:srgbClr val="323232"/>
+                </a:solidFill>
+              </a:defRPr>
+            </a:pPr>
+            <a:r>
+              <a:t>Format: DID_FormFactor_Density_Speed_Step</a:t>
+            </a:r>
+          </a:p>
+          <a:p>
+            <a:pPr>
+              <a:spcAft>
+                <a:spcPts val="1200"/>
+              </a:spcAft>
+              <a:defRPr sz="1800">
+                <a:solidFill>
+                  <a:srgbClr val="323232"/>
+                </a:solidFill>
+              </a:defRPr>
+            </a:pPr>
+          </a:p>
+          <a:p>
+            <a:pPr>
+              <a:spcAft>
+                <a:spcPts val="1200"/>
+              </a:spcAft>
+              <a:defRPr sz="1800">
+                <a:solidFill>
+                  <a:srgbClr val="323232"/>
+                </a:solidFill>
+              </a:defRPr>
+            </a:pPr>
+            <a:r>
+              <a:t>💡 TIP: For target lines, select</a:t>
+            </a:r>
+          </a:p>
+          <a:p>
+            <a:pPr>
+              <a:spcAft>
+                <a:spcPts val="1200"/>
+              </a:spcAft>
+              <a:defRPr sz="1800">
+                <a:solidFill>
+                  <a:srgbClr val="323232"/>
+                </a:solidFill>
+              </a:defRPr>
+            </a:pPr>
+            <a:r>
+              <a:t>   series with SAME:</a:t>
+            </a:r>
+          </a:p>
+          <a:p>
+            <a:pPr>
+              <a:spcAft>
+                <a:spcPts val="1200"/>
+              </a:spcAft>
+              <a:defRPr sz="1800">
+                <a:solidFill>
+                  <a:srgbClr val="323232"/>
+                </a:solidFill>
+              </a:defRPr>
+            </a:pPr>
+            <a:r>
+              <a:t>   • Design ID (e.g., Y6CP)</a:t>
+            </a:r>
+          </a:p>
+          <a:p>
+            <a:pPr>
+              <a:spcAft>
+                <a:spcPts val="1200"/>
+              </a:spcAft>
+              <a:defRPr sz="1800">
+                <a:solidFill>
+                  <a:srgbClr val="323232"/>
+                </a:solidFill>
+              </a:defRPr>
+            </a:pPr>
+            <a:r>
+              <a:t>   • Density (e.g., 192GB)</a:t>
+            </a:r>
+          </a:p>
+          <a:p>
+            <a:pPr>
+              <a:spcAft>
+                <a:spcPts val="1200"/>
+              </a:spcAft>
+              <a:defRPr sz="1800">
+                <a:solidFill>
+                  <a:srgbClr val="323232"/>
+                </a:solidFill>
+              </a:defRPr>
+            </a:pPr>
+            <a:r>
+              <a:t>   • Speed (e.g., 7500MTPS)</a:t>
             </a:r>
           </a:p>
         </p:txBody>
@@ -5416,18 +5834,18 @@
         </p:nvSpPr>
         <p:spPr>
           <a:xfrm>
-            <a:off x="5760720" y="1188720"/>
-            <a:ext cx="5943600" cy="5029200"/>
+            <a:off x="5943600" y="1371600"/>
+            <a:ext cx="5760720" cy="5029200"/>
           </a:xfrm>
           <a:prstGeom prst="roundRect">
             <a:avLst/>
           </a:prstGeom>
           <a:solidFill>
-            <a:srgbClr val="F5F5F5"/>
+            <a:srgbClr val="F0F0F0"/>
           </a:solidFill>
           <a:ln>
             <a:solidFill>
-              <a:srgbClr val="C8C8C8"/>
+              <a:srgbClr val="969696"/>
             </a:solidFill>
           </a:ln>
         </p:spPr>
@@ -5461,8 +5879,8 @@
         </p:nvSpPr>
         <p:spPr>
           <a:xfrm>
-            <a:off x="5943600" y="3474720"/>
-            <a:ext cx="5486400" cy="457200"/>
+            <a:off x="6126480" y="1554480"/>
+            <a:ext cx="5394960" cy="4663440"/>
           </a:xfrm>
           <a:prstGeom prst="rect">
             <a:avLst/>
@@ -5470,20 +5888,89 @@
           <a:noFill/>
         </p:spPr>
         <p:txBody>
-          <a:bodyPr wrap="none">
+          <a:bodyPr wrap="square">
             <a:spAutoFit/>
           </a:bodyPr>
           <a:lstStyle/>
           <a:p>
-            <a:pPr algn="ctr">
-              <a:defRPr sz="1400">
-                <a:solidFill>
-                  <a:srgbClr val="787878"/>
-                </a:solidFill>
-              </a:defRPr>
-            </a:pPr>
-            <a:r>
-              <a:t>[Screenshot: Warning message]</a:t>
+            <a:pPr>
+              <a:defRPr sz="1000">
+                <a:solidFill>
+                  <a:srgbClr val="323232"/>
+                </a:solidFill>
+                <a:latin typeface="Courier New"/>
+              </a:defRPr>
+            </a:pPr>
+            <a:r>
+              <a:t>┌─────────────────────────────────────────────────┐</a:t>
+            </a:r>
+            <a:br/>
+            <a:r>
+              <a:t>│  📈 Select Series to Plot                       │</a:t>
+            </a:r>
+            <a:br/>
+            <a:r>
+              <a:t>├─────────────────────────────────────────────────┤</a:t>
+            </a:r>
+            <a:br/>
+            <a:r>
+              <a:t>│                                                 │</a:t>
+            </a:r>
+            <a:br/>
+            <a:r>
+              <a:t>│  ☑ Y6CP_SOCAMM2_192GB_7500MTPS_HMFN            │</a:t>
+            </a:r>
+            <a:br/>
+            <a:r>
+              <a:t>│  ☑ Y6CP_SOCAMM2_192GB_7500MTPS_SLT             │</a:t>
+            </a:r>
+            <a:br/>
+            <a:r>
+              <a:t>│  ☑ Y6CP_SOCAMM2_192GB_7500MTPS_ELC             │</a:t>
+            </a:r>
+            <a:br/>
+            <a:r>
+              <a:t>│                                                 │</a:t>
+            </a:r>
+            <a:br/>
+            <a:r>
+              <a:t>│  ☐ Y6CP_SOCAMM2_96GB_9600MTPS_HMFN             │</a:t>
+            </a:r>
+            <a:br/>
+            <a:r>
+              <a:t>│  ☐ Y6CP_SOCAMM2_96GB_9600MTPS_SLT              │</a:t>
+            </a:r>
+            <a:br/>
+            <a:r>
+              <a:t>│  ☐ Y6CP_SOCAMM2_96GB_9600MTPS_ELC              │</a:t>
+            </a:r>
+            <a:br/>
+            <a:r>
+              <a:t>│                                                 │</a:t>
+            </a:r>
+            <a:br/>
+            <a:r>
+              <a:t>│  ☐ Y62P_SOCAMM2_64GB_8533MTPS_HMFN             │</a:t>
+            </a:r>
+            <a:br/>
+            <a:r>
+              <a:t>│  ☐ Y62P_SOCAMM2_64GB_8533MTPS_SLT              │</a:t>
+            </a:r>
+            <a:br/>
+            <a:r>
+              <a:t>│  ☐ Y62P_SOCAMM2_64GB_8533MTPS_ELC              │</a:t>
+            </a:r>
+            <a:br/>
+            <a:r>
+              <a:t>│                                                 │</a:t>
+            </a:r>
+            <a:br/>
+            <a:r>
+              <a:t>│  [Select All] [Clear All]                       │</a:t>
+            </a:r>
+            <a:br/>
+            <a:r>
+              <a:t>└─────────────────────────────────────────────────┘</a:t>
             </a:r>
           </a:p>
         </p:txBody>
@@ -5496,7 +5983,7 @@
 </p:sld>
 </file>
 
-<file path=ppt/slides/slide8.xml><?xml version="1.0" encoding="utf-8"?>
+<file path=ppt/slides/slide6.xml><?xml version="1.0" encoding="utf-8"?>
 <p:sld xmlns:a="http://schemas.openxmlformats.org/drawingml/2006/main" xmlns:p="http://schemas.openxmlformats.org/presentationml/2006/main" xmlns:r="http://schemas.openxmlformats.org/officeDocument/2006/relationships">
   <p:cSld>
     <p:spTree>
@@ -5515,13 +6002,13 @@
         <p:spPr>
           <a:xfrm>
             <a:off x="0" y="0"/>
-            <a:ext cx="12191695" cy="914400"/>
+            <a:ext cx="12191695" cy="1097280"/>
           </a:xfrm>
           <a:prstGeom prst="rect">
             <a:avLst/>
           </a:prstGeom>
           <a:solidFill>
-            <a:srgbClr val="1A237E"/>
+            <a:srgbClr val="003366"/>
           </a:solidFill>
           <a:ln>
             <a:noFill/>
@@ -5557,8 +6044,8 @@
         </p:nvSpPr>
         <p:spPr>
           <a:xfrm>
-            <a:off x="457200" y="182880"/>
-            <a:ext cx="10972800" cy="548640"/>
+            <a:off x="457200" y="274320"/>
+            <a:ext cx="10972800" cy="731520"/>
           </a:xfrm>
           <a:prstGeom prst="rect">
             <a:avLst/>
@@ -5572,14 +6059,14 @@
           <a:lstStyle/>
           <a:p>
             <a:pPr>
-              <a:defRPr sz="2800" b="1">
+              <a:defRPr sz="3200" b="1">
                 <a:solidFill>
                   <a:srgbClr val="FFFFFF"/>
                 </a:solidFill>
               </a:defRPr>
             </a:pPr>
             <a:r>
-              <a:t>Example: Y6CP 192GB 7500MTPS</a:t>
+              <a:t>Step 4: Enable D1 Target Lines</a:t>
             </a:r>
           </a:p>
         </p:txBody>
@@ -5592,7 +6079,7 @@
         </p:nvSpPr>
         <p:spPr>
           <a:xfrm>
-            <a:off x="457200" y="1188720"/>
+            <a:off x="457200" y="1371600"/>
             <a:ext cx="5029200" cy="5029200"/>
           </a:xfrm>
           <a:prstGeom prst="rect">
@@ -5607,162 +6094,200 @@
           <a:lstStyle/>
           <a:p>
             <a:pPr>
-              <a:spcBef>
-                <a:spcPts val="1400"/>
-              </a:spcBef>
-              <a:defRPr sz="1800" b="1">
-                <a:solidFill>
-                  <a:srgbClr val="3F51B5"/>
-                </a:solidFill>
-              </a:defRPr>
-            </a:pPr>
-            <a:r>
-              <a:t>Filter Setup</a:t>
-            </a:r>
-          </a:p>
-          <a:p>
-            <a:pPr>
-              <a:spcBef>
-                <a:spcPts val="600"/>
-              </a:spcBef>
-              <a:defRPr sz="1600"/>
-            </a:pPr>
-            <a:r>
-              <a:t>Form Factor: SOCAMM2</a:t>
-            </a:r>
-          </a:p>
-          <a:p>
-            <a:pPr>
-              <a:spcBef>
-                <a:spcPts val="600"/>
-              </a:spcBef>
-              <a:defRPr sz="1600"/>
-            </a:pPr>
-            <a:r>
-              <a:t>Design ID: Y6CP</a:t>
-            </a:r>
-          </a:p>
-          <a:p>
-            <a:pPr>
-              <a:spcBef>
-                <a:spcPts val="600"/>
-              </a:spcBef>
-              <a:defRPr sz="1600"/>
-            </a:pPr>
-            <a:r>
-              <a:t>Density: 192GB | Speed: 7500MTPS</a:t>
-            </a:r>
-          </a:p>
-          <a:p>
-            <a:pPr>
-              <a:spcBef>
-                <a:spcPts val="600"/>
-              </a:spcBef>
-              <a:defRPr sz="1600"/>
-            </a:pPr>
-            <a:r>
-              <a:t>Work Week: 10 weeks</a:t>
-            </a:r>
-          </a:p>
-          <a:p>
-            <a:pPr>
-              <a:spcBef>
-                <a:spcPts val="600"/>
-              </a:spcBef>
-              <a:defRPr sz="1600"/>
-            </a:pPr>
-          </a:p>
-          <a:p>
-            <a:pPr>
-              <a:spcBef>
-                <a:spcPts val="1400"/>
-              </a:spcBef>
-              <a:defRPr sz="1800" b="1">
-                <a:solidFill>
-                  <a:srgbClr val="3F51B5"/>
-                </a:solidFill>
-              </a:defRPr>
-            </a:pPr>
-            <a:r>
-              <a:t>Series Selection</a:t>
-            </a:r>
-          </a:p>
-          <a:p>
-            <a:pPr>
-              <a:spcBef>
-                <a:spcPts val="600"/>
-              </a:spcBef>
-              <a:defRPr sz="1600"/>
-            </a:pPr>
-            <a:r>
-              <a:t>Y6CP_HMFN_192GB_7500MTPS</a:t>
-            </a:r>
-          </a:p>
-          <a:p>
-            <a:pPr>
-              <a:spcBef>
-                <a:spcPts val="600"/>
-              </a:spcBef>
-              <a:defRPr sz="1600"/>
-            </a:pPr>
-            <a:r>
-              <a:t>Y6CP_SLT_192GB_7500MTPS</a:t>
-            </a:r>
-          </a:p>
-          <a:p>
-            <a:pPr>
-              <a:spcBef>
-                <a:spcPts val="600"/>
-              </a:spcBef>
-              <a:defRPr sz="1600"/>
-            </a:pPr>
-            <a:r>
-              <a:t>Y6CP_ELC_192GB_7500MTPS</a:t>
-            </a:r>
-          </a:p>
-          <a:p>
-            <a:pPr>
-              <a:spcBef>
-                <a:spcPts val="600"/>
-              </a:spcBef>
-              <a:defRPr sz="1600"/>
-            </a:pPr>
-          </a:p>
-          <a:p>
-            <a:pPr>
-              <a:spcBef>
-                <a:spcPts val="1400"/>
-              </a:spcBef>
-              <a:defRPr sz="1800" b="1">
-                <a:solidFill>
-                  <a:srgbClr val="3F51B5"/>
-                </a:solidFill>
-              </a:defRPr>
-            </a:pPr>
-            <a:r>
-              <a:t>Result</a:t>
-            </a:r>
-          </a:p>
-          <a:p>
-            <a:pPr>
-              <a:spcBef>
-                <a:spcPts val="600"/>
-              </a:spcBef>
-              <a:defRPr sz="1600"/>
-            </a:pPr>
-            <a:r>
-              <a:t>3 yield lines + 3 target lines</a:t>
-            </a:r>
-          </a:p>
-          <a:p>
-            <a:pPr>
-              <a:spcBef>
-                <a:spcPts val="600"/>
-              </a:spcBef>
-              <a:defRPr sz="1600"/>
-            </a:pPr>
-            <a:r>
-              <a:t>Full gap analysis visible</a:t>
+              <a:spcAft>
+                <a:spcPts val="1200"/>
+              </a:spcAft>
+              <a:defRPr sz="1800">
+                <a:solidFill>
+                  <a:srgbClr val="323232"/>
+                </a:solidFill>
+              </a:defRPr>
+            </a:pPr>
+            <a:r>
+              <a:t>To show projection targets:</a:t>
+            </a:r>
+          </a:p>
+          <a:p>
+            <a:pPr>
+              <a:spcAft>
+                <a:spcPts val="1200"/>
+              </a:spcAft>
+              <a:defRPr sz="1800">
+                <a:solidFill>
+                  <a:srgbClr val="323232"/>
+                </a:solidFill>
+              </a:defRPr>
+            </a:pPr>
+          </a:p>
+          <a:p>
+            <a:pPr>
+              <a:spcAft>
+                <a:spcPts val="1200"/>
+              </a:spcAft>
+              <a:defRPr sz="1800">
+                <a:solidFill>
+                  <a:srgbClr val="323232"/>
+                </a:solidFill>
+              </a:defRPr>
+            </a:pPr>
+            <a:r>
+              <a:t>1. Find 'Show D1 Target Lines'</a:t>
+            </a:r>
+          </a:p>
+          <a:p>
+            <a:pPr>
+              <a:spcAft>
+                <a:spcPts val="1200"/>
+              </a:spcAft>
+              <a:defRPr sz="1800">
+                <a:solidFill>
+                  <a:srgbClr val="323232"/>
+                </a:solidFill>
+              </a:defRPr>
+            </a:pPr>
+            <a:r>
+              <a:t>   checkbox in the controls</a:t>
+            </a:r>
+          </a:p>
+          <a:p>
+            <a:pPr>
+              <a:spcAft>
+                <a:spcPts val="1200"/>
+              </a:spcAft>
+              <a:defRPr sz="1800">
+                <a:solidFill>
+                  <a:srgbClr val="323232"/>
+                </a:solidFill>
+              </a:defRPr>
+            </a:pPr>
+          </a:p>
+          <a:p>
+            <a:pPr>
+              <a:spcAft>
+                <a:spcPts val="1200"/>
+              </a:spcAft>
+              <a:defRPr sz="1800">
+                <a:solidFill>
+                  <a:srgbClr val="323232"/>
+                </a:solidFill>
+              </a:defRPr>
+            </a:pPr>
+            <a:r>
+              <a:t>2. Check the box to enable</a:t>
+            </a:r>
+          </a:p>
+          <a:p>
+            <a:pPr>
+              <a:spcAft>
+                <a:spcPts val="1200"/>
+              </a:spcAft>
+              <a:defRPr sz="1800">
+                <a:solidFill>
+                  <a:srgbClr val="323232"/>
+                </a:solidFill>
+              </a:defRPr>
+            </a:pPr>
+          </a:p>
+          <a:p>
+            <a:pPr>
+              <a:spcAft>
+                <a:spcPts val="1200"/>
+              </a:spcAft>
+              <a:defRPr sz="1800">
+                <a:solidFill>
+                  <a:srgbClr val="323232"/>
+                </a:solidFill>
+              </a:defRPr>
+            </a:pPr>
+            <a:r>
+              <a:t>3. Target lines appear on chart:</a:t>
+            </a:r>
+          </a:p>
+          <a:p>
+            <a:pPr>
+              <a:spcAft>
+                <a:spcPts val="1200"/>
+              </a:spcAft>
+              <a:defRPr sz="1800">
+                <a:solidFill>
+                  <a:srgbClr val="323232"/>
+                </a:solidFill>
+              </a:defRPr>
+            </a:pPr>
+            <a:r>
+              <a:t>   • Blue dotted = HMFN target</a:t>
+            </a:r>
+          </a:p>
+          <a:p>
+            <a:pPr>
+              <a:spcAft>
+                <a:spcPts val="1200"/>
+              </a:spcAft>
+              <a:defRPr sz="1800">
+                <a:solidFill>
+                  <a:srgbClr val="323232"/>
+                </a:solidFill>
+              </a:defRPr>
+            </a:pPr>
+            <a:r>
+              <a:t>   • Red dotted = SLT target</a:t>
+            </a:r>
+          </a:p>
+          <a:p>
+            <a:pPr>
+              <a:spcAft>
+                <a:spcPts val="1200"/>
+              </a:spcAft>
+              <a:defRPr sz="1800">
+                <a:solidFill>
+                  <a:srgbClr val="323232"/>
+                </a:solidFill>
+              </a:defRPr>
+            </a:pPr>
+            <a:r>
+              <a:t>   • Green dotted = ELC target</a:t>
+            </a:r>
+          </a:p>
+          <a:p>
+            <a:pPr>
+              <a:spcAft>
+                <a:spcPts val="1200"/>
+              </a:spcAft>
+              <a:defRPr sz="1800">
+                <a:solidFill>
+                  <a:srgbClr val="323232"/>
+                </a:solidFill>
+              </a:defRPr>
+            </a:pPr>
+          </a:p>
+          <a:p>
+            <a:pPr>
+              <a:spcAft>
+                <a:spcPts val="1200"/>
+              </a:spcAft>
+              <a:defRPr sz="1800">
+                <a:solidFill>
+                  <a:srgbClr val="323232"/>
+                </a:solidFill>
+              </a:defRPr>
+            </a:pPr>
+            <a:r>
+              <a:t>⚠️ If checkbox doesn't work:</a:t>
+            </a:r>
+          </a:p>
+          <a:p>
+            <a:pPr>
+              <a:spcAft>
+                <a:spcPts val="1200"/>
+              </a:spcAft>
+              <a:defRPr sz="1800">
+                <a:solidFill>
+                  <a:srgbClr val="323232"/>
+                </a:solidFill>
+              </a:defRPr>
+            </a:pPr>
+            <a:r>
+              <a:t>   Select single config (same DID+Density+Speed)</a:t>
             </a:r>
           </a:p>
         </p:txBody>
@@ -5775,18 +6300,18 @@
         </p:nvSpPr>
         <p:spPr>
           <a:xfrm>
-            <a:off x="5760720" y="1188720"/>
-            <a:ext cx="5943600" cy="5029200"/>
+            <a:off x="5943600" y="1371600"/>
+            <a:ext cx="5760720" cy="5029200"/>
           </a:xfrm>
           <a:prstGeom prst="roundRect">
             <a:avLst/>
           </a:prstGeom>
           <a:solidFill>
-            <a:srgbClr val="F5F5F5"/>
+            <a:srgbClr val="F0F0F0"/>
           </a:solidFill>
           <a:ln>
             <a:solidFill>
-              <a:srgbClr val="C8C8C8"/>
+              <a:srgbClr val="969696"/>
             </a:solidFill>
           </a:ln>
         </p:spPr>
@@ -5820,8 +6345,8 @@
         </p:nvSpPr>
         <p:spPr>
           <a:xfrm>
-            <a:off x="5943600" y="3474720"/>
-            <a:ext cx="5486400" cy="457200"/>
+            <a:off x="6126480" y="1554480"/>
+            <a:ext cx="5394960" cy="4663440"/>
           </a:xfrm>
           <a:prstGeom prst="rect">
             <a:avLst/>
@@ -5829,20 +6354,97 @@
           <a:noFill/>
         </p:spPr>
         <p:txBody>
-          <a:bodyPr wrap="none">
+          <a:bodyPr wrap="square">
             <a:spAutoFit/>
           </a:bodyPr>
           <a:lstStyle/>
           <a:p>
-            <a:pPr algn="ctr">
-              <a:defRPr sz="1400">
-                <a:solidFill>
-                  <a:srgbClr val="787878"/>
-                </a:solidFill>
-              </a:defRPr>
-            </a:pPr>
-            <a:r>
-              <a:t>[Screenshot: Complete example]</a:t>
+            <a:pPr>
+              <a:defRPr sz="1000">
+                <a:solidFill>
+                  <a:srgbClr val="323232"/>
+                </a:solidFill>
+                <a:latin typeface="Courier New"/>
+              </a:defRPr>
+            </a:pPr>
+            <a:r>
+              <a:t>┌─────────────────────────────────────────────────┐</a:t>
+            </a:r>
+            <a:br/>
+            <a:r>
+              <a:t>│  🎯 Target Line Controls                        │</a:t>
+            </a:r>
+            <a:br/>
+            <a:r>
+              <a:t>├─────────────────────────────────────────────────┤</a:t>
+            </a:r>
+            <a:br/>
+            <a:r>
+              <a:t>│                                                 │</a:t>
+            </a:r>
+            <a:br/>
+            <a:r>
+              <a:t>│  [✓] Show D1 Target Lines                       │</a:t>
+            </a:r>
+            <a:br/>
+            <a:r>
+              <a:t>│                                                 │</a:t>
+            </a:r>
+            <a:br/>
+            <a:r>
+              <a:t>│  When enabled, shows:                           │</a:t>
+            </a:r>
+            <a:br/>
+            <a:r>
+              <a:t>│  ┄┄┄┄ HMFN Target (Blue dotted)                │</a:t>
+            </a:r>
+            <a:br/>
+            <a:r>
+              <a:t>│  ┄┄┄┄ SLT Target  (Red dotted)                 │</a:t>
+            </a:r>
+            <a:br/>
+            <a:r>
+              <a:t>│  ┄┄┄┄ ELC Target  (Green dotted)               │</a:t>
+            </a:r>
+            <a:br/>
+            <a:r>
+              <a:t>│                                                 │</a:t>
+            </a:r>
+            <a:br/>
+            <a:r>
+              <a:t>├─────────────────────────────────────────────────┤</a:t>
+            </a:r>
+            <a:br/>
+            <a:r>
+              <a:t>│  ⚠️ Requirement:                                │</a:t>
+            </a:r>
+            <a:br/>
+            <a:r>
+              <a:t>│                                                 │</a:t>
+            </a:r>
+            <a:br/>
+            <a:r>
+              <a:t>│  Targets only show when ALL selected            │</a:t>
+            </a:r>
+            <a:br/>
+            <a:r>
+              <a:t>│  series share the SAME:                         │</a:t>
+            </a:r>
+            <a:br/>
+            <a:r>
+              <a:t>│  • Design ID                                    │</a:t>
+            </a:r>
+            <a:br/>
+            <a:r>
+              <a:t>│  • Density                                      │</a:t>
+            </a:r>
+            <a:br/>
+            <a:r>
+              <a:t>│  • Speed                                        │</a:t>
+            </a:r>
+            <a:br/>
+            <a:r>
+              <a:t>└─────────────────────────────────────────────────┘</a:t>
             </a:r>
           </a:p>
         </p:txBody>
@@ -5855,7 +6457,7 @@
 </p:sld>
 </file>
 
-<file path=ppt/slides/slide9.xml><?xml version="1.0" encoding="utf-8"?>
+<file path=ppt/slides/slide7.xml><?xml version="1.0" encoding="utf-8"?>
 <p:sld xmlns:a="http://schemas.openxmlformats.org/drawingml/2006/main" xmlns:p="http://schemas.openxmlformats.org/presentationml/2006/main" xmlns:r="http://schemas.openxmlformats.org/officeDocument/2006/relationships">
   <p:cSld>
     <p:spTree>
@@ -5874,13 +6476,13 @@
         <p:spPr>
           <a:xfrm>
             <a:off x="0" y="0"/>
-            <a:ext cx="12191695" cy="914400"/>
+            <a:ext cx="12191695" cy="1097280"/>
           </a:xfrm>
           <a:prstGeom prst="rect">
             <a:avLst/>
           </a:prstGeom>
           <a:solidFill>
-            <a:srgbClr val="FF9800"/>
+            <a:srgbClr val="003366"/>
           </a:solidFill>
           <a:ln>
             <a:noFill/>
@@ -5916,8 +6518,8 @@
         </p:nvSpPr>
         <p:spPr>
           <a:xfrm>
-            <a:off x="457200" y="182880"/>
-            <a:ext cx="10972800" cy="548640"/>
+            <a:off x="457200" y="274320"/>
+            <a:ext cx="10972800" cy="731520"/>
           </a:xfrm>
           <a:prstGeom prst="rect">
             <a:avLst/>
@@ -5931,14 +6533,14 @@
           <a:lstStyle/>
           <a:p>
             <a:pPr>
-              <a:defRPr sz="2800" b="1">
+              <a:defRPr sz="3200" b="1">
                 <a:solidFill>
                   <a:srgbClr val="FFFFFF"/>
                 </a:solidFill>
               </a:defRPr>
             </a:pPr>
             <a:r>
-              <a:t>Tips &amp; Best Practices</a:t>
+              <a:t>Step 5: Interpreting the Chart</a:t>
             </a:r>
           </a:p>
         </p:txBody>
@@ -5951,8 +6553,8 @@
         </p:nvSpPr>
         <p:spPr>
           <a:xfrm>
-            <a:off x="457200" y="1188720"/>
-            <a:ext cx="11277295" cy="5029200"/>
+            <a:off x="457200" y="1371600"/>
+            <a:ext cx="5029200" cy="5029200"/>
           </a:xfrm>
           <a:prstGeom prst="rect">
             <a:avLst/>
@@ -5966,79 +6568,1254 @@
           <a:lstStyle/>
           <a:p>
             <a:pPr>
-              <a:spcBef>
-                <a:spcPts val="1400"/>
-              </a:spcBef>
-              <a:defRPr sz="1800"/>
-            </a:pPr>
-            <a:r>
-              <a:t>1. Use SINGLE config (DID+Density+Speed) to enable targets</a:t>
-            </a:r>
-          </a:p>
-          <a:p>
-            <a:pPr>
-              <a:spcBef>
-                <a:spcPts val="1400"/>
-              </a:spcBef>
-              <a:defRPr sz="1800"/>
-            </a:pPr>
-            <a:r>
-              <a:t>2. D1 is the active projection - use for current analysis</a:t>
-            </a:r>
-          </a:p>
-          <a:p>
-            <a:pPr>
-              <a:spcBef>
-                <a:spcPts val="1400"/>
-              </a:spcBef>
-              <a:defRPr sz="1800"/>
-            </a:pPr>
-            <a:r>
-              <a:t>3. Enable '+ Future (8wk)' to see upcoming targets</a:t>
-            </a:r>
-          </a:p>
-          <a:p>
-            <a:pPr>
-              <a:spcBef>
-                <a:spcPts val="1400"/>
-              </a:spcBef>
-              <a:defRPr sz="1800"/>
-            </a:pPr>
-            <a:r>
-              <a:t>4. Set Y-axis min to 90% for better visibility</a:t>
-            </a:r>
-          </a:p>
-          <a:p>
-            <a:pPr>
-              <a:spcBef>
-                <a:spcPts val="1400"/>
-              </a:spcBef>
-              <a:defRPr sz="1800"/>
-            </a:pPr>
-            <a:r>
-              <a:t>5. Export charts via Plotly toolbar (camera icon)</a:t>
-            </a:r>
-          </a:p>
-          <a:p>
-            <a:pPr>
-              <a:spcBef>
-                <a:spcPts val="1400"/>
-              </a:spcBef>
-              <a:defRPr sz="1800"/>
-            </a:pPr>
-            <a:r>
-              <a:t>6. For cross-config comparison, disable targets</a:t>
-            </a:r>
-          </a:p>
-          <a:p>
-            <a:pPr>
-              <a:spcBef>
-                <a:spcPts val="1400"/>
-              </a:spcBef>
-              <a:defRPr sz="1800"/>
-            </a:pPr>
-            <a:r>
-              <a:t>7. Check Section 4 for target history and change log</a:t>
+              <a:spcAft>
+                <a:spcPts val="1200"/>
+              </a:spcAft>
+              <a:defRPr sz="1800">
+                <a:solidFill>
+                  <a:srgbClr val="323232"/>
+                </a:solidFill>
+              </a:defRPr>
+            </a:pPr>
+            <a:r>
+              <a:t>The chart shows:</a:t>
+            </a:r>
+          </a:p>
+          <a:p>
+            <a:pPr>
+              <a:spcAft>
+                <a:spcPts val="1200"/>
+              </a:spcAft>
+              <a:defRPr sz="1800">
+                <a:solidFill>
+                  <a:srgbClr val="323232"/>
+                </a:solidFill>
+              </a:defRPr>
+            </a:pPr>
+          </a:p>
+          <a:p>
+            <a:pPr>
+              <a:spcAft>
+                <a:spcPts val="1200"/>
+              </a:spcAft>
+              <a:defRPr sz="1800">
+                <a:solidFill>
+                  <a:srgbClr val="323232"/>
+                </a:solidFill>
+              </a:defRPr>
+            </a:pPr>
+            <a:r>
+              <a:t>Solid lines = Actual yield</a:t>
+            </a:r>
+          </a:p>
+          <a:p>
+            <a:pPr>
+              <a:spcAft>
+                <a:spcPts val="1200"/>
+              </a:spcAft>
+              <a:defRPr sz="1800">
+                <a:solidFill>
+                  <a:srgbClr val="323232"/>
+                </a:solidFill>
+              </a:defRPr>
+            </a:pPr>
+            <a:r>
+              <a:t>Dotted lines = D1 targets</a:t>
+            </a:r>
+          </a:p>
+          <a:p>
+            <a:pPr>
+              <a:spcAft>
+                <a:spcPts val="1200"/>
+              </a:spcAft>
+              <a:defRPr sz="1800">
+                <a:solidFill>
+                  <a:srgbClr val="323232"/>
+                </a:solidFill>
+              </a:defRPr>
+            </a:pPr>
+          </a:p>
+          <a:p>
+            <a:pPr>
+              <a:spcAft>
+                <a:spcPts val="1200"/>
+              </a:spcAft>
+              <a:defRPr sz="1800">
+                <a:solidFill>
+                  <a:srgbClr val="323232"/>
+                </a:solidFill>
+              </a:defRPr>
+            </a:pPr>
+            <a:r>
+              <a:t>Color coding:</a:t>
+            </a:r>
+          </a:p>
+          <a:p>
+            <a:pPr>
+              <a:spcAft>
+                <a:spcPts val="1200"/>
+              </a:spcAft>
+              <a:defRPr sz="1800">
+                <a:solidFill>
+                  <a:srgbClr val="323232"/>
+                </a:solidFill>
+              </a:defRPr>
+            </a:pPr>
+            <a:r>
+              <a:t>• Blue = HMFN step</a:t>
+            </a:r>
+          </a:p>
+          <a:p>
+            <a:pPr>
+              <a:spcAft>
+                <a:spcPts val="1200"/>
+              </a:spcAft>
+              <a:defRPr sz="1800">
+                <a:solidFill>
+                  <a:srgbClr val="323232"/>
+                </a:solidFill>
+              </a:defRPr>
+            </a:pPr>
+            <a:r>
+              <a:t>• Red = SLT step (HMB1 × QMON)</a:t>
+            </a:r>
+          </a:p>
+          <a:p>
+            <a:pPr>
+              <a:spcAft>
+                <a:spcPts val="1200"/>
+              </a:spcAft>
+              <a:defRPr sz="1800">
+                <a:solidFill>
+                  <a:srgbClr val="323232"/>
+                </a:solidFill>
+              </a:defRPr>
+            </a:pPr>
+            <a:r>
+              <a:t>• Green = ELC (HMFN × SLT)</a:t>
+            </a:r>
+          </a:p>
+          <a:p>
+            <a:pPr>
+              <a:spcAft>
+                <a:spcPts val="1200"/>
+              </a:spcAft>
+              <a:defRPr sz="1800">
+                <a:solidFill>
+                  <a:srgbClr val="323232"/>
+                </a:solidFill>
+              </a:defRPr>
+            </a:pPr>
+          </a:p>
+          <a:p>
+            <a:pPr>
+              <a:spcAft>
+                <a:spcPts val="1200"/>
+              </a:spcAft>
+              <a:defRPr sz="1800">
+                <a:solidFill>
+                  <a:srgbClr val="323232"/>
+                </a:solidFill>
+              </a:defRPr>
+            </a:pPr>
+            <a:r>
+              <a:t>Compare actual vs target:</a:t>
+            </a:r>
+          </a:p>
+          <a:p>
+            <a:pPr>
+              <a:spcAft>
+                <a:spcPts val="1200"/>
+              </a:spcAft>
+              <a:defRPr sz="1800">
+                <a:solidFill>
+                  <a:srgbClr val="323232"/>
+                </a:solidFill>
+              </a:defRPr>
+            </a:pPr>
+            <a:r>
+              <a:t>• Above target = Good ✓</a:t>
+            </a:r>
+          </a:p>
+          <a:p>
+            <a:pPr>
+              <a:spcAft>
+                <a:spcPts val="1200"/>
+              </a:spcAft>
+              <a:defRPr sz="1800">
+                <a:solidFill>
+                  <a:srgbClr val="323232"/>
+                </a:solidFill>
+              </a:defRPr>
+            </a:pPr>
+            <a:r>
+              <a:t>• Below target = Action needed</a:t>
+            </a:r>
+          </a:p>
+        </p:txBody>
+      </p:sp>
+      <p:sp>
+        <p:nvSpPr>
+          <p:cNvPr id="5" name="Rounded Rectangle 4"/>
+          <p:cNvSpPr/>
+          <p:nvPr/>
+        </p:nvSpPr>
+        <p:spPr>
+          <a:xfrm>
+            <a:off x="5943600" y="1371600"/>
+            <a:ext cx="5760720" cy="5029200"/>
+          </a:xfrm>
+          <a:prstGeom prst="roundRect">
+            <a:avLst/>
+          </a:prstGeom>
+          <a:solidFill>
+            <a:srgbClr val="F0F0F0"/>
+          </a:solidFill>
+          <a:ln>
+            <a:solidFill>
+              <a:srgbClr val="969696"/>
+            </a:solidFill>
+          </a:ln>
+        </p:spPr>
+        <p:style>
+          <a:lnRef idx="1">
+            <a:schemeClr val="accent1"/>
+          </a:lnRef>
+          <a:fillRef idx="3">
+            <a:schemeClr val="accent1"/>
+          </a:fillRef>
+          <a:effectRef idx="2">
+            <a:schemeClr val="accent1"/>
+          </a:effectRef>
+          <a:fontRef idx="minor">
+            <a:schemeClr val="lt1"/>
+          </a:fontRef>
+        </p:style>
+        <p:txBody>
+          <a:bodyPr rtlCol="0" anchor="ctr"/>
+          <a:lstStyle/>
+          <a:p>
+            <a:pPr algn="ctr"/>
+          </a:p>
+        </p:txBody>
+      </p:sp>
+      <p:sp>
+        <p:nvSpPr>
+          <p:cNvPr id="6" name="TextBox 5"/>
+          <p:cNvSpPr txBox="1"/>
+          <p:nvPr/>
+        </p:nvSpPr>
+        <p:spPr>
+          <a:xfrm>
+            <a:off x="6126480" y="1554480"/>
+            <a:ext cx="5394960" cy="4663440"/>
+          </a:xfrm>
+          <a:prstGeom prst="rect">
+            <a:avLst/>
+          </a:prstGeom>
+          <a:noFill/>
+        </p:spPr>
+        <p:txBody>
+          <a:bodyPr wrap="square">
+            <a:spAutoFit/>
+          </a:bodyPr>
+          <a:lstStyle/>
+          <a:p>
+            <a:pPr>
+              <a:defRPr sz="1000">
+                <a:solidFill>
+                  <a:srgbClr val="323232"/>
+                </a:solidFill>
+                <a:latin typeface="Courier New"/>
+              </a:defRPr>
+            </a:pPr>
+            <a:r>
+              <a:t>  100% ┬─────────────────────────────────────────┐</a:t>
+            </a:r>
+            <a:br/>
+            <a:r>
+              <a:t>       │  ┄┄┄┄┄┄┄┄┄┄┄┄┄┄┄┄┄┄┄┄┄┄┄┄ HMFN Target  │</a:t>
+            </a:r>
+            <a:br/>
+            <a:r>
+              <a:t>   99% │ ╭──────╮                    (99%)        │</a:t>
+            </a:r>
+            <a:br/>
+            <a:r>
+              <a:t>       │╱        ╲    HMFN Actual                 │</a:t>
+            </a:r>
+            <a:br/>
+            <a:r>
+              <a:t>   98% │          ╲ ╱ ╲ ╱ ╲                       │</a:t>
+            </a:r>
+            <a:br/>
+            <a:r>
+              <a:t>       │           ╳   ╳   ╲────                  │</a:t>
+            </a:r>
+            <a:br/>
+            <a:r>
+              <a:t>   97% │  ┄┄┄┄┄┄┄┄┄┄┄┄┄┄┄┄┄┄┄┄┄┄ SLT Target      │</a:t>
+            </a:r>
+            <a:br/>
+            <a:r>
+              <a:t>       │    ╭────╮                  (97%)         │</a:t>
+            </a:r>
+            <a:br/>
+            <a:r>
+              <a:t>   96% │   ╱      ╲    SLT Actual                 │</a:t>
+            </a:r>
+            <a:br/>
+            <a:r>
+              <a:t>       │  ╱        ╲ ╱ ╲ ╱ ╲                      │</a:t>
+            </a:r>
+            <a:br/>
+            <a:r>
+              <a:t>   95% │ ╱  ┄┄┄┄┄┄┄┄┄┄┄┄┄┄┄┄┄┄┄┄ ELC Target      │</a:t>
+            </a:r>
+            <a:br/>
+            <a:r>
+              <a:t>       │╱            ╲╱           (95.54%)        │</a:t>
+            </a:r>
+            <a:br/>
+            <a:r>
+              <a:t>   94% │       ELC Actual                         │</a:t>
+            </a:r>
+            <a:br/>
+            <a:r>
+              <a:t>       └───┴───┴───┴───┴───┴───┴───┴───┴───┴───┘</a:t>
+            </a:r>
+            <a:br/>
+            <a:r>
+              <a:t>        WW06 WW07 WW08 WW09 WW10 WW11 WW12 WW13</a:t>
+            </a:r>
+          </a:p>
+        </p:txBody>
+      </p:sp>
+    </p:spTree>
+  </p:cSld>
+  <p:clrMapOvr>
+    <a:masterClrMapping/>
+  </p:clrMapOvr>
+</p:sld>
+</file>
+
+<file path=ppt/slides/slide8.xml><?xml version="1.0" encoding="utf-8"?>
+<p:sld xmlns:a="http://schemas.openxmlformats.org/drawingml/2006/main" xmlns:p="http://schemas.openxmlformats.org/presentationml/2006/main" xmlns:r="http://schemas.openxmlformats.org/officeDocument/2006/relationships">
+  <p:cSld>
+    <p:spTree>
+      <p:nvGrpSpPr>
+        <p:cNvPr id="1" name=""/>
+        <p:cNvGrpSpPr/>
+        <p:nvPr/>
+      </p:nvGrpSpPr>
+      <p:grpSpPr/>
+      <p:sp>
+        <p:nvSpPr>
+          <p:cNvPr id="2" name="Rectangle 1"/>
+          <p:cNvSpPr/>
+          <p:nvPr/>
+        </p:nvSpPr>
+        <p:spPr>
+          <a:xfrm>
+            <a:off x="0" y="0"/>
+            <a:ext cx="12191695" cy="1097280"/>
+          </a:xfrm>
+          <a:prstGeom prst="rect">
+            <a:avLst/>
+          </a:prstGeom>
+          <a:solidFill>
+            <a:srgbClr val="003366"/>
+          </a:solidFill>
+          <a:ln>
+            <a:noFill/>
+          </a:ln>
+        </p:spPr>
+        <p:style>
+          <a:lnRef idx="1">
+            <a:schemeClr val="accent1"/>
+          </a:lnRef>
+          <a:fillRef idx="3">
+            <a:schemeClr val="accent1"/>
+          </a:fillRef>
+          <a:effectRef idx="2">
+            <a:schemeClr val="accent1"/>
+          </a:effectRef>
+          <a:fontRef idx="minor">
+            <a:schemeClr val="lt1"/>
+          </a:fontRef>
+        </p:style>
+        <p:txBody>
+          <a:bodyPr rtlCol="0" anchor="ctr"/>
+          <a:lstStyle/>
+          <a:p>
+            <a:pPr algn="ctr"/>
+          </a:p>
+        </p:txBody>
+      </p:sp>
+      <p:sp>
+        <p:nvSpPr>
+          <p:cNvPr id="3" name="TextBox 2"/>
+          <p:cNvSpPr txBox="1"/>
+          <p:nvPr/>
+        </p:nvSpPr>
+        <p:spPr>
+          <a:xfrm>
+            <a:off x="457200" y="274320"/>
+            <a:ext cx="10972800" cy="731520"/>
+          </a:xfrm>
+          <a:prstGeom prst="rect">
+            <a:avLst/>
+          </a:prstGeom>
+          <a:noFill/>
+        </p:spPr>
+        <p:txBody>
+          <a:bodyPr wrap="none">
+            <a:spAutoFit/>
+          </a:bodyPr>
+          <a:lstStyle/>
+          <a:p>
+            <a:pPr>
+              <a:defRPr sz="3200" b="1">
+                <a:solidFill>
+                  <a:srgbClr val="FFFFFF"/>
+                </a:solidFill>
+              </a:defRPr>
+            </a:pPr>
+            <a:r>
+              <a:t>Understanding the Warning Message</a:t>
+            </a:r>
+          </a:p>
+        </p:txBody>
+      </p:sp>
+      <p:sp>
+        <p:nvSpPr>
+          <p:cNvPr id="4" name="TextBox 3"/>
+          <p:cNvSpPr txBox="1"/>
+          <p:nvPr/>
+        </p:nvSpPr>
+        <p:spPr>
+          <a:xfrm>
+            <a:off x="457200" y="1371600"/>
+            <a:ext cx="5029200" cy="5029200"/>
+          </a:xfrm>
+          <a:prstGeom prst="rect">
+            <a:avLst/>
+          </a:prstGeom>
+          <a:noFill/>
+        </p:spPr>
+        <p:txBody>
+          <a:bodyPr wrap="square">
+            <a:spAutoFit/>
+          </a:bodyPr>
+          <a:lstStyle/>
+          <a:p>
+            <a:pPr>
+              <a:spcAft>
+                <a:spcPts val="1200"/>
+              </a:spcAft>
+              <a:defRPr sz="1800">
+                <a:solidFill>
+                  <a:srgbClr val="323232"/>
+                </a:solidFill>
+              </a:defRPr>
+            </a:pPr>
+            <a:r>
+              <a:t>If you see this warning:</a:t>
+            </a:r>
+          </a:p>
+          <a:p>
+            <a:pPr>
+              <a:spcAft>
+                <a:spcPts val="1200"/>
+              </a:spcAft>
+              <a:defRPr sz="1800">
+                <a:solidFill>
+                  <a:srgbClr val="323232"/>
+                </a:solidFill>
+              </a:defRPr>
+            </a:pPr>
+          </a:p>
+          <a:p>
+            <a:pPr>
+              <a:spcAft>
+                <a:spcPts val="1200"/>
+              </a:spcAft>
+              <a:defRPr sz="1800">
+                <a:solidFill>
+                  <a:srgbClr val="323232"/>
+                </a:solidFill>
+              </a:defRPr>
+            </a:pPr>
+            <a:r>
+              <a:t>⚠️ 'Targets require single config'</a:t>
+            </a:r>
+          </a:p>
+          <a:p>
+            <a:pPr>
+              <a:spcAft>
+                <a:spcPts val="1200"/>
+              </a:spcAft>
+              <a:defRPr sz="1800">
+                <a:solidFill>
+                  <a:srgbClr val="323232"/>
+                </a:solidFill>
+              </a:defRPr>
+            </a:pPr>
+          </a:p>
+          <a:p>
+            <a:pPr>
+              <a:spcAft>
+                <a:spcPts val="1200"/>
+              </a:spcAft>
+              <a:defRPr sz="1800">
+                <a:solidFill>
+                  <a:srgbClr val="323232"/>
+                </a:solidFill>
+              </a:defRPr>
+            </a:pPr>
+            <a:r>
+              <a:t>It means you selected series</a:t>
+            </a:r>
+          </a:p>
+          <a:p>
+            <a:pPr>
+              <a:spcAft>
+                <a:spcPts val="1200"/>
+              </a:spcAft>
+              <a:defRPr sz="1800">
+                <a:solidFill>
+                  <a:srgbClr val="323232"/>
+                </a:solidFill>
+              </a:defRPr>
+            </a:pPr>
+            <a:r>
+              <a:t>with DIFFERENT configurations.</a:t>
+            </a:r>
+          </a:p>
+          <a:p>
+            <a:pPr>
+              <a:spcAft>
+                <a:spcPts val="1200"/>
+              </a:spcAft>
+              <a:defRPr sz="1800">
+                <a:solidFill>
+                  <a:srgbClr val="323232"/>
+                </a:solidFill>
+              </a:defRPr>
+            </a:pPr>
+          </a:p>
+          <a:p>
+            <a:pPr>
+              <a:spcAft>
+                <a:spcPts val="1200"/>
+              </a:spcAft>
+              <a:defRPr sz="1800">
+                <a:solidFill>
+                  <a:srgbClr val="323232"/>
+                </a:solidFill>
+              </a:defRPr>
+            </a:pPr>
+            <a:r>
+              <a:t>To fix:</a:t>
+            </a:r>
+          </a:p>
+          <a:p>
+            <a:pPr>
+              <a:spcAft>
+                <a:spcPts val="1200"/>
+              </a:spcAft>
+              <a:defRPr sz="1800">
+                <a:solidFill>
+                  <a:srgbClr val="323232"/>
+                </a:solidFill>
+              </a:defRPr>
+            </a:pPr>
+            <a:r>
+              <a:t>1. Go back to series selector</a:t>
+            </a:r>
+          </a:p>
+          <a:p>
+            <a:pPr>
+              <a:spcAft>
+                <a:spcPts val="1200"/>
+              </a:spcAft>
+              <a:defRPr sz="1800">
+                <a:solidFill>
+                  <a:srgbClr val="323232"/>
+                </a:solidFill>
+              </a:defRPr>
+            </a:pPr>
+            <a:r>
+              <a:t>2. Uncheck mismatched series</a:t>
+            </a:r>
+          </a:p>
+          <a:p>
+            <a:pPr>
+              <a:spcAft>
+                <a:spcPts val="1200"/>
+              </a:spcAft>
+              <a:defRPr sz="1800">
+                <a:solidFill>
+                  <a:srgbClr val="323232"/>
+                </a:solidFill>
+              </a:defRPr>
+            </a:pPr>
+            <a:r>
+              <a:t>3. Keep only series with same:</a:t>
+            </a:r>
+          </a:p>
+          <a:p>
+            <a:pPr>
+              <a:spcAft>
+                <a:spcPts val="1200"/>
+              </a:spcAft>
+              <a:defRPr sz="1800">
+                <a:solidFill>
+                  <a:srgbClr val="323232"/>
+                </a:solidFill>
+              </a:defRPr>
+            </a:pPr>
+            <a:r>
+              <a:t>   • Design ID</a:t>
+            </a:r>
+          </a:p>
+          <a:p>
+            <a:pPr>
+              <a:spcAft>
+                <a:spcPts val="1200"/>
+              </a:spcAft>
+              <a:defRPr sz="1800">
+                <a:solidFill>
+                  <a:srgbClr val="323232"/>
+                </a:solidFill>
+              </a:defRPr>
+            </a:pPr>
+            <a:r>
+              <a:t>   • Density</a:t>
+            </a:r>
+          </a:p>
+          <a:p>
+            <a:pPr>
+              <a:spcAft>
+                <a:spcPts val="1200"/>
+              </a:spcAft>
+              <a:defRPr sz="1800">
+                <a:solidFill>
+                  <a:srgbClr val="323232"/>
+                </a:solidFill>
+              </a:defRPr>
+            </a:pPr>
+            <a:r>
+              <a:t>   • Speed</a:t>
+            </a:r>
+          </a:p>
+        </p:txBody>
+      </p:sp>
+      <p:sp>
+        <p:nvSpPr>
+          <p:cNvPr id="5" name="Rounded Rectangle 4"/>
+          <p:cNvSpPr/>
+          <p:nvPr/>
+        </p:nvSpPr>
+        <p:spPr>
+          <a:xfrm>
+            <a:off x="5943600" y="1371600"/>
+            <a:ext cx="5760720" cy="5029200"/>
+          </a:xfrm>
+          <a:prstGeom prst="roundRect">
+            <a:avLst/>
+          </a:prstGeom>
+          <a:solidFill>
+            <a:srgbClr val="F0F0F0"/>
+          </a:solidFill>
+          <a:ln>
+            <a:solidFill>
+              <a:srgbClr val="969696"/>
+            </a:solidFill>
+          </a:ln>
+        </p:spPr>
+        <p:style>
+          <a:lnRef idx="1">
+            <a:schemeClr val="accent1"/>
+          </a:lnRef>
+          <a:fillRef idx="3">
+            <a:schemeClr val="accent1"/>
+          </a:fillRef>
+          <a:effectRef idx="2">
+            <a:schemeClr val="accent1"/>
+          </a:effectRef>
+          <a:fontRef idx="minor">
+            <a:schemeClr val="lt1"/>
+          </a:fontRef>
+        </p:style>
+        <p:txBody>
+          <a:bodyPr rtlCol="0" anchor="ctr"/>
+          <a:lstStyle/>
+          <a:p>
+            <a:pPr algn="ctr"/>
+          </a:p>
+        </p:txBody>
+      </p:sp>
+      <p:sp>
+        <p:nvSpPr>
+          <p:cNvPr id="6" name="TextBox 5"/>
+          <p:cNvSpPr txBox="1"/>
+          <p:nvPr/>
+        </p:nvSpPr>
+        <p:spPr>
+          <a:xfrm>
+            <a:off x="6126480" y="1554480"/>
+            <a:ext cx="5394960" cy="4663440"/>
+          </a:xfrm>
+          <a:prstGeom prst="rect">
+            <a:avLst/>
+          </a:prstGeom>
+          <a:noFill/>
+        </p:spPr>
+        <p:txBody>
+          <a:bodyPr wrap="square">
+            <a:spAutoFit/>
+          </a:bodyPr>
+          <a:lstStyle/>
+          <a:p>
+            <a:pPr>
+              <a:defRPr sz="1000">
+                <a:solidFill>
+                  <a:srgbClr val="323232"/>
+                </a:solidFill>
+                <a:latin typeface="Courier New"/>
+              </a:defRPr>
+            </a:pPr>
+            <a:r>
+              <a:t>┌─────────────────────────────────────────────────┐</a:t>
+            </a:r>
+            <a:br/>
+            <a:r>
+              <a:t>│                                                 │</a:t>
+            </a:r>
+            <a:br/>
+            <a:r>
+              <a:t>│  ⚠️ WARNING                                     │</a:t>
+            </a:r>
+            <a:br/>
+            <a:r>
+              <a:t>│  ─────────────────────────────────────────────  │</a:t>
+            </a:r>
+            <a:br/>
+            <a:r>
+              <a:t>│                                                 │</a:t>
+            </a:r>
+            <a:br/>
+            <a:r>
+              <a:t>│  Targets require single config.                 │</a:t>
+            </a:r>
+            <a:br/>
+            <a:r>
+              <a:t>│                                                 │</a:t>
+            </a:r>
+            <a:br/>
+            <a:r>
+              <a:t>│  Select series with same                        │</a:t>
+            </a:r>
+            <a:br/>
+            <a:r>
+              <a:t>│  DID + Density + Speed to show                  │</a:t>
+            </a:r>
+            <a:br/>
+            <a:r>
+              <a:t>│  target lines.                                  │</a:t>
+            </a:r>
+            <a:br/>
+            <a:r>
+              <a:t>│                                                 │</a:t>
+            </a:r>
+            <a:br/>
+            <a:r>
+              <a:t>│  Currently selected:                            │</a:t>
+            </a:r>
+            <a:br/>
+            <a:r>
+              <a:t>│  • Y6CP_192GB_7500MTPS ← ✓ Same                │</a:t>
+            </a:r>
+            <a:br/>
+            <a:r>
+              <a:t>│  • Y62P_64GB_9600MTPS  ← ✗ Different           │</a:t>
+            </a:r>
+            <a:br/>
+            <a:r>
+              <a:t>│                                                 │</a:t>
+            </a:r>
+            <a:br/>
+            <a:r>
+              <a:t>│  Remove mismatched series to enable targets.    │</a:t>
+            </a:r>
+            <a:br/>
+            <a:r>
+              <a:t>│                                                 │</a:t>
+            </a:r>
+            <a:br/>
+            <a:r>
+              <a:t>└─────────────────────────────────────────────────┘</a:t>
+            </a:r>
+          </a:p>
+        </p:txBody>
+      </p:sp>
+    </p:spTree>
+  </p:cSld>
+  <p:clrMapOvr>
+    <a:masterClrMapping/>
+  </p:clrMapOvr>
+</p:sld>
+</file>
+
+<file path=ppt/slides/slide9.xml><?xml version="1.0" encoding="utf-8"?>
+<p:sld xmlns:a="http://schemas.openxmlformats.org/drawingml/2006/main" xmlns:p="http://schemas.openxmlformats.org/presentationml/2006/main" xmlns:r="http://schemas.openxmlformats.org/officeDocument/2006/relationships">
+  <p:cSld>
+    <p:spTree>
+      <p:nvGrpSpPr>
+        <p:cNvPr id="1" name=""/>
+        <p:cNvGrpSpPr/>
+        <p:nvPr/>
+      </p:nvGrpSpPr>
+      <p:grpSpPr/>
+      <p:sp>
+        <p:nvSpPr>
+          <p:cNvPr id="2" name="Rectangle 1"/>
+          <p:cNvSpPr/>
+          <p:nvPr/>
+        </p:nvSpPr>
+        <p:spPr>
+          <a:xfrm>
+            <a:off x="0" y="0"/>
+            <a:ext cx="12191695" cy="1097280"/>
+          </a:xfrm>
+          <a:prstGeom prst="rect">
+            <a:avLst/>
+          </a:prstGeom>
+          <a:solidFill>
+            <a:srgbClr val="003366"/>
+          </a:solidFill>
+          <a:ln>
+            <a:noFill/>
+          </a:ln>
+        </p:spPr>
+        <p:style>
+          <a:lnRef idx="1">
+            <a:schemeClr val="accent1"/>
+          </a:lnRef>
+          <a:fillRef idx="3">
+            <a:schemeClr val="accent1"/>
+          </a:fillRef>
+          <a:effectRef idx="2">
+            <a:schemeClr val="accent1"/>
+          </a:effectRef>
+          <a:fontRef idx="minor">
+            <a:schemeClr val="lt1"/>
+          </a:fontRef>
+        </p:style>
+        <p:txBody>
+          <a:bodyPr rtlCol="0" anchor="ctr"/>
+          <a:lstStyle/>
+          <a:p>
+            <a:pPr algn="ctr"/>
+          </a:p>
+        </p:txBody>
+      </p:sp>
+      <p:sp>
+        <p:nvSpPr>
+          <p:cNvPr id="3" name="TextBox 2"/>
+          <p:cNvSpPr txBox="1"/>
+          <p:nvPr/>
+        </p:nvSpPr>
+        <p:spPr>
+          <a:xfrm>
+            <a:off x="457200" y="274320"/>
+            <a:ext cx="10972800" cy="731520"/>
+          </a:xfrm>
+          <a:prstGeom prst="rect">
+            <a:avLst/>
+          </a:prstGeom>
+          <a:noFill/>
+        </p:spPr>
+        <p:txBody>
+          <a:bodyPr wrap="none">
+            <a:spAutoFit/>
+          </a:bodyPr>
+          <a:lstStyle/>
+          <a:p>
+            <a:pPr>
+              <a:defRPr sz="3200" b="1">
+                <a:solidFill>
+                  <a:srgbClr val="FFFFFF"/>
+                </a:solidFill>
+              </a:defRPr>
+            </a:pPr>
+            <a:r>
+              <a:t>Example: Complete Workflow</a:t>
+            </a:r>
+          </a:p>
+        </p:txBody>
+      </p:sp>
+      <p:sp>
+        <p:nvSpPr>
+          <p:cNvPr id="4" name="TextBox 3"/>
+          <p:cNvSpPr txBox="1"/>
+          <p:nvPr/>
+        </p:nvSpPr>
+        <p:spPr>
+          <a:xfrm>
+            <a:off x="457200" y="1371600"/>
+            <a:ext cx="5029200" cy="5029200"/>
+          </a:xfrm>
+          <a:prstGeom prst="rect">
+            <a:avLst/>
+          </a:prstGeom>
+          <a:noFill/>
+        </p:spPr>
+        <p:txBody>
+          <a:bodyPr wrap="square">
+            <a:spAutoFit/>
+          </a:bodyPr>
+          <a:lstStyle/>
+          <a:p>
+            <a:pPr>
+              <a:spcAft>
+                <a:spcPts val="1200"/>
+              </a:spcAft>
+              <a:defRPr sz="1800">
+                <a:solidFill>
+                  <a:srgbClr val="323232"/>
+                </a:solidFill>
+              </a:defRPr>
+            </a:pPr>
+            <a:r>
+              <a:t>Goal: View Y6CP 192GB 7500MT</a:t>
+            </a:r>
+          </a:p>
+          <a:p>
+            <a:pPr>
+              <a:spcAft>
+                <a:spcPts val="1200"/>
+              </a:spcAft>
+              <a:defRPr sz="1800">
+                <a:solidFill>
+                  <a:srgbClr val="323232"/>
+                </a:solidFill>
+              </a:defRPr>
+            </a:pPr>
+            <a:r>
+              <a:t>      with D1 projection lines</a:t>
+            </a:r>
+          </a:p>
+          <a:p>
+            <a:pPr>
+              <a:spcAft>
+                <a:spcPts val="1200"/>
+              </a:spcAft>
+              <a:defRPr sz="1800">
+                <a:solidFill>
+                  <a:srgbClr val="323232"/>
+                </a:solidFill>
+              </a:defRPr>
+            </a:pPr>
+          </a:p>
+          <a:p>
+            <a:pPr>
+              <a:spcAft>
+                <a:spcPts val="1200"/>
+              </a:spcAft>
+              <a:defRPr sz="1800">
+                <a:solidFill>
+                  <a:srgbClr val="323232"/>
+                </a:solidFill>
+              </a:defRPr>
+            </a:pPr>
+            <a:r>
+              <a:t>Steps:</a:t>
+            </a:r>
+          </a:p>
+          <a:p>
+            <a:pPr>
+              <a:spcAft>
+                <a:spcPts val="1200"/>
+              </a:spcAft>
+              <a:defRPr sz="1800">
+                <a:solidFill>
+                  <a:srgbClr val="323232"/>
+                </a:solidFill>
+              </a:defRPr>
+            </a:pPr>
+            <a:r>
+              <a:t>1. Set sidebar filters</a:t>
+            </a:r>
+          </a:p>
+          <a:p>
+            <a:pPr>
+              <a:spcAft>
+                <a:spcPts val="1200"/>
+              </a:spcAft>
+              <a:defRPr sz="1800">
+                <a:solidFill>
+                  <a:srgbClr val="323232"/>
+                </a:solidFill>
+              </a:defRPr>
+            </a:pPr>
+            <a:r>
+              <a:t>   (Form, Step, DID, Facility, WW)</a:t>
+            </a:r>
+          </a:p>
+          <a:p>
+            <a:pPr>
+              <a:spcAft>
+                <a:spcPts val="1200"/>
+              </a:spcAft>
+              <a:defRPr sz="1800">
+                <a:solidFill>
+                  <a:srgbClr val="323232"/>
+                </a:solidFill>
+              </a:defRPr>
+            </a:pPr>
+          </a:p>
+          <a:p>
+            <a:pPr>
+              <a:spcAft>
+                <a:spcPts val="1200"/>
+              </a:spcAft>
+              <a:defRPr sz="1800">
+                <a:solidFill>
+                  <a:srgbClr val="323232"/>
+                </a:solidFill>
+              </a:defRPr>
+            </a:pPr>
+            <a:r>
+              <a:t>2. Select ONLY matching series</a:t>
+            </a:r>
+          </a:p>
+          <a:p>
+            <a:pPr>
+              <a:spcAft>
+                <a:spcPts val="1200"/>
+              </a:spcAft>
+              <a:defRPr sz="1800">
+                <a:solidFill>
+                  <a:srgbClr val="323232"/>
+                </a:solidFill>
+              </a:defRPr>
+            </a:pPr>
+            <a:r>
+              <a:t>   (same DID+Density+Speed)</a:t>
+            </a:r>
+          </a:p>
+          <a:p>
+            <a:pPr>
+              <a:spcAft>
+                <a:spcPts val="1200"/>
+              </a:spcAft>
+              <a:defRPr sz="1800">
+                <a:solidFill>
+                  <a:srgbClr val="323232"/>
+                </a:solidFill>
+              </a:defRPr>
+            </a:pPr>
+          </a:p>
+          <a:p>
+            <a:pPr>
+              <a:spcAft>
+                <a:spcPts val="1200"/>
+              </a:spcAft>
+              <a:defRPr sz="1800">
+                <a:solidFill>
+                  <a:srgbClr val="323232"/>
+                </a:solidFill>
+              </a:defRPr>
+            </a:pPr>
+            <a:r>
+              <a:t>3. Enable 'Show D1 Target Lines'</a:t>
+            </a:r>
+          </a:p>
+          <a:p>
+            <a:pPr>
+              <a:spcAft>
+                <a:spcPts val="1200"/>
+              </a:spcAft>
+              <a:defRPr sz="1800">
+                <a:solidFill>
+                  <a:srgbClr val="323232"/>
+                </a:solidFill>
+              </a:defRPr>
+            </a:pPr>
+          </a:p>
+          <a:p>
+            <a:pPr>
+              <a:spcAft>
+                <a:spcPts val="1200"/>
+              </a:spcAft>
+              <a:defRPr sz="1800">
+                <a:solidFill>
+                  <a:srgbClr val="323232"/>
+                </a:solidFill>
+              </a:defRPr>
+            </a:pPr>
+            <a:r>
+              <a:t>4. Review chart comparison</a:t>
+            </a:r>
+          </a:p>
+        </p:txBody>
+      </p:sp>
+      <p:sp>
+        <p:nvSpPr>
+          <p:cNvPr id="5" name="Rounded Rectangle 4"/>
+          <p:cNvSpPr/>
+          <p:nvPr/>
+        </p:nvSpPr>
+        <p:spPr>
+          <a:xfrm>
+            <a:off x="5943600" y="1371600"/>
+            <a:ext cx="5760720" cy="5029200"/>
+          </a:xfrm>
+          <a:prstGeom prst="roundRect">
+            <a:avLst/>
+          </a:prstGeom>
+          <a:solidFill>
+            <a:srgbClr val="F0F0F0"/>
+          </a:solidFill>
+          <a:ln>
+            <a:solidFill>
+              <a:srgbClr val="969696"/>
+            </a:solidFill>
+          </a:ln>
+        </p:spPr>
+        <p:style>
+          <a:lnRef idx="1">
+            <a:schemeClr val="accent1"/>
+          </a:lnRef>
+          <a:fillRef idx="3">
+            <a:schemeClr val="accent1"/>
+          </a:fillRef>
+          <a:effectRef idx="2">
+            <a:schemeClr val="accent1"/>
+          </a:effectRef>
+          <a:fontRef idx="minor">
+            <a:schemeClr val="lt1"/>
+          </a:fontRef>
+        </p:style>
+        <p:txBody>
+          <a:bodyPr rtlCol="0" anchor="ctr"/>
+          <a:lstStyle/>
+          <a:p>
+            <a:pPr algn="ctr"/>
+          </a:p>
+        </p:txBody>
+      </p:sp>
+      <p:sp>
+        <p:nvSpPr>
+          <p:cNvPr id="6" name="TextBox 5"/>
+          <p:cNvSpPr txBox="1"/>
+          <p:nvPr/>
+        </p:nvSpPr>
+        <p:spPr>
+          <a:xfrm>
+            <a:off x="6126480" y="1554480"/>
+            <a:ext cx="5394960" cy="4663440"/>
+          </a:xfrm>
+          <a:prstGeom prst="rect">
+            <a:avLst/>
+          </a:prstGeom>
+          <a:noFill/>
+        </p:spPr>
+        <p:txBody>
+          <a:bodyPr wrap="square">
+            <a:spAutoFit/>
+          </a:bodyPr>
+          <a:lstStyle/>
+          <a:p>
+            <a:pPr>
+              <a:defRPr sz="1000">
+                <a:solidFill>
+                  <a:srgbClr val="323232"/>
+                </a:solidFill>
+                <a:latin typeface="Courier New"/>
+              </a:defRPr>
+            </a:pPr>
+            <a:r>
+              <a:t>GOAL: View Y6CP 192GB 7500MTPS with targets</a:t>
+            </a:r>
+            <a:br/>
+            <a:br/>
+            <a:r>
+              <a:t>┌─ SIDEBAR ──────────────────────────────────────┐</a:t>
+            </a:r>
+            <a:br/>
+            <a:r>
+              <a:t>│ Form Factor: [✓] SOCAMM2                       │</a:t>
+            </a:r>
+            <a:br/>
+            <a:r>
+              <a:t>│ Test Step:   [✓] HMFN [✓] HMB1 [✓] QMON        │</a:t>
+            </a:r>
+            <a:br/>
+            <a:r>
+              <a:t>│ Design ID:   [✓] Y6CP                          │</a:t>
+            </a:r>
+            <a:br/>
+            <a:r>
+              <a:t>│ Facility:    [✓] PENANG                        │</a:t>
+            </a:r>
+            <a:br/>
+            <a:r>
+              <a:t>│ Work Week:   2026 WW06-WW15                    │</a:t>
+            </a:r>
+            <a:br/>
+            <a:r>
+              <a:t>└────────────────────────────────────────────────┘</a:t>
+            </a:r>
+            <a:br/>
+            <a:r>
+              <a:t>           ↓</a:t>
+            </a:r>
+            <a:br/>
+            <a:r>
+              <a:t>┌─ SERIES SELECTOR ──────────────────────────────┐</a:t>
+            </a:r>
+            <a:br/>
+            <a:r>
+              <a:t>│ [✓] Y6CP_SOCAMM2_192GB_7500MTPS_HMFN          │</a:t>
+            </a:r>
+            <a:br/>
+            <a:r>
+              <a:t>│ [✓] Y6CP_SOCAMM2_192GB_7500MTPS_SLT           │</a:t>
+            </a:r>
+            <a:br/>
+            <a:r>
+              <a:t>│ [✓] Y6CP_SOCAMM2_192GB_7500MTPS_ELC           │</a:t>
+            </a:r>
+            <a:br/>
+            <a:r>
+              <a:t>│ [ ] Y6CP_SOCAMM2_96GB_9600MTPS_HMFN           │</a:t>
+            </a:r>
+            <a:br/>
+            <a:r>
+              <a:t>│ [ ] ... (other configs unchecked)              │</a:t>
+            </a:r>
+            <a:br/>
+            <a:r>
+              <a:t>└────────────────────────────────────────────────┘</a:t>
+            </a:r>
+            <a:br/>
+            <a:r>
+              <a:t>           ↓</a:t>
+            </a:r>
+            <a:br/>
+            <a:r>
+              <a:t>┌─ ENABLE TARGETS ───────────────────────────────┐</a:t>
+            </a:r>
+            <a:br/>
+            <a:r>
+              <a:t>│ [✓] Show D1 Target Lines  ← Check this!        │</a:t>
+            </a:r>
+            <a:br/>
+            <a:r>
+              <a:t>└────────────────────────────────────────────────┘</a:t>
             </a:r>
           </a:p>
         </p:txBody>

--- a/Module_ELC_Yield_User_Guide.pptx
+++ b/Module_ELC_Yield_User_Guide.pptx
@@ -16,7 +16,6 @@
     <p:sldId id="264" r:id="rId15"/>
     <p:sldId id="265" r:id="rId16"/>
     <p:sldId id="266" r:id="rId17"/>
-    <p:sldId id="267" r:id="rId18"/>
   </p:sldIdLst>
   <p:sldSz cx="12191695" cy="6858000" type="screen4x3"/>
   <p:notesSz cx="6858000" cy="9144000"/>
@@ -3186,6 +3185,10 @@
             <a:r>
               <a:t>Step-by-Step User Guide</a:t>
             </a:r>
+            <a:br/>
+            <a:r>
+              <a:t>April 2026</a:t>
+            </a:r>
           </a:p>
         </p:txBody>
       </p:sp>
@@ -3216,7 +3219,7 @@
         <p:spPr>
           <a:xfrm>
             <a:off x="0" y="0"/>
-            <a:ext cx="12191695" cy="1097280"/>
+            <a:ext cx="12191695" cy="914400"/>
           </a:xfrm>
           <a:prstGeom prst="rect">
             <a:avLst/>
@@ -3258,8 +3261,8 @@
         </p:nvSpPr>
         <p:spPr>
           <a:xfrm>
-            <a:off x="457200" y="274320"/>
-            <a:ext cx="10972800" cy="731520"/>
+            <a:off x="457200" y="228600"/>
+            <a:ext cx="10972800" cy="548640"/>
           </a:xfrm>
           <a:prstGeom prst="rect">
             <a:avLst/>
@@ -3273,7 +3276,7 @@
           <a:lstStyle/>
           <a:p>
             <a:pPr>
-              <a:defRPr sz="3200" b="1">
+              <a:defRPr sz="2800" b="1">
                 <a:solidFill>
                   <a:srgbClr val="FFFFFF"/>
                 </a:solidFill>
@@ -3293,8 +3296,8 @@
         </p:nvSpPr>
         <p:spPr>
           <a:xfrm>
-            <a:off x="457200" y="1371600"/>
-            <a:ext cx="5029200" cy="5029200"/>
+            <a:off x="457200" y="1188720"/>
+            <a:ext cx="5029200" cy="5303520"/>
           </a:xfrm>
           <a:prstGeom prst="rect">
             <a:avLst/>
@@ -3309,7 +3312,7 @@
           <a:p>
             <a:pPr>
               <a:spcAft>
-                <a:spcPts val="1200"/>
+                <a:spcPts val="1000"/>
               </a:spcAft>
               <a:defRPr sz="1800">
                 <a:solidFill>
@@ -3324,49 +3327,34 @@
           <a:p>
             <a:pPr>
               <a:spcAft>
-                <a:spcPts val="1200"/>
-              </a:spcAft>
-              <a:defRPr sz="1800">
-                <a:solidFill>
-                  <a:srgbClr val="323232"/>
-                </a:solidFill>
-              </a:defRPr>
-            </a:pPr>
-            <a:r>
-              <a:t>these DID + Density + Speed</a:t>
-            </a:r>
-          </a:p>
-          <a:p>
-            <a:pPr>
-              <a:spcAft>
-                <a:spcPts val="1200"/>
-              </a:spcAft>
-              <a:defRPr sz="1800">
-                <a:solidFill>
-                  <a:srgbClr val="323232"/>
-                </a:solidFill>
-              </a:defRPr>
-            </a:pPr>
-            <a:r>
-              <a:t>combinations:</a:t>
-            </a:r>
-          </a:p>
-          <a:p>
-            <a:pPr>
-              <a:spcAft>
-                <a:spcPts val="1200"/>
-              </a:spcAft>
-              <a:defRPr sz="1800">
-                <a:solidFill>
-                  <a:srgbClr val="323232"/>
-                </a:solidFill>
-              </a:defRPr>
-            </a:pPr>
-          </a:p>
-          <a:p>
-            <a:pPr>
-              <a:spcAft>
-                <a:spcPts val="1200"/>
+                <a:spcPts val="1000"/>
+              </a:spcAft>
+              <a:defRPr sz="1800">
+                <a:solidFill>
+                  <a:srgbClr val="323232"/>
+                </a:solidFill>
+              </a:defRPr>
+            </a:pPr>
+            <a:r>
+              <a:t>these DID + Density + Speed:</a:t>
+            </a:r>
+          </a:p>
+          <a:p>
+            <a:pPr>
+              <a:spcAft>
+                <a:spcPts val="1000"/>
+              </a:spcAft>
+              <a:defRPr sz="1800">
+                <a:solidFill>
+                  <a:srgbClr val="323232"/>
+                </a:solidFill>
+              </a:defRPr>
+            </a:pPr>
+          </a:p>
+          <a:p>
+            <a:pPr>
+              <a:spcAft>
+                <a:spcPts val="1000"/>
               </a:spcAft>
               <a:defRPr sz="1800">
                 <a:solidFill>
@@ -3381,7 +3369,7 @@
           <a:p>
             <a:pPr>
               <a:spcAft>
-                <a:spcPts val="1200"/>
+                <a:spcPts val="1000"/>
               </a:spcAft>
               <a:defRPr sz="1800">
                 <a:solidFill>
@@ -3396,19 +3384,19 @@
           <a:p>
             <a:pPr>
               <a:spcAft>
-                <a:spcPts val="1200"/>
-              </a:spcAft>
-              <a:defRPr sz="1800">
-                <a:solidFill>
-                  <a:srgbClr val="323232"/>
-                </a:solidFill>
-              </a:defRPr>
-            </a:pPr>
-          </a:p>
-          <a:p>
-            <a:pPr>
-              <a:spcAft>
-                <a:spcPts val="1200"/>
+                <a:spcPts val="1000"/>
+              </a:spcAft>
+              <a:defRPr sz="1800">
+                <a:solidFill>
+                  <a:srgbClr val="323232"/>
+                </a:solidFill>
+              </a:defRPr>
+            </a:pPr>
+          </a:p>
+          <a:p>
+            <a:pPr>
+              <a:spcAft>
+                <a:spcPts val="1000"/>
               </a:spcAft>
               <a:defRPr sz="1800">
                 <a:solidFill>
@@ -3423,19 +3411,19 @@
           <a:p>
             <a:pPr>
               <a:spcAft>
-                <a:spcPts val="1200"/>
-              </a:spcAft>
-              <a:defRPr sz="1800">
-                <a:solidFill>
-                  <a:srgbClr val="323232"/>
-                </a:solidFill>
-              </a:defRPr>
-            </a:pPr>
-          </a:p>
-          <a:p>
-            <a:pPr>
-              <a:spcAft>
-                <a:spcPts val="1200"/>
+                <a:spcPts val="1000"/>
+              </a:spcAft>
+              <a:defRPr sz="1800">
+                <a:solidFill>
+                  <a:srgbClr val="323232"/>
+                </a:solidFill>
+              </a:defRPr>
+            </a:pPr>
+          </a:p>
+          <a:p>
+            <a:pPr>
+              <a:spcAft>
+                <a:spcPts val="1000"/>
               </a:spcAft>
               <a:defRPr sz="1800">
                 <a:solidFill>
@@ -3450,7 +3438,7 @@
           <a:p>
             <a:pPr>
               <a:spcAft>
-                <a:spcPts val="1200"/>
+                <a:spcPts val="1000"/>
               </a:spcAft>
               <a:defRPr sz="1800">
                 <a:solidFill>
@@ -3465,7 +3453,7 @@
           <a:p>
             <a:pPr>
               <a:spcAft>
-                <a:spcPts val="1200"/>
+                <a:spcPts val="1000"/>
               </a:spcAft>
               <a:defRPr sz="1800">
                 <a:solidFill>
@@ -3487,18 +3475,18 @@
         </p:nvSpPr>
         <p:spPr>
           <a:xfrm>
-            <a:off x="5943600" y="1371600"/>
-            <a:ext cx="5760720" cy="5029200"/>
+            <a:off x="5943600" y="1188720"/>
+            <a:ext cx="5760720" cy="5303520"/>
           </a:xfrm>
           <a:prstGeom prst="roundRect">
             <a:avLst/>
           </a:prstGeom>
           <a:solidFill>
-            <a:srgbClr val="F0F0F0"/>
+            <a:srgbClr val="F5F5F5"/>
           </a:solidFill>
           <a:ln>
             <a:solidFill>
-              <a:srgbClr val="969696"/>
+              <a:srgbClr val="B4B4B4"/>
             </a:solidFill>
           </a:ln>
         </p:spPr>
@@ -3532,8 +3520,8 @@
         </p:nvSpPr>
         <p:spPr>
           <a:xfrm>
-            <a:off x="6126480" y="1554480"/>
-            <a:ext cx="5394960" cy="4663440"/>
+            <a:off x="6126480" y="1371600"/>
+            <a:ext cx="5394960" cy="4937760"/>
           </a:xfrm>
           <a:prstGeom prst="rect">
             <a:avLst/>
@@ -3616,10 +3604,6 @@
             <a:br/>
             <a:r>
               <a:t>│         (Starts Apr'27)                         │</a:t>
-            </a:r>
-            <a:br/>
-            <a:r>
-              <a:t>│                                                 │</a:t>
             </a:r>
             <a:br/>
             <a:r>
@@ -3655,7 +3639,7 @@
         <p:spPr>
           <a:xfrm>
             <a:off x="0" y="0"/>
-            <a:ext cx="12191695" cy="1097280"/>
+            <a:ext cx="12191695" cy="914400"/>
           </a:xfrm>
           <a:prstGeom prst="rect">
             <a:avLst/>
@@ -3697,8 +3681,8 @@
         </p:nvSpPr>
         <p:spPr>
           <a:xfrm>
-            <a:off x="457200" y="274320"/>
-            <a:ext cx="10972800" cy="731520"/>
+            <a:off x="457200" y="228600"/>
+            <a:ext cx="10972800" cy="548640"/>
           </a:xfrm>
           <a:prstGeom prst="rect">
             <a:avLst/>
@@ -3712,14 +3696,14 @@
           <a:lstStyle/>
           <a:p>
             <a:pPr>
-              <a:defRPr sz="3200" b="1">
+              <a:defRPr sz="2800" b="1">
                 <a:solidFill>
                   <a:srgbClr val="FFFFFF"/>
                 </a:solidFill>
               </a:defRPr>
             </a:pPr>
             <a:r>
-              <a:t>Pro Tips</a:t>
+              <a:t>Quick Reference</a:t>
             </a:r>
           </a:p>
         </p:txBody>
@@ -3732,8 +3716,8 @@
         </p:nvSpPr>
         <p:spPr>
           <a:xfrm>
-            <a:off x="457200" y="1371600"/>
-            <a:ext cx="11277295" cy="5029200"/>
+            <a:off x="457200" y="1188720"/>
+            <a:ext cx="5029200" cy="5303520"/>
           </a:xfrm>
           <a:prstGeom prst="rect">
             <a:avLst/>
@@ -3748,226 +3732,299 @@
           <a:p>
             <a:pPr>
               <a:spcAft>
-                <a:spcPts val="1200"/>
-              </a:spcAft>
-              <a:defRPr sz="1800">
-                <a:solidFill>
-                  <a:srgbClr val="323232"/>
-                </a:solidFill>
-              </a:defRPr>
-            </a:pPr>
-            <a:r>
-              <a:t>💡 Quick Reference:</a:t>
-            </a:r>
-          </a:p>
-          <a:p>
-            <a:pPr>
-              <a:spcAft>
-                <a:spcPts val="1200"/>
-              </a:spcAft>
-              <a:defRPr sz="1800">
-                <a:solidFill>
-                  <a:srgbClr val="323232"/>
-                </a:solidFill>
-              </a:defRPr>
-            </a:pPr>
-          </a:p>
-          <a:p>
-            <a:pPr>
-              <a:spcAft>
-                <a:spcPts val="1200"/>
-              </a:spcAft>
-              <a:defRPr sz="1800">
-                <a:solidFill>
-                  <a:srgbClr val="323232"/>
-                </a:solidFill>
-              </a:defRPr>
-            </a:pPr>
-            <a:r>
-              <a:t>1. Always start with narrow filters</a:t>
-            </a:r>
-          </a:p>
-          <a:p>
-            <a:pPr>
-              <a:spcAft>
-                <a:spcPts val="1200"/>
-              </a:spcAft>
-              <a:defRPr sz="1800">
-                <a:solidFill>
-                  <a:srgbClr val="323232"/>
-                </a:solidFill>
-              </a:defRPr>
-            </a:pPr>
-            <a:r>
-              <a:t>   (single DID, single form factor)</a:t>
-            </a:r>
-          </a:p>
-          <a:p>
-            <a:pPr>
-              <a:spcAft>
-                <a:spcPts val="1200"/>
-              </a:spcAft>
-              <a:defRPr sz="1800">
-                <a:solidFill>
-                  <a:srgbClr val="323232"/>
-                </a:solidFill>
-              </a:defRPr>
-            </a:pPr>
-          </a:p>
-          <a:p>
-            <a:pPr>
-              <a:spcAft>
-                <a:spcPts val="1200"/>
-              </a:spcAft>
-              <a:defRPr sz="1800">
-                <a:solidFill>
-                  <a:srgbClr val="323232"/>
-                </a:solidFill>
-              </a:defRPr>
-            </a:pPr>
-            <a:r>
-              <a:t>2. Select all 3 steps (HMFN, SLT, ELC)</a:t>
-            </a:r>
-          </a:p>
-          <a:p>
-            <a:pPr>
-              <a:spcAft>
-                <a:spcPts val="1200"/>
-              </a:spcAft>
-              <a:defRPr sz="1800">
-                <a:solidFill>
-                  <a:srgbClr val="323232"/>
-                </a:solidFill>
-              </a:defRPr>
-            </a:pPr>
-            <a:r>
-              <a:t>   to see the complete yield flow</a:t>
-            </a:r>
-          </a:p>
-          <a:p>
-            <a:pPr>
-              <a:spcAft>
-                <a:spcPts val="1200"/>
-              </a:spcAft>
-              <a:defRPr sz="1800">
-                <a:solidFill>
-                  <a:srgbClr val="323232"/>
-                </a:solidFill>
-              </a:defRPr>
-            </a:pPr>
-          </a:p>
-          <a:p>
-            <a:pPr>
-              <a:spcAft>
-                <a:spcPts val="1200"/>
-              </a:spcAft>
-              <a:defRPr sz="1800">
-                <a:solidFill>
-                  <a:srgbClr val="323232"/>
-                </a:solidFill>
-              </a:defRPr>
-            </a:pPr>
-            <a:r>
-              <a:t>3. Use 'Select All' then uncheck</a:t>
-            </a:r>
-          </a:p>
-          <a:p>
-            <a:pPr>
-              <a:spcAft>
-                <a:spcPts val="1200"/>
-              </a:spcAft>
-              <a:defRPr sz="1800">
-                <a:solidFill>
-                  <a:srgbClr val="323232"/>
-                </a:solidFill>
-              </a:defRPr>
-            </a:pPr>
-            <a:r>
-              <a:t>   unwanted configs</a:t>
-            </a:r>
-          </a:p>
-          <a:p>
-            <a:pPr>
-              <a:spcAft>
-                <a:spcPts val="1200"/>
-              </a:spcAft>
-              <a:defRPr sz="1800">
-                <a:solidFill>
-                  <a:srgbClr val="323232"/>
-                </a:solidFill>
-              </a:defRPr>
-            </a:pPr>
-          </a:p>
-          <a:p>
-            <a:pPr>
-              <a:spcAft>
-                <a:spcPts val="1200"/>
-              </a:spcAft>
-              <a:defRPr sz="1800">
-                <a:solidFill>
-                  <a:srgbClr val="323232"/>
-                </a:solidFill>
-              </a:defRPr>
-            </a:pPr>
-            <a:r>
-              <a:t>4. Hover over chart points for</a:t>
-            </a:r>
-          </a:p>
-          <a:p>
-            <a:pPr>
-              <a:spcAft>
-                <a:spcPts val="1200"/>
-              </a:spcAft>
-              <a:defRPr sz="1800">
-                <a:solidFill>
-                  <a:srgbClr val="323232"/>
-                </a:solidFill>
-              </a:defRPr>
-            </a:pPr>
-            <a:r>
-              <a:t>   exact yield values</a:t>
-            </a:r>
-          </a:p>
-          <a:p>
-            <a:pPr>
-              <a:spcAft>
-                <a:spcPts val="1200"/>
-              </a:spcAft>
-              <a:defRPr sz="1800">
-                <a:solidFill>
-                  <a:srgbClr val="323232"/>
-                </a:solidFill>
-              </a:defRPr>
-            </a:pPr>
-          </a:p>
-          <a:p>
-            <a:pPr>
-              <a:spcAft>
-                <a:spcPts val="1200"/>
-              </a:spcAft>
-              <a:defRPr sz="1800">
-                <a:solidFill>
-                  <a:srgbClr val="323232"/>
-                </a:solidFill>
-              </a:defRPr>
-            </a:pPr>
-            <a:r>
-              <a:t>5. Use 4-week rolling average</a:t>
-            </a:r>
-          </a:p>
-          <a:p>
-            <a:pPr>
-              <a:spcAft>
-                <a:spcPts val="1200"/>
-              </a:spcAft>
-              <a:defRPr sz="1800">
-                <a:solidFill>
-                  <a:srgbClr val="323232"/>
-                </a:solidFill>
-              </a:defRPr>
-            </a:pPr>
-            <a:r>
-              <a:t>   to smooth out weekly noise</a:t>
+                <a:spcPts val="1000"/>
+              </a:spcAft>
+              <a:defRPr sz="1800">
+                <a:solidFill>
+                  <a:srgbClr val="323232"/>
+                </a:solidFill>
+              </a:defRPr>
+            </a:pPr>
+            <a:r>
+              <a:t>Dashboard URL:</a:t>
+            </a:r>
+          </a:p>
+          <a:p>
+            <a:pPr>
+              <a:spcAft>
+                <a:spcPts val="1000"/>
+              </a:spcAft>
+              <a:defRPr sz="1800">
+                <a:solidFill>
+                  <a:srgbClr val="323232"/>
+                </a:solidFill>
+              </a:defRPr>
+            </a:pPr>
+            <a:r>
+              <a:t>http://bolpedh03.micron.com:8502</a:t>
+            </a:r>
+          </a:p>
+          <a:p>
+            <a:pPr>
+              <a:spcAft>
+                <a:spcPts val="1000"/>
+              </a:spcAft>
+              <a:defRPr sz="1800">
+                <a:solidFill>
+                  <a:srgbClr val="323232"/>
+                </a:solidFill>
+              </a:defRPr>
+            </a:pPr>
+          </a:p>
+          <a:p>
+            <a:pPr>
+              <a:spcAft>
+                <a:spcPts val="1000"/>
+              </a:spcAft>
+              <a:defRPr sz="1800">
+                <a:solidFill>
+                  <a:srgbClr val="323232"/>
+                </a:solidFill>
+              </a:defRPr>
+            </a:pPr>
+            <a:r>
+              <a:t>Key Contact:</a:t>
+            </a:r>
+          </a:p>
+          <a:p>
+            <a:pPr>
+              <a:spcAft>
+                <a:spcPts val="1000"/>
+              </a:spcAft>
+              <a:defRPr sz="1800">
+                <a:solidFill>
+                  <a:srgbClr val="323232"/>
+                </a:solidFill>
+              </a:defRPr>
+            </a:pPr>
+            <a:r>
+              <a:t>Asegaran (Dashboard Owner)</a:t>
+            </a:r>
+          </a:p>
+          <a:p>
+            <a:pPr>
+              <a:spcAft>
+                <a:spcPts val="1000"/>
+              </a:spcAft>
+              <a:defRPr sz="1800">
+                <a:solidFill>
+                  <a:srgbClr val="323232"/>
+                </a:solidFill>
+              </a:defRPr>
+            </a:pPr>
+          </a:p>
+          <a:p>
+            <a:pPr>
+              <a:spcAft>
+                <a:spcPts val="1000"/>
+              </a:spcAft>
+              <a:defRPr sz="1800">
+                <a:solidFill>
+                  <a:srgbClr val="323232"/>
+                </a:solidFill>
+              </a:defRPr>
+            </a:pPr>
+            <a:r>
+              <a:t>Data Source:</a:t>
+            </a:r>
+          </a:p>
+          <a:p>
+            <a:pPr>
+              <a:spcAft>
+                <a:spcPts val="1000"/>
+              </a:spcAft>
+              <a:defRPr sz="1800">
+                <a:solidFill>
+                  <a:srgbClr val="323232"/>
+                </a:solidFill>
+              </a:defRPr>
+            </a:pPr>
+            <a:r>
+              <a:t>frpt/mtsums commands</a:t>
+            </a:r>
+          </a:p>
+          <a:p>
+            <a:pPr>
+              <a:spcAft>
+                <a:spcPts val="1000"/>
+              </a:spcAft>
+              <a:defRPr sz="1800">
+                <a:solidFill>
+                  <a:srgbClr val="323232"/>
+                </a:solidFill>
+              </a:defRPr>
+            </a:pPr>
+          </a:p>
+          <a:p>
+            <a:pPr>
+              <a:spcAft>
+                <a:spcPts val="1000"/>
+              </a:spcAft>
+              <a:defRPr sz="1800">
+                <a:solidFill>
+                  <a:srgbClr val="323232"/>
+                </a:solidFill>
+              </a:defRPr>
+            </a:pPr>
+            <a:r>
+              <a:t>Last Updated: April 2026</a:t>
+            </a:r>
+          </a:p>
+        </p:txBody>
+      </p:sp>
+      <p:sp>
+        <p:nvSpPr>
+          <p:cNvPr id="5" name="Rounded Rectangle 4"/>
+          <p:cNvSpPr/>
+          <p:nvPr/>
+        </p:nvSpPr>
+        <p:spPr>
+          <a:xfrm>
+            <a:off x="5943600" y="1188720"/>
+            <a:ext cx="5760720" cy="5303520"/>
+          </a:xfrm>
+          <a:prstGeom prst="roundRect">
+            <a:avLst/>
+          </a:prstGeom>
+          <a:solidFill>
+            <a:srgbClr val="F5F5F5"/>
+          </a:solidFill>
+          <a:ln>
+            <a:solidFill>
+              <a:srgbClr val="B4B4B4"/>
+            </a:solidFill>
+          </a:ln>
+        </p:spPr>
+        <p:style>
+          <a:lnRef idx="1">
+            <a:schemeClr val="accent1"/>
+          </a:lnRef>
+          <a:fillRef idx="3">
+            <a:schemeClr val="accent1"/>
+          </a:fillRef>
+          <a:effectRef idx="2">
+            <a:schemeClr val="accent1"/>
+          </a:effectRef>
+          <a:fontRef idx="minor">
+            <a:schemeClr val="lt1"/>
+          </a:fontRef>
+        </p:style>
+        <p:txBody>
+          <a:bodyPr rtlCol="0" anchor="ctr"/>
+          <a:lstStyle/>
+          <a:p>
+            <a:pPr algn="ctr"/>
+          </a:p>
+        </p:txBody>
+      </p:sp>
+      <p:sp>
+        <p:nvSpPr>
+          <p:cNvPr id="6" name="TextBox 5"/>
+          <p:cNvSpPr txBox="1"/>
+          <p:nvPr/>
+        </p:nvSpPr>
+        <p:spPr>
+          <a:xfrm>
+            <a:off x="6126480" y="1371600"/>
+            <a:ext cx="5394960" cy="4937760"/>
+          </a:xfrm>
+          <a:prstGeom prst="rect">
+            <a:avLst/>
+          </a:prstGeom>
+          <a:noFill/>
+        </p:spPr>
+        <p:txBody>
+          <a:bodyPr wrap="square">
+            <a:spAutoFit/>
+          </a:bodyPr>
+          <a:lstStyle/>
+          <a:p>
+            <a:pPr>
+              <a:defRPr sz="1000">
+                <a:solidFill>
+                  <a:srgbClr val="323232"/>
+                </a:solidFill>
+                <a:latin typeface="Courier New"/>
+              </a:defRPr>
+            </a:pPr>
+            <a:r>
+              <a:t>┌─────────────────────────────────────────────────┐</a:t>
+            </a:r>
+            <a:br/>
+            <a:r>
+              <a:t>│            QUICK REFERENCE CARD                 │</a:t>
+            </a:r>
+            <a:br/>
+            <a:r>
+              <a:t>├─────────────────────────────────────────────────┤</a:t>
+            </a:r>
+            <a:br/>
+            <a:r>
+              <a:t>│  TARGET LINE COLORS:                            │</a:t>
+            </a:r>
+            <a:br/>
+            <a:r>
+              <a:t>│  ┄┄┄ Blue   = HMFN Target                      │</a:t>
+            </a:r>
+            <a:br/>
+            <a:r>
+              <a:t>│  ┄┄┄ Red    = SLT Target                       │</a:t>
+            </a:r>
+            <a:br/>
+            <a:r>
+              <a:t>│  ┄┄┄ Green  = ELC Target                       │</a:t>
+            </a:r>
+            <a:br/>
+            <a:r>
+              <a:t>│                                                 │</a:t>
+            </a:r>
+            <a:br/>
+            <a:r>
+              <a:t>│  YIELD CALCULATION:                             │</a:t>
+            </a:r>
+            <a:br/>
+            <a:r>
+              <a:t>│  ELC = HMFN × SLT                              │</a:t>
+            </a:r>
+            <a:br/>
+            <a:r>
+              <a:t>│  SLT = HMB1 × QMON                             │</a:t>
+            </a:r>
+            <a:br/>
+            <a:r>
+              <a:t>│                                                 │</a:t>
+            </a:r>
+            <a:br/>
+            <a:r>
+              <a:t>│  KEY TARGETS (Typical):                         │</a:t>
+            </a:r>
+            <a:br/>
+            <a:r>
+              <a:t>│  HMFN: 99% → 99.5%                             │</a:t>
+            </a:r>
+            <a:br/>
+            <a:r>
+              <a:t>│  SLT:  97% → 99%                               │</a:t>
+            </a:r>
+            <a:br/>
+            <a:r>
+              <a:t>│  ELC:  95.54% → 98.51%                         │</a:t>
+            </a:r>
+            <a:br/>
+            <a:r>
+              <a:t>│                                                 │</a:t>
+            </a:r>
+            <a:br/>
+            <a:r>
+              <a:t>│  TROUBLESHOOTING:                               │</a:t>
+            </a:r>
+            <a:br/>
+            <a:r>
+              <a:t>│  No targets? → Select single config            │</a:t>
+            </a:r>
+            <a:br/>
+            <a:r>
+              <a:t>└─────────────────────────────────────────────────┘</a:t>
             </a:r>
           </a:p>
         </p:txBody>
@@ -3980,7 +4037,7 @@
 </p:sld>
 </file>
 
-<file path=ppt/slides/slide12.xml><?xml version="1.0" encoding="utf-8"?>
+<file path=ppt/slides/slide2.xml><?xml version="1.0" encoding="utf-8"?>
 <p:sld xmlns:a="http://schemas.openxmlformats.org/drawingml/2006/main" xmlns:p="http://schemas.openxmlformats.org/presentationml/2006/main" xmlns:r="http://schemas.openxmlformats.org/officeDocument/2006/relationships">
   <p:cSld>
     <p:spTree>
@@ -3999,7 +4056,7 @@
         <p:spPr>
           <a:xfrm>
             <a:off x="0" y="0"/>
-            <a:ext cx="12191695" cy="1097280"/>
+            <a:ext cx="12191695" cy="731520"/>
           </a:xfrm>
           <a:prstGeom prst="rect">
             <a:avLst/>
@@ -4041,8 +4098,8 @@
         </p:nvSpPr>
         <p:spPr>
           <a:xfrm>
-            <a:off x="457200" y="274320"/>
-            <a:ext cx="10972800" cy="731520"/>
+            <a:off x="274320" y="137160"/>
+            <a:ext cx="10972800" cy="548640"/>
           </a:xfrm>
           <a:prstGeom prst="rect">
             <a:avLst/>
@@ -4056,28 +4113,52 @@
           <a:lstStyle/>
           <a:p>
             <a:pPr>
-              <a:defRPr sz="3200" b="1">
+              <a:defRPr sz="2800" b="1">
                 <a:solidFill>
                   <a:srgbClr val="FFFFFF"/>
                 </a:solidFill>
               </a:defRPr>
             </a:pPr>
             <a:r>
-              <a:t>Quick Reference Card</a:t>
-            </a:r>
-          </a:p>
-        </p:txBody>
-      </p:sp>
-      <p:sp>
-        <p:nvSpPr>
-          <p:cNvPr id="4" name="TextBox 3"/>
+              <a:t>Dashboard Overview</a:t>
+            </a:r>
+          </a:p>
+        </p:txBody>
+      </p:sp>
+      <p:pic>
+        <p:nvPicPr>
+          <p:cNvPr id="4" name="Picture 3" descr="dash_home.png"/>
+          <p:cNvPicPr>
+            <a:picLocks noChangeAspect="1"/>
+          </p:cNvPicPr>
+          <p:nvPr/>
+        </p:nvPicPr>
+        <p:blipFill>
+          <a:blip r:embed="rId2"/>
+          <a:stretch>
+            <a:fillRect/>
+          </a:stretch>
+        </p:blipFill>
+        <p:spPr>
+          <a:xfrm>
+            <a:off x="380847" y="914400"/>
+            <a:ext cx="11430000" cy="5303520"/>
+          </a:xfrm>
+          <a:prstGeom prst="rect">
+            <a:avLst/>
+          </a:prstGeom>
+        </p:spPr>
+      </p:pic>
+      <p:sp>
+        <p:nvSpPr>
+          <p:cNvPr id="5" name="TextBox 4"/>
           <p:cNvSpPr txBox="1"/>
           <p:nvPr/>
         </p:nvSpPr>
         <p:spPr>
           <a:xfrm>
-            <a:off x="457200" y="1371600"/>
-            <a:ext cx="5029200" cy="5029200"/>
+            <a:off x="457200" y="6400800"/>
+            <a:ext cx="11277295" cy="365760"/>
           </a:xfrm>
           <a:prstGeom prst="rect">
             <a:avLst/>
@@ -4085,341 +4166,20 @@
           <a:noFill/>
         </p:spPr>
         <p:txBody>
-          <a:bodyPr wrap="square">
+          <a:bodyPr wrap="none">
             <a:spAutoFit/>
           </a:bodyPr>
           <a:lstStyle/>
           <a:p>
-            <a:pPr>
-              <a:spcAft>
-                <a:spcPts val="1200"/>
-              </a:spcAft>
-              <a:defRPr sz="1800">
-                <a:solidFill>
-                  <a:srgbClr val="323232"/>
-                </a:solidFill>
-              </a:defRPr>
-            </a:pPr>
-            <a:r>
-              <a:t>Bookmark this slide!</a:t>
-            </a:r>
-          </a:p>
-          <a:p>
-            <a:pPr>
-              <a:spcAft>
-                <a:spcPts val="1200"/>
-              </a:spcAft>
-              <a:defRPr sz="1800">
-                <a:solidFill>
-                  <a:srgbClr val="323232"/>
-                </a:solidFill>
-              </a:defRPr>
-            </a:pPr>
-          </a:p>
-          <a:p>
-            <a:pPr>
-              <a:spcAft>
-                <a:spcPts val="1200"/>
-              </a:spcAft>
-              <a:defRPr sz="1800">
-                <a:solidFill>
-                  <a:srgbClr val="323232"/>
-                </a:solidFill>
-              </a:defRPr>
-            </a:pPr>
-            <a:r>
-              <a:t>Dashboard URL:</a:t>
-            </a:r>
-          </a:p>
-          <a:p>
-            <a:pPr>
-              <a:spcAft>
-                <a:spcPts val="1200"/>
-              </a:spcAft>
-              <a:defRPr sz="1800">
-                <a:solidFill>
-                  <a:srgbClr val="323232"/>
-                </a:solidFill>
-              </a:defRPr>
-            </a:pPr>
-            <a:r>
-              <a:t>http://bolpedh03.micron.com:8502</a:t>
-            </a:r>
-          </a:p>
-          <a:p>
-            <a:pPr>
-              <a:spcAft>
-                <a:spcPts val="1200"/>
-              </a:spcAft>
-              <a:defRPr sz="1800">
-                <a:solidFill>
-                  <a:srgbClr val="323232"/>
-                </a:solidFill>
-              </a:defRPr>
-            </a:pPr>
-          </a:p>
-          <a:p>
-            <a:pPr>
-              <a:spcAft>
-                <a:spcPts val="1200"/>
-              </a:spcAft>
-              <a:defRPr sz="1800">
-                <a:solidFill>
-                  <a:srgbClr val="323232"/>
-                </a:solidFill>
-              </a:defRPr>
-            </a:pPr>
-            <a:r>
-              <a:t>Key Contact:</a:t>
-            </a:r>
-          </a:p>
-          <a:p>
-            <a:pPr>
-              <a:spcAft>
-                <a:spcPts val="1200"/>
-              </a:spcAft>
-              <a:defRPr sz="1800">
-                <a:solidFill>
-                  <a:srgbClr val="323232"/>
-                </a:solidFill>
-              </a:defRPr>
-            </a:pPr>
-            <a:r>
-              <a:t>Asegaran (Dashboard Owner)</a:t>
-            </a:r>
-          </a:p>
-          <a:p>
-            <a:pPr>
-              <a:spcAft>
-                <a:spcPts val="1200"/>
-              </a:spcAft>
-              <a:defRPr sz="1800">
-                <a:solidFill>
-                  <a:srgbClr val="323232"/>
-                </a:solidFill>
-              </a:defRPr>
-            </a:pPr>
-          </a:p>
-          <a:p>
-            <a:pPr>
-              <a:spcAft>
-                <a:spcPts val="1200"/>
-              </a:spcAft>
-              <a:defRPr sz="1800">
-                <a:solidFill>
-                  <a:srgbClr val="323232"/>
-                </a:solidFill>
-              </a:defRPr>
-            </a:pPr>
-            <a:r>
-              <a:t>Data Source:</a:t>
-            </a:r>
-          </a:p>
-          <a:p>
-            <a:pPr>
-              <a:spcAft>
-                <a:spcPts val="1200"/>
-              </a:spcAft>
-              <a:defRPr sz="1800">
-                <a:solidFill>
-                  <a:srgbClr val="323232"/>
-                </a:solidFill>
-              </a:defRPr>
-            </a:pPr>
-            <a:r>
-              <a:t>frpt/mtsums commands</a:t>
-            </a:r>
-          </a:p>
-          <a:p>
-            <a:pPr>
-              <a:spcAft>
-                <a:spcPts val="1200"/>
-              </a:spcAft>
-              <a:defRPr sz="1800">
-                <a:solidFill>
-                  <a:srgbClr val="323232"/>
-                </a:solidFill>
-              </a:defRPr>
-            </a:pPr>
-          </a:p>
-          <a:p>
-            <a:pPr>
-              <a:spcAft>
-                <a:spcPts val="1200"/>
-              </a:spcAft>
-              <a:defRPr sz="1800">
-                <a:solidFill>
-                  <a:srgbClr val="323232"/>
-                </a:solidFill>
-              </a:defRPr>
-            </a:pPr>
-            <a:r>
-              <a:t>Last Updated: Apr 2026</a:t>
-            </a:r>
-          </a:p>
-        </p:txBody>
-      </p:sp>
-      <p:sp>
-        <p:nvSpPr>
-          <p:cNvPr id="5" name="Rounded Rectangle 4"/>
-          <p:cNvSpPr/>
-          <p:nvPr/>
-        </p:nvSpPr>
-        <p:spPr>
-          <a:xfrm>
-            <a:off x="5943600" y="1371600"/>
-            <a:ext cx="5760720" cy="5029200"/>
-          </a:xfrm>
-          <a:prstGeom prst="roundRect">
-            <a:avLst/>
-          </a:prstGeom>
-          <a:solidFill>
-            <a:srgbClr val="F0F0F0"/>
-          </a:solidFill>
-          <a:ln>
-            <a:solidFill>
-              <a:srgbClr val="969696"/>
-            </a:solidFill>
-          </a:ln>
-        </p:spPr>
-        <p:style>
-          <a:lnRef idx="1">
-            <a:schemeClr val="accent1"/>
-          </a:lnRef>
-          <a:fillRef idx="3">
-            <a:schemeClr val="accent1"/>
-          </a:fillRef>
-          <a:effectRef idx="2">
-            <a:schemeClr val="accent1"/>
-          </a:effectRef>
-          <a:fontRef idx="minor">
-            <a:schemeClr val="lt1"/>
-          </a:fontRef>
-        </p:style>
-        <p:txBody>
-          <a:bodyPr rtlCol="0" anchor="ctr"/>
-          <a:lstStyle/>
-          <a:p>
-            <a:pPr algn="ctr"/>
-          </a:p>
-        </p:txBody>
-      </p:sp>
-      <p:sp>
-        <p:nvSpPr>
-          <p:cNvPr id="6" name="TextBox 5"/>
-          <p:cNvSpPr txBox="1"/>
-          <p:nvPr/>
-        </p:nvSpPr>
-        <p:spPr>
-          <a:xfrm>
-            <a:off x="6126480" y="1554480"/>
-            <a:ext cx="5394960" cy="4663440"/>
-          </a:xfrm>
-          <a:prstGeom prst="rect">
-            <a:avLst/>
-          </a:prstGeom>
-          <a:noFill/>
-        </p:spPr>
-        <p:txBody>
-          <a:bodyPr wrap="square">
-            <a:spAutoFit/>
-          </a:bodyPr>
-          <a:lstStyle/>
-          <a:p>
-            <a:pPr>
-              <a:defRPr sz="1000">
-                <a:solidFill>
-                  <a:srgbClr val="323232"/>
-                </a:solidFill>
-                <a:latin typeface="Courier New"/>
-              </a:defRPr>
-            </a:pPr>
-            <a:r>
-              <a:t>┌─────────────────────────────────────────────────┐</a:t>
-            </a:r>
-            <a:br/>
-            <a:r>
-              <a:t>│            QUICK REFERENCE CARD                 │</a:t>
-            </a:r>
-            <a:br/>
-            <a:r>
-              <a:t>├─────────────────────────────────────────────────┤</a:t>
-            </a:r>
-            <a:br/>
-            <a:r>
-              <a:t>│                                                 │</a:t>
-            </a:r>
-            <a:br/>
-            <a:r>
-              <a:t>│  TARGET LINE COLORS:                            │</a:t>
-            </a:r>
-            <a:br/>
-            <a:r>
-              <a:t>│  ┄┄┄ Blue   = HMFN Target                      │</a:t>
-            </a:r>
-            <a:br/>
-            <a:r>
-              <a:t>│  ┄┄┄ Red    = SLT Target                       │</a:t>
-            </a:r>
-            <a:br/>
-            <a:r>
-              <a:t>│  ┄┄┄ Green  = ELC Target                       │</a:t>
-            </a:r>
-            <a:br/>
-            <a:r>
-              <a:t>│                                                 │</a:t>
-            </a:r>
-            <a:br/>
-            <a:r>
-              <a:t>│  YIELD CALCULATION:                             │</a:t>
-            </a:r>
-            <a:br/>
-            <a:r>
-              <a:t>│  ELC = HMFN × SLT                              │</a:t>
-            </a:r>
-            <a:br/>
-            <a:r>
-              <a:t>│  SLT = HMB1 × QMON                             │</a:t>
-            </a:r>
-            <a:br/>
-            <a:r>
-              <a:t>│                                                 │</a:t>
-            </a:r>
-            <a:br/>
-            <a:r>
-              <a:t>│  KEY TARGETS (Typical):                         │</a:t>
-            </a:r>
-            <a:br/>
-            <a:r>
-              <a:t>│  HMFN: 99% → 99.5%                             │</a:t>
-            </a:r>
-            <a:br/>
-            <a:r>
-              <a:t>│  SLT:  97% → 99%                               │</a:t>
-            </a:r>
-            <a:br/>
-            <a:r>
-              <a:t>│  ELC:  95.54% → 98.51%                         │</a:t>
-            </a:r>
-            <a:br/>
-            <a:r>
-              <a:t>│                                                 │</a:t>
-            </a:r>
-            <a:br/>
-            <a:r>
-              <a:t>│  TROUBLESHOOTING:                               │</a:t>
-            </a:r>
-            <a:br/>
-            <a:r>
-              <a:t>│  No targets? → Select single config            │</a:t>
-            </a:r>
-            <a:br/>
-            <a:r>
-              <a:t>│  Warning? → Configs don't match                │</a:t>
-            </a:r>
-            <a:br/>
-            <a:r>
-              <a:t>└─────────────────────────────────────────────────┘</a:t>
+            <a:pPr algn="ctr">
+              <a:defRPr sz="1400">
+                <a:solidFill>
+                  <a:srgbClr val="646464"/>
+                </a:solidFill>
+              </a:defRPr>
+            </a:pPr>
+            <a:r>
+              <a:t>Module Yield Dashboard - http://bolpedh03.micron.com:8502</a:t>
             </a:r>
           </a:p>
         </p:txBody>
@@ -4432,7 +4192,7 @@
 </p:sld>
 </file>
 
-<file path=ppt/slides/slide2.xml><?xml version="1.0" encoding="utf-8"?>
+<file path=ppt/slides/slide3.xml><?xml version="1.0" encoding="utf-8"?>
 <p:sld xmlns:a="http://schemas.openxmlformats.org/drawingml/2006/main" xmlns:p="http://schemas.openxmlformats.org/presentationml/2006/main" xmlns:r="http://schemas.openxmlformats.org/officeDocument/2006/relationships">
   <p:cSld>
     <p:spTree>
@@ -4451,7 +4211,7 @@
         <p:spPr>
           <a:xfrm>
             <a:off x="0" y="0"/>
-            <a:ext cx="12191695" cy="1097280"/>
+            <a:ext cx="12191695" cy="914400"/>
           </a:xfrm>
           <a:prstGeom prst="rect">
             <a:avLst/>
@@ -4493,8 +4253,8 @@
         </p:nvSpPr>
         <p:spPr>
           <a:xfrm>
-            <a:off x="457200" y="274320"/>
-            <a:ext cx="10972800" cy="731520"/>
+            <a:off x="457200" y="228600"/>
+            <a:ext cx="10972800" cy="548640"/>
           </a:xfrm>
           <a:prstGeom prst="rect">
             <a:avLst/>
@@ -4508,7 +4268,7 @@
           <a:lstStyle/>
           <a:p>
             <a:pPr>
-              <a:defRPr sz="3200" b="1">
+              <a:defRPr sz="2800" b="1">
                 <a:solidFill>
                   <a:srgbClr val="FFFFFF"/>
                 </a:solidFill>
@@ -4528,8 +4288,8 @@
         </p:nvSpPr>
         <p:spPr>
           <a:xfrm>
-            <a:off x="457200" y="1371600"/>
-            <a:ext cx="11277295" cy="5029200"/>
+            <a:off x="457200" y="1188720"/>
+            <a:ext cx="11277295" cy="5303520"/>
           </a:xfrm>
           <a:prstGeom prst="rect">
             <a:avLst/>
@@ -4544,7 +4304,7 @@
           <a:p>
             <a:pPr>
               <a:spcAft>
-                <a:spcPts val="1200"/>
+                <a:spcPts val="1000"/>
               </a:spcAft>
               <a:defRPr sz="1800">
                 <a:solidFill>
@@ -4559,19 +4319,19 @@
           <a:p>
             <a:pPr>
               <a:spcAft>
-                <a:spcPts val="1200"/>
-              </a:spcAft>
-              <a:defRPr sz="1800">
-                <a:solidFill>
-                  <a:srgbClr val="323232"/>
-                </a:solidFill>
-              </a:defRPr>
-            </a:pPr>
-          </a:p>
-          <a:p>
-            <a:pPr>
-              <a:spcAft>
-                <a:spcPts val="1200"/>
+                <a:spcPts val="1000"/>
+              </a:spcAft>
+              <a:defRPr sz="1800">
+                <a:solidFill>
+                  <a:srgbClr val="323232"/>
+                </a:solidFill>
+              </a:defRPr>
+            </a:pPr>
+          </a:p>
+          <a:p>
+            <a:pPr>
+              <a:spcAft>
+                <a:spcPts val="1000"/>
               </a:spcAft>
               <a:defRPr sz="1800">
                 <a:solidFill>
@@ -4586,22 +4346,22 @@
           <a:p>
             <a:pPr>
               <a:spcAft>
-                <a:spcPts val="1200"/>
-              </a:spcAft>
-              <a:defRPr sz="1800">
-                <a:solidFill>
-                  <a:srgbClr val="323232"/>
-                </a:solidFill>
-              </a:defRPr>
-            </a:pPr>
-            <a:r>
-              <a:t>   • Multi-series yield comparison across configs</a:t>
-            </a:r>
-          </a:p>
-          <a:p>
-            <a:pPr>
-              <a:spcAft>
-                <a:spcPts val="1200"/>
+                <a:spcPts val="1000"/>
+              </a:spcAft>
+              <a:defRPr sz="1800">
+                <a:solidFill>
+                  <a:srgbClr val="323232"/>
+                </a:solidFill>
+              </a:defRPr>
+            </a:pPr>
+            <a:r>
+              <a:t>   • Multi-series yield comparison across configurations</a:t>
+            </a:r>
+          </a:p>
+          <a:p>
+            <a:pPr>
+              <a:spcAft>
+                <a:spcPts val="1000"/>
               </a:spcAft>
               <a:defRPr sz="1800">
                 <a:solidFill>
@@ -4616,7 +4376,7 @@
           <a:p>
             <a:pPr>
               <a:spcAft>
-                <a:spcPts val="1200"/>
+                <a:spcPts val="1000"/>
               </a:spcAft>
               <a:defRPr sz="1800">
                 <a:solidFill>
@@ -4631,7 +4391,7 @@
           <a:p>
             <a:pPr>
               <a:spcAft>
-                <a:spcPts val="1200"/>
+                <a:spcPts val="1000"/>
               </a:spcAft>
               <a:defRPr sz="1800">
                 <a:solidFill>
@@ -4646,19 +4406,19 @@
           <a:p>
             <a:pPr>
               <a:spcAft>
-                <a:spcPts val="1200"/>
-              </a:spcAft>
-              <a:defRPr sz="1800">
-                <a:solidFill>
-                  <a:srgbClr val="323232"/>
-                </a:solidFill>
-              </a:defRPr>
-            </a:pPr>
-          </a:p>
-          <a:p>
-            <a:pPr>
-              <a:spcAft>
-                <a:spcPts val="1200"/>
+                <a:spcPts val="1000"/>
+              </a:spcAft>
+              <a:defRPr sz="1800">
+                <a:solidFill>
+                  <a:srgbClr val="323232"/>
+                </a:solidFill>
+              </a:defRPr>
+            </a:pPr>
+          </a:p>
+          <a:p>
+            <a:pPr>
+              <a:spcAft>
+                <a:spcPts val="1000"/>
               </a:spcAft>
               <a:defRPr sz="1800">
                 <a:solidFill>
@@ -4673,7 +4433,7 @@
           <a:p>
             <a:pPr>
               <a:spcAft>
-                <a:spcPts val="1200"/>
+                <a:spcPts val="1000"/>
               </a:spcAft>
               <a:defRPr sz="1800">
                 <a:solidFill>
@@ -4695,7 +4455,7 @@
 </p:sld>
 </file>
 
-<file path=ppt/slides/slide3.xml><?xml version="1.0" encoding="utf-8"?>
+<file path=ppt/slides/slide4.xml><?xml version="1.0" encoding="utf-8"?>
 <p:sld xmlns:a="http://schemas.openxmlformats.org/drawingml/2006/main" xmlns:p="http://schemas.openxmlformats.org/presentationml/2006/main" xmlns:r="http://schemas.openxmlformats.org/officeDocument/2006/relationships">
   <p:cSld>
     <p:spTree>
@@ -4714,7 +4474,7 @@
         <p:spPr>
           <a:xfrm>
             <a:off x="0" y="0"/>
-            <a:ext cx="12191695" cy="1097280"/>
+            <a:ext cx="12191695" cy="914400"/>
           </a:xfrm>
           <a:prstGeom prst="rect">
             <a:avLst/>
@@ -4756,8 +4516,8 @@
         </p:nvSpPr>
         <p:spPr>
           <a:xfrm>
-            <a:off x="457200" y="274320"/>
-            <a:ext cx="10972800" cy="731520"/>
+            <a:off x="457200" y="228600"/>
+            <a:ext cx="10972800" cy="548640"/>
           </a:xfrm>
           <a:prstGeom prst="rect">
             <a:avLst/>
@@ -4771,7 +4531,7 @@
           <a:lstStyle/>
           <a:p>
             <a:pPr>
-              <a:defRPr sz="3200" b="1">
+              <a:defRPr sz="2800" b="1">
                 <a:solidFill>
                   <a:srgbClr val="FFFFFF"/>
                 </a:solidFill>
@@ -4791,8 +4551,8 @@
         </p:nvSpPr>
         <p:spPr>
           <a:xfrm>
-            <a:off x="457200" y="1371600"/>
-            <a:ext cx="5029200" cy="5029200"/>
+            <a:off x="457200" y="1188720"/>
+            <a:ext cx="5029200" cy="5303520"/>
           </a:xfrm>
           <a:prstGeom prst="rect">
             <a:avLst/>
@@ -4807,7 +4567,7 @@
           <a:p>
             <a:pPr>
               <a:spcAft>
-                <a:spcPts val="1200"/>
+                <a:spcPts val="1000"/>
               </a:spcAft>
               <a:defRPr sz="1800">
                 <a:solidFill>
@@ -4822,7 +4582,7 @@
           <a:p>
             <a:pPr>
               <a:spcAft>
-                <a:spcPts val="1200"/>
+                <a:spcPts val="1000"/>
               </a:spcAft>
               <a:defRPr sz="1800">
                 <a:solidFill>
@@ -4837,19 +4597,19 @@
           <a:p>
             <a:pPr>
               <a:spcAft>
-                <a:spcPts val="1200"/>
-              </a:spcAft>
-              <a:defRPr sz="1800">
-                <a:solidFill>
-                  <a:srgbClr val="323232"/>
-                </a:solidFill>
-              </a:defRPr>
-            </a:pPr>
-          </a:p>
-          <a:p>
-            <a:pPr>
-              <a:spcAft>
-                <a:spcPts val="1200"/>
+                <a:spcPts val="1000"/>
+              </a:spcAft>
+              <a:defRPr sz="1800">
+                <a:solidFill>
+                  <a:srgbClr val="323232"/>
+                </a:solidFill>
+              </a:defRPr>
+            </a:pPr>
+          </a:p>
+          <a:p>
+            <a:pPr>
+              <a:spcAft>
+                <a:spcPts val="1000"/>
               </a:spcAft>
               <a:defRPr sz="1800">
                 <a:solidFill>
@@ -4864,7 +4624,7 @@
           <a:p>
             <a:pPr>
               <a:spcAft>
-                <a:spcPts val="1200"/>
+                <a:spcPts val="1000"/>
               </a:spcAft>
               <a:defRPr sz="1800">
                 <a:solidFill>
@@ -4879,19 +4639,19 @@
           <a:p>
             <a:pPr>
               <a:spcAft>
-                <a:spcPts val="1200"/>
-              </a:spcAft>
-              <a:defRPr sz="1800">
-                <a:solidFill>
-                  <a:srgbClr val="323232"/>
-                </a:solidFill>
-              </a:defRPr>
-            </a:pPr>
-          </a:p>
-          <a:p>
-            <a:pPr>
-              <a:spcAft>
-                <a:spcPts val="1200"/>
+                <a:spcPts val="1000"/>
+              </a:spcAft>
+              <a:defRPr sz="1800">
+                <a:solidFill>
+                  <a:srgbClr val="323232"/>
+                </a:solidFill>
+              </a:defRPr>
+            </a:pPr>
+          </a:p>
+          <a:p>
+            <a:pPr>
+              <a:spcAft>
+                <a:spcPts val="1000"/>
               </a:spcAft>
               <a:defRPr sz="1800">
                 <a:solidFill>
@@ -4906,7 +4666,7 @@
           <a:p>
             <a:pPr>
               <a:spcAft>
-                <a:spcPts val="1200"/>
+                <a:spcPts val="1000"/>
               </a:spcAft>
               <a:defRPr sz="1800">
                 <a:solidFill>
@@ -4921,85 +4681,28 @@
           <a:p>
             <a:pPr>
               <a:spcAft>
-                <a:spcPts val="1200"/>
-              </a:spcAft>
-              <a:defRPr sz="1800">
-                <a:solidFill>
-                  <a:srgbClr val="323232"/>
-                </a:solidFill>
-              </a:defRPr>
-            </a:pPr>
-          </a:p>
-          <a:p>
-            <a:pPr>
-              <a:spcAft>
-                <a:spcPts val="1200"/>
-              </a:spcAft>
-              <a:defRPr sz="1800">
-                <a:solidFill>
-                  <a:srgbClr val="323232"/>
-                </a:solidFill>
-              </a:defRPr>
-            </a:pPr>
-            <a:r>
-              <a:t>4. Select Facility:</a:t>
-            </a:r>
-          </a:p>
-          <a:p>
-            <a:pPr>
-              <a:spcAft>
-                <a:spcPts val="1200"/>
-              </a:spcAft>
-              <a:defRPr sz="1800">
-                <a:solidFill>
-                  <a:srgbClr val="323232"/>
-                </a:solidFill>
-              </a:defRPr>
-            </a:pPr>
-            <a:r>
-              <a:t>   PENANG, FAB10B, etc.</a:t>
-            </a:r>
-          </a:p>
-          <a:p>
-            <a:pPr>
-              <a:spcAft>
-                <a:spcPts val="1200"/>
-              </a:spcAft>
-              <a:defRPr sz="1800">
-                <a:solidFill>
-                  <a:srgbClr val="323232"/>
-                </a:solidFill>
-              </a:defRPr>
-            </a:pPr>
-          </a:p>
-          <a:p>
-            <a:pPr>
-              <a:spcAft>
-                <a:spcPts val="1200"/>
-              </a:spcAft>
-              <a:defRPr sz="1800">
-                <a:solidFill>
-                  <a:srgbClr val="323232"/>
-                </a:solidFill>
-              </a:defRPr>
-            </a:pPr>
-            <a:r>
-              <a:t>5. Set Work Week Range:</a:t>
-            </a:r>
-          </a:p>
-          <a:p>
-            <a:pPr>
-              <a:spcAft>
-                <a:spcPts val="1200"/>
-              </a:spcAft>
-              <a:defRPr sz="1800">
-                <a:solidFill>
-                  <a:srgbClr val="323232"/>
-                </a:solidFill>
-              </a:defRPr>
-            </a:pPr>
-            <a:r>
-              <a:t>   Year + Start/End weeks</a:t>
+                <a:spcPts val="1000"/>
+              </a:spcAft>
+              <a:defRPr sz="1800">
+                <a:solidFill>
+                  <a:srgbClr val="323232"/>
+                </a:solidFill>
+              </a:defRPr>
+            </a:pPr>
+          </a:p>
+          <a:p>
+            <a:pPr>
+              <a:spcAft>
+                <a:spcPts val="1000"/>
+              </a:spcAft>
+              <a:defRPr sz="1800">
+                <a:solidFill>
+                  <a:srgbClr val="323232"/>
+                </a:solidFill>
+              </a:defRPr>
+            </a:pPr>
+            <a:r>
+              <a:t>4. Select Facility and Work Weeks</a:t>
             </a:r>
           </a:p>
         </p:txBody>
@@ -5012,18 +4715,18 @@
         </p:nvSpPr>
         <p:spPr>
           <a:xfrm>
-            <a:off x="5943600" y="1371600"/>
-            <a:ext cx="5760720" cy="5029200"/>
+            <a:off x="5943600" y="1188720"/>
+            <a:ext cx="5760720" cy="5303520"/>
           </a:xfrm>
           <a:prstGeom prst="roundRect">
             <a:avLst/>
           </a:prstGeom>
           <a:solidFill>
-            <a:srgbClr val="F0F0F0"/>
+            <a:srgbClr val="F5F5F5"/>
           </a:solidFill>
           <a:ln>
             <a:solidFill>
-              <a:srgbClr val="969696"/>
+              <a:srgbClr val="B4B4B4"/>
             </a:solidFill>
           </a:ln>
         </p:spPr>
@@ -5057,8 +4760,8 @@
         </p:nvSpPr>
         <p:spPr>
           <a:xfrm>
-            <a:off x="6126480" y="1554480"/>
-            <a:ext cx="5394960" cy="4663440"/>
+            <a:off x="6126480" y="1371600"/>
+            <a:ext cx="5394960" cy="4937760"/>
           </a:xfrm>
           <a:prstGeom prst="rect">
             <a:avLst/>
@@ -5177,7 +4880,7 @@
 </p:sld>
 </file>
 
-<file path=ppt/slides/slide4.xml><?xml version="1.0" encoding="utf-8"?>
+<file path=ppt/slides/slide5.xml><?xml version="1.0" encoding="utf-8"?>
 <p:sld xmlns:a="http://schemas.openxmlformats.org/drawingml/2006/main" xmlns:p="http://schemas.openxmlformats.org/presentationml/2006/main" xmlns:r="http://schemas.openxmlformats.org/officeDocument/2006/relationships">
   <p:cSld>
     <p:spTree>
@@ -5196,7 +4899,7 @@
         <p:spPr>
           <a:xfrm>
             <a:off x="0" y="0"/>
-            <a:ext cx="12191695" cy="1097280"/>
+            <a:ext cx="12191695" cy="914400"/>
           </a:xfrm>
           <a:prstGeom prst="rect">
             <a:avLst/>
@@ -5238,8 +4941,8 @@
         </p:nvSpPr>
         <p:spPr>
           <a:xfrm>
-            <a:off x="457200" y="274320"/>
-            <a:ext cx="10972800" cy="731520"/>
+            <a:off x="457200" y="228600"/>
+            <a:ext cx="10972800" cy="548640"/>
           </a:xfrm>
           <a:prstGeom prst="rect">
             <a:avLst/>
@@ -5253,7 +4956,7 @@
           <a:lstStyle/>
           <a:p>
             <a:pPr>
-              <a:defRPr sz="3200" b="1">
+              <a:defRPr sz="2800" b="1">
                 <a:solidFill>
                   <a:srgbClr val="FFFFFF"/>
                 </a:solidFill>
@@ -5273,8 +4976,8 @@
         </p:nvSpPr>
         <p:spPr>
           <a:xfrm>
-            <a:off x="457200" y="1371600"/>
-            <a:ext cx="5029200" cy="5029200"/>
+            <a:off x="457200" y="1188720"/>
+            <a:ext cx="5029200" cy="5303520"/>
           </a:xfrm>
           <a:prstGeom prst="rect">
             <a:avLst/>
@@ -5289,7 +4992,7 @@
           <a:p>
             <a:pPr>
               <a:spcAft>
-                <a:spcPts val="1200"/>
+                <a:spcPts val="1000"/>
               </a:spcAft>
               <a:defRPr sz="1800">
                 <a:solidFill>
@@ -5304,19 +5007,19 @@
           <a:p>
             <a:pPr>
               <a:spcAft>
-                <a:spcPts val="1200"/>
-              </a:spcAft>
-              <a:defRPr sz="1800">
-                <a:solidFill>
-                  <a:srgbClr val="323232"/>
-                </a:solidFill>
-              </a:defRPr>
-            </a:pPr>
-          </a:p>
-          <a:p>
-            <a:pPr>
-              <a:spcAft>
-                <a:spcPts val="1200"/>
+                <a:spcPts val="1000"/>
+              </a:spcAft>
+              <a:defRPr sz="1800">
+                <a:solidFill>
+                  <a:srgbClr val="323232"/>
+                </a:solidFill>
+              </a:defRPr>
+            </a:pPr>
+          </a:p>
+          <a:p>
+            <a:pPr>
+              <a:spcAft>
+                <a:spcPts val="1000"/>
               </a:spcAft>
               <a:defRPr sz="1800">
                 <a:solidFill>
@@ -5331,19 +5034,19 @@
           <a:p>
             <a:pPr>
               <a:spcAft>
-                <a:spcPts val="1200"/>
-              </a:spcAft>
-              <a:defRPr sz="1800">
-                <a:solidFill>
-                  <a:srgbClr val="323232"/>
-                </a:solidFill>
-              </a:defRPr>
-            </a:pPr>
-          </a:p>
-          <a:p>
-            <a:pPr>
-              <a:spcAft>
-                <a:spcPts val="1200"/>
+                <a:spcPts val="1000"/>
+              </a:spcAft>
+              <a:defRPr sz="1800">
+                <a:solidFill>
+                  <a:srgbClr val="323232"/>
+                </a:solidFill>
+              </a:defRPr>
+            </a:pPr>
+          </a:p>
+          <a:p>
+            <a:pPr>
+              <a:spcAft>
+                <a:spcPts val="1000"/>
               </a:spcAft>
               <a:defRPr sz="1800">
                 <a:solidFill>
@@ -5358,19 +5061,19 @@
           <a:p>
             <a:pPr>
               <a:spcAft>
-                <a:spcPts val="1200"/>
-              </a:spcAft>
-              <a:defRPr sz="1800">
-                <a:solidFill>
-                  <a:srgbClr val="323232"/>
-                </a:solidFill>
-              </a:defRPr>
-            </a:pPr>
-          </a:p>
-          <a:p>
-            <a:pPr>
-              <a:spcAft>
-                <a:spcPts val="1200"/>
+                <a:spcPts val="1000"/>
+              </a:spcAft>
+              <a:defRPr sz="1800">
+                <a:solidFill>
+                  <a:srgbClr val="323232"/>
+                </a:solidFill>
+              </a:defRPr>
+            </a:pPr>
+          </a:p>
+          <a:p>
+            <a:pPr>
+              <a:spcAft>
+                <a:spcPts val="1000"/>
               </a:spcAft>
               <a:defRPr sz="1800">
                 <a:solidFill>
@@ -5385,19 +5088,19 @@
           <a:p>
             <a:pPr>
               <a:spcAft>
-                <a:spcPts val="1200"/>
-              </a:spcAft>
-              <a:defRPr sz="1800">
-                <a:solidFill>
-                  <a:srgbClr val="323232"/>
-                </a:solidFill>
-              </a:defRPr>
-            </a:pPr>
-          </a:p>
-          <a:p>
-            <a:pPr>
-              <a:spcAft>
-                <a:spcPts val="1200"/>
+                <a:spcPts val="1000"/>
+              </a:spcAft>
+              <a:defRPr sz="1800">
+                <a:solidFill>
+                  <a:srgbClr val="323232"/>
+                </a:solidFill>
+              </a:defRPr>
+            </a:pPr>
+          </a:p>
+          <a:p>
+            <a:pPr>
+              <a:spcAft>
+                <a:spcPts val="1000"/>
               </a:spcAft>
               <a:defRPr sz="1800">
                 <a:solidFill>
@@ -5412,7 +5115,7 @@
           <a:p>
             <a:pPr>
               <a:spcAft>
-                <a:spcPts val="1200"/>
+                <a:spcPts val="1000"/>
               </a:spcAft>
               <a:defRPr sz="1800">
                 <a:solidFill>
@@ -5434,18 +5137,18 @@
         </p:nvSpPr>
         <p:spPr>
           <a:xfrm>
-            <a:off x="5943600" y="1371600"/>
-            <a:ext cx="5760720" cy="5029200"/>
+            <a:off x="5943600" y="1188720"/>
+            <a:ext cx="5760720" cy="5303520"/>
           </a:xfrm>
           <a:prstGeom prst="roundRect">
             <a:avLst/>
           </a:prstGeom>
           <a:solidFill>
-            <a:srgbClr val="F0F0F0"/>
+            <a:srgbClr val="F5F5F5"/>
           </a:solidFill>
           <a:ln>
             <a:solidFill>
-              <a:srgbClr val="969696"/>
+              <a:srgbClr val="B4B4B4"/>
             </a:solidFill>
           </a:ln>
         </p:spPr>
@@ -5479,8 +5182,8 @@
         </p:nvSpPr>
         <p:spPr>
           <a:xfrm>
-            <a:off x="6126480" y="1554480"/>
-            <a:ext cx="5394960" cy="4663440"/>
+            <a:off x="6126480" y="1371600"/>
+            <a:ext cx="5394960" cy="4937760"/>
           </a:xfrm>
           <a:prstGeom prst="rect">
             <a:avLst/>
@@ -5571,7 +5274,7 @@
 </p:sld>
 </file>
 
-<file path=ppt/slides/slide5.xml><?xml version="1.0" encoding="utf-8"?>
+<file path=ppt/slides/slide6.xml><?xml version="1.0" encoding="utf-8"?>
 <p:sld xmlns:a="http://schemas.openxmlformats.org/drawingml/2006/main" xmlns:p="http://schemas.openxmlformats.org/presentationml/2006/main" xmlns:r="http://schemas.openxmlformats.org/officeDocument/2006/relationships">
   <p:cSld>
     <p:spTree>
@@ -5590,7 +5293,7 @@
         <p:spPr>
           <a:xfrm>
             <a:off x="0" y="0"/>
-            <a:ext cx="12191695" cy="1097280"/>
+            <a:ext cx="12191695" cy="914400"/>
           </a:xfrm>
           <a:prstGeom prst="rect">
             <a:avLst/>
@@ -5632,8 +5335,8 @@
         </p:nvSpPr>
         <p:spPr>
           <a:xfrm>
-            <a:off x="457200" y="274320"/>
-            <a:ext cx="10972800" cy="731520"/>
+            <a:off x="457200" y="228600"/>
+            <a:ext cx="10972800" cy="548640"/>
           </a:xfrm>
           <a:prstGeom prst="rect">
             <a:avLst/>
@@ -5647,7 +5350,7 @@
           <a:lstStyle/>
           <a:p>
             <a:pPr>
-              <a:defRPr sz="3200" b="1">
+              <a:defRPr sz="2800" b="1">
                 <a:solidFill>
                   <a:srgbClr val="FFFFFF"/>
                 </a:solidFill>
@@ -5667,8 +5370,8 @@
         </p:nvSpPr>
         <p:spPr>
           <a:xfrm>
-            <a:off x="457200" y="1371600"/>
-            <a:ext cx="5029200" cy="5029200"/>
+            <a:off x="457200" y="1188720"/>
+            <a:ext cx="5029200" cy="5303520"/>
           </a:xfrm>
           <a:prstGeom prst="rect">
             <a:avLst/>
@@ -5683,7 +5386,7 @@
           <a:p>
             <a:pPr>
               <a:spcAft>
-                <a:spcPts val="1200"/>
+                <a:spcPts val="1000"/>
               </a:spcAft>
               <a:defRPr sz="1800">
                 <a:solidFill>
@@ -5698,7 +5401,7 @@
           <a:p>
             <a:pPr>
               <a:spcAft>
-                <a:spcPts val="1200"/>
+                <a:spcPts val="1000"/>
               </a:spcAft>
               <a:defRPr sz="1800">
                 <a:solidFill>
@@ -5713,19 +5416,19 @@
           <a:p>
             <a:pPr>
               <a:spcAft>
-                <a:spcPts val="1200"/>
-              </a:spcAft>
-              <a:defRPr sz="1800">
-                <a:solidFill>
-                  <a:srgbClr val="323232"/>
-                </a:solidFill>
-              </a:defRPr>
-            </a:pPr>
-          </a:p>
-          <a:p>
-            <a:pPr>
-              <a:spcAft>
-                <a:spcPts val="1200"/>
+                <a:spcPts val="1000"/>
+              </a:spcAft>
+              <a:defRPr sz="1800">
+                <a:solidFill>
+                  <a:srgbClr val="323232"/>
+                </a:solidFill>
+              </a:defRPr>
+            </a:pPr>
+          </a:p>
+          <a:p>
+            <a:pPr>
+              <a:spcAft>
+                <a:spcPts val="1000"/>
               </a:spcAft>
               <a:defRPr sz="1800">
                 <a:solidFill>
@@ -5740,49 +5443,49 @@
           <a:p>
             <a:pPr>
               <a:spcAft>
-                <a:spcPts val="1200"/>
-              </a:spcAft>
-              <a:defRPr sz="1800">
-                <a:solidFill>
-                  <a:srgbClr val="323232"/>
-                </a:solidFill>
-              </a:defRPr>
-            </a:pPr>
-          </a:p>
-          <a:p>
-            <a:pPr>
-              <a:spcAft>
-                <a:spcPts val="1200"/>
-              </a:spcAft>
-              <a:defRPr sz="1800">
-                <a:solidFill>
-                  <a:srgbClr val="323232"/>
-                </a:solidFill>
-              </a:defRPr>
-            </a:pPr>
-            <a:r>
-              <a:t>💡 TIP: For target lines, select</a:t>
-            </a:r>
-          </a:p>
-          <a:p>
-            <a:pPr>
-              <a:spcAft>
-                <a:spcPts val="1200"/>
-              </a:spcAft>
-              <a:defRPr sz="1800">
-                <a:solidFill>
-                  <a:srgbClr val="323232"/>
-                </a:solidFill>
-              </a:defRPr>
-            </a:pPr>
-            <a:r>
-              <a:t>   series with SAME:</a:t>
-            </a:r>
-          </a:p>
-          <a:p>
-            <a:pPr>
-              <a:spcAft>
-                <a:spcPts val="1200"/>
+                <a:spcPts val="1000"/>
+              </a:spcAft>
+              <a:defRPr sz="1800">
+                <a:solidFill>
+                  <a:srgbClr val="323232"/>
+                </a:solidFill>
+              </a:defRPr>
+            </a:pPr>
+          </a:p>
+          <a:p>
+            <a:pPr>
+              <a:spcAft>
+                <a:spcPts val="1000"/>
+              </a:spcAft>
+              <a:defRPr sz="1800">
+                <a:solidFill>
+                  <a:srgbClr val="323232"/>
+                </a:solidFill>
+              </a:defRPr>
+            </a:pPr>
+            <a:r>
+              <a:t>💡 IMPORTANT for Target Lines:</a:t>
+            </a:r>
+          </a:p>
+          <a:p>
+            <a:pPr>
+              <a:spcAft>
+                <a:spcPts val="1000"/>
+              </a:spcAft>
+              <a:defRPr sz="1800">
+                <a:solidFill>
+                  <a:srgbClr val="323232"/>
+                </a:solidFill>
+              </a:defRPr>
+            </a:pPr>
+            <a:r>
+              <a:t>   Select series with SAME:</a:t>
+            </a:r>
+          </a:p>
+          <a:p>
+            <a:pPr>
+              <a:spcAft>
+                <a:spcPts val="1000"/>
               </a:spcAft>
               <a:defRPr sz="1800">
                 <a:solidFill>
@@ -5797,7 +5500,7 @@
           <a:p>
             <a:pPr>
               <a:spcAft>
-                <a:spcPts val="1200"/>
+                <a:spcPts val="1000"/>
               </a:spcAft>
               <a:defRPr sz="1800">
                 <a:solidFill>
@@ -5812,7 +5515,7 @@
           <a:p>
             <a:pPr>
               <a:spcAft>
-                <a:spcPts val="1200"/>
+                <a:spcPts val="1000"/>
               </a:spcAft>
               <a:defRPr sz="1800">
                 <a:solidFill>
@@ -5834,18 +5537,18 @@
         </p:nvSpPr>
         <p:spPr>
           <a:xfrm>
-            <a:off x="5943600" y="1371600"/>
-            <a:ext cx="5760720" cy="5029200"/>
+            <a:off x="5943600" y="1188720"/>
+            <a:ext cx="5760720" cy="5303520"/>
           </a:xfrm>
           <a:prstGeom prst="roundRect">
             <a:avLst/>
           </a:prstGeom>
           <a:solidFill>
-            <a:srgbClr val="F0F0F0"/>
+            <a:srgbClr val="F5F5F5"/>
           </a:solidFill>
           <a:ln>
             <a:solidFill>
-              <a:srgbClr val="969696"/>
+              <a:srgbClr val="B4B4B4"/>
             </a:solidFill>
           </a:ln>
         </p:spPr>
@@ -5879,8 +5582,8 @@
         </p:nvSpPr>
         <p:spPr>
           <a:xfrm>
-            <a:off x="6126480" y="1554480"/>
-            <a:ext cx="5394960" cy="4663440"/>
+            <a:off x="6126480" y="1371600"/>
+            <a:ext cx="5394960" cy="4937760"/>
           </a:xfrm>
           <a:prstGeom prst="rect">
             <a:avLst/>
@@ -5950,15 +5653,11 @@
             </a:r>
             <a:br/>
             <a:r>
-              <a:t>│  ☐ Y62P_SOCAMM2_64GB_8533MTPS_HMFN             │</a:t>
-            </a:r>
-            <a:br/>
-            <a:r>
-              <a:t>│  ☐ Y62P_SOCAMM2_64GB_8533MTPS_SLT              │</a:t>
-            </a:r>
-            <a:br/>
-            <a:r>
-              <a:t>│  ☐ Y62P_SOCAMM2_64GB_8533MTPS_ELC              │</a:t>
+              <a:t>│  💡 TIP: For targets, select series            │</a:t>
+            </a:r>
+            <a:br/>
+            <a:r>
+              <a:t>│     with SAME DID + Density + Speed            │</a:t>
             </a:r>
             <a:br/>
             <a:r>
@@ -5983,7 +5682,7 @@
 </p:sld>
 </file>
 
-<file path=ppt/slides/slide6.xml><?xml version="1.0" encoding="utf-8"?>
+<file path=ppt/slides/slide7.xml><?xml version="1.0" encoding="utf-8"?>
 <p:sld xmlns:a="http://schemas.openxmlformats.org/drawingml/2006/main" xmlns:p="http://schemas.openxmlformats.org/presentationml/2006/main" xmlns:r="http://schemas.openxmlformats.org/officeDocument/2006/relationships">
   <p:cSld>
     <p:spTree>
@@ -6002,7 +5701,7 @@
         <p:spPr>
           <a:xfrm>
             <a:off x="0" y="0"/>
-            <a:ext cx="12191695" cy="1097280"/>
+            <a:ext cx="12191695" cy="914400"/>
           </a:xfrm>
           <a:prstGeom prst="rect">
             <a:avLst/>
@@ -6044,8 +5743,8 @@
         </p:nvSpPr>
         <p:spPr>
           <a:xfrm>
-            <a:off x="457200" y="274320"/>
-            <a:ext cx="10972800" cy="731520"/>
+            <a:off x="457200" y="228600"/>
+            <a:ext cx="10972800" cy="548640"/>
           </a:xfrm>
           <a:prstGeom prst="rect">
             <a:avLst/>
@@ -6059,7 +5758,7 @@
           <a:lstStyle/>
           <a:p>
             <a:pPr>
-              <a:defRPr sz="3200" b="1">
+              <a:defRPr sz="2800" b="1">
                 <a:solidFill>
                   <a:srgbClr val="FFFFFF"/>
                 </a:solidFill>
@@ -6079,8 +5778,8 @@
         </p:nvSpPr>
         <p:spPr>
           <a:xfrm>
-            <a:off x="457200" y="1371600"/>
-            <a:ext cx="5029200" cy="5029200"/>
+            <a:off x="457200" y="1188720"/>
+            <a:ext cx="5029200" cy="5303520"/>
           </a:xfrm>
           <a:prstGeom prst="rect">
             <a:avLst/>
@@ -6095,7 +5794,7 @@
           <a:p>
             <a:pPr>
               <a:spcAft>
-                <a:spcPts val="1200"/>
+                <a:spcPts val="1000"/>
               </a:spcAft>
               <a:defRPr sz="1800">
                 <a:solidFill>
@@ -6110,19 +5809,19 @@
           <a:p>
             <a:pPr>
               <a:spcAft>
-                <a:spcPts val="1200"/>
-              </a:spcAft>
-              <a:defRPr sz="1800">
-                <a:solidFill>
-                  <a:srgbClr val="323232"/>
-                </a:solidFill>
-              </a:defRPr>
-            </a:pPr>
-          </a:p>
-          <a:p>
-            <a:pPr>
-              <a:spcAft>
-                <a:spcPts val="1200"/>
+                <a:spcPts val="1000"/>
+              </a:spcAft>
+              <a:defRPr sz="1800">
+                <a:solidFill>
+                  <a:srgbClr val="323232"/>
+                </a:solidFill>
+              </a:defRPr>
+            </a:pPr>
+          </a:p>
+          <a:p>
+            <a:pPr>
+              <a:spcAft>
+                <a:spcPts val="1000"/>
               </a:spcAft>
               <a:defRPr sz="1800">
                 <a:solidFill>
@@ -6137,7 +5836,7 @@
           <a:p>
             <a:pPr>
               <a:spcAft>
-                <a:spcPts val="1200"/>
+                <a:spcPts val="1000"/>
               </a:spcAft>
               <a:defRPr sz="1800">
                 <a:solidFill>
@@ -6152,19 +5851,19 @@
           <a:p>
             <a:pPr>
               <a:spcAft>
-                <a:spcPts val="1200"/>
-              </a:spcAft>
-              <a:defRPr sz="1800">
-                <a:solidFill>
-                  <a:srgbClr val="323232"/>
-                </a:solidFill>
-              </a:defRPr>
-            </a:pPr>
-          </a:p>
-          <a:p>
-            <a:pPr>
-              <a:spcAft>
-                <a:spcPts val="1200"/>
+                <a:spcPts val="1000"/>
+              </a:spcAft>
+              <a:defRPr sz="1800">
+                <a:solidFill>
+                  <a:srgbClr val="323232"/>
+                </a:solidFill>
+              </a:defRPr>
+            </a:pPr>
+          </a:p>
+          <a:p>
+            <a:pPr>
+              <a:spcAft>
+                <a:spcPts val="1000"/>
               </a:spcAft>
               <a:defRPr sz="1800">
                 <a:solidFill>
@@ -6179,19 +5878,19 @@
           <a:p>
             <a:pPr>
               <a:spcAft>
-                <a:spcPts val="1200"/>
-              </a:spcAft>
-              <a:defRPr sz="1800">
-                <a:solidFill>
-                  <a:srgbClr val="323232"/>
-                </a:solidFill>
-              </a:defRPr>
-            </a:pPr>
-          </a:p>
-          <a:p>
-            <a:pPr>
-              <a:spcAft>
-                <a:spcPts val="1200"/>
+                <a:spcPts val="1000"/>
+              </a:spcAft>
+              <a:defRPr sz="1800">
+                <a:solidFill>
+                  <a:srgbClr val="323232"/>
+                </a:solidFill>
+              </a:defRPr>
+            </a:pPr>
+          </a:p>
+          <a:p>
+            <a:pPr>
+              <a:spcAft>
+                <a:spcPts val="1000"/>
               </a:spcAft>
               <a:defRPr sz="1800">
                 <a:solidFill>
@@ -6206,7 +5905,7 @@
           <a:p>
             <a:pPr>
               <a:spcAft>
-                <a:spcPts val="1200"/>
+                <a:spcPts val="1000"/>
               </a:spcAft>
               <a:defRPr sz="1800">
                 <a:solidFill>
@@ -6221,7 +5920,7 @@
           <a:p>
             <a:pPr>
               <a:spcAft>
-                <a:spcPts val="1200"/>
+                <a:spcPts val="1000"/>
               </a:spcAft>
               <a:defRPr sz="1800">
                 <a:solidFill>
@@ -6236,7 +5935,7 @@
           <a:p>
             <a:pPr>
               <a:spcAft>
-                <a:spcPts val="1200"/>
+                <a:spcPts val="1000"/>
               </a:spcAft>
               <a:defRPr sz="1800">
                 <a:solidFill>
@@ -6246,48 +5945,6 @@
             </a:pPr>
             <a:r>
               <a:t>   • Green dotted = ELC target</a:t>
-            </a:r>
-          </a:p>
-          <a:p>
-            <a:pPr>
-              <a:spcAft>
-                <a:spcPts val="1200"/>
-              </a:spcAft>
-              <a:defRPr sz="1800">
-                <a:solidFill>
-                  <a:srgbClr val="323232"/>
-                </a:solidFill>
-              </a:defRPr>
-            </a:pPr>
-          </a:p>
-          <a:p>
-            <a:pPr>
-              <a:spcAft>
-                <a:spcPts val="1200"/>
-              </a:spcAft>
-              <a:defRPr sz="1800">
-                <a:solidFill>
-                  <a:srgbClr val="323232"/>
-                </a:solidFill>
-              </a:defRPr>
-            </a:pPr>
-            <a:r>
-              <a:t>⚠️ If checkbox doesn't work:</a:t>
-            </a:r>
-          </a:p>
-          <a:p>
-            <a:pPr>
-              <a:spcAft>
-                <a:spcPts val="1200"/>
-              </a:spcAft>
-              <a:defRPr sz="1800">
-                <a:solidFill>
-                  <a:srgbClr val="323232"/>
-                </a:solidFill>
-              </a:defRPr>
-            </a:pPr>
-            <a:r>
-              <a:t>   Select single config (same DID+Density+Speed)</a:t>
             </a:r>
           </a:p>
         </p:txBody>
@@ -6300,18 +5957,18 @@
         </p:nvSpPr>
         <p:spPr>
           <a:xfrm>
-            <a:off x="5943600" y="1371600"/>
-            <a:ext cx="5760720" cy="5029200"/>
+            <a:off x="5943600" y="1188720"/>
+            <a:ext cx="5760720" cy="5303520"/>
           </a:xfrm>
           <a:prstGeom prst="roundRect">
             <a:avLst/>
           </a:prstGeom>
           <a:solidFill>
-            <a:srgbClr val="F0F0F0"/>
+            <a:srgbClr val="F5F5F5"/>
           </a:solidFill>
           <a:ln>
             <a:solidFill>
-              <a:srgbClr val="969696"/>
+              <a:srgbClr val="B4B4B4"/>
             </a:solidFill>
           </a:ln>
         </p:spPr>
@@ -6345,8 +6002,8 @@
         </p:nvSpPr>
         <p:spPr>
           <a:xfrm>
-            <a:off x="6126480" y="1554480"/>
-            <a:ext cx="5394960" cy="4663440"/>
+            <a:off x="6126480" y="1371600"/>
+            <a:ext cx="5394960" cy="4937760"/>
           </a:xfrm>
           <a:prstGeom prst="rect">
             <a:avLst/>
@@ -6428,19 +6085,7 @@
             </a:r>
             <a:br/>
             <a:r>
-              <a:t>│  series share the SAME:                         │</a:t>
-            </a:r>
-            <a:br/>
-            <a:r>
-              <a:t>│  • Design ID                                    │</a:t>
-            </a:r>
-            <a:br/>
-            <a:r>
-              <a:t>│  • Density                                      │</a:t>
-            </a:r>
-            <a:br/>
-            <a:r>
-              <a:t>│  • Speed                                        │</a:t>
+              <a:t>│  series share SAME DID + Density + Speed        │</a:t>
             </a:r>
             <a:br/>
             <a:r>
@@ -6457,7 +6102,7 @@
 </p:sld>
 </file>
 
-<file path=ppt/slides/slide7.xml><?xml version="1.0" encoding="utf-8"?>
+<file path=ppt/slides/slide8.xml><?xml version="1.0" encoding="utf-8"?>
 <p:sld xmlns:a="http://schemas.openxmlformats.org/drawingml/2006/main" xmlns:p="http://schemas.openxmlformats.org/presentationml/2006/main" xmlns:r="http://schemas.openxmlformats.org/officeDocument/2006/relationships">
   <p:cSld>
     <p:spTree>
@@ -6476,7 +6121,7 @@
         <p:spPr>
           <a:xfrm>
             <a:off x="0" y="0"/>
-            <a:ext cx="12191695" cy="1097280"/>
+            <a:ext cx="12191695" cy="914400"/>
           </a:xfrm>
           <a:prstGeom prst="rect">
             <a:avLst/>
@@ -6518,8 +6163,8 @@
         </p:nvSpPr>
         <p:spPr>
           <a:xfrm>
-            <a:off x="457200" y="274320"/>
-            <a:ext cx="10972800" cy="731520"/>
+            <a:off x="457200" y="228600"/>
+            <a:ext cx="10972800" cy="548640"/>
           </a:xfrm>
           <a:prstGeom prst="rect">
             <a:avLst/>
@@ -6533,7 +6178,7 @@
           <a:lstStyle/>
           <a:p>
             <a:pPr>
-              <a:defRPr sz="3200" b="1">
+              <a:defRPr sz="2800" b="1">
                 <a:solidFill>
                   <a:srgbClr val="FFFFFF"/>
                 </a:solidFill>
@@ -6553,8 +6198,8 @@
         </p:nvSpPr>
         <p:spPr>
           <a:xfrm>
-            <a:off x="457200" y="1371600"/>
-            <a:ext cx="5029200" cy="5029200"/>
+            <a:off x="457200" y="1188720"/>
+            <a:ext cx="5029200" cy="5303520"/>
           </a:xfrm>
           <a:prstGeom prst="rect">
             <a:avLst/>
@@ -6569,7 +6214,7 @@
           <a:p>
             <a:pPr>
               <a:spcAft>
-                <a:spcPts val="1200"/>
+                <a:spcPts val="1000"/>
               </a:spcAft>
               <a:defRPr sz="1800">
                 <a:solidFill>
@@ -6584,19 +6229,19 @@
           <a:p>
             <a:pPr>
               <a:spcAft>
-                <a:spcPts val="1200"/>
-              </a:spcAft>
-              <a:defRPr sz="1800">
-                <a:solidFill>
-                  <a:srgbClr val="323232"/>
-                </a:solidFill>
-              </a:defRPr>
-            </a:pPr>
-          </a:p>
-          <a:p>
-            <a:pPr>
-              <a:spcAft>
-                <a:spcPts val="1200"/>
+                <a:spcPts val="1000"/>
+              </a:spcAft>
+              <a:defRPr sz="1800">
+                <a:solidFill>
+                  <a:srgbClr val="323232"/>
+                </a:solidFill>
+              </a:defRPr>
+            </a:pPr>
+          </a:p>
+          <a:p>
+            <a:pPr>
+              <a:spcAft>
+                <a:spcPts val="1000"/>
               </a:spcAft>
               <a:defRPr sz="1800">
                 <a:solidFill>
@@ -6611,7 +6256,7 @@
           <a:p>
             <a:pPr>
               <a:spcAft>
-                <a:spcPts val="1200"/>
+                <a:spcPts val="1000"/>
               </a:spcAft>
               <a:defRPr sz="1800">
                 <a:solidFill>
@@ -6626,19 +6271,19 @@
           <a:p>
             <a:pPr>
               <a:spcAft>
-                <a:spcPts val="1200"/>
-              </a:spcAft>
-              <a:defRPr sz="1800">
-                <a:solidFill>
-                  <a:srgbClr val="323232"/>
-                </a:solidFill>
-              </a:defRPr>
-            </a:pPr>
-          </a:p>
-          <a:p>
-            <a:pPr>
-              <a:spcAft>
-                <a:spcPts val="1200"/>
+                <a:spcPts val="1000"/>
+              </a:spcAft>
+              <a:defRPr sz="1800">
+                <a:solidFill>
+                  <a:srgbClr val="323232"/>
+                </a:solidFill>
+              </a:defRPr>
+            </a:pPr>
+          </a:p>
+          <a:p>
+            <a:pPr>
+              <a:spcAft>
+                <a:spcPts val="1000"/>
               </a:spcAft>
               <a:defRPr sz="1800">
                 <a:solidFill>
@@ -6653,7 +6298,7 @@
           <a:p>
             <a:pPr>
               <a:spcAft>
-                <a:spcPts val="1200"/>
+                <a:spcPts val="1000"/>
               </a:spcAft>
               <a:defRPr sz="1800">
                 <a:solidFill>
@@ -6668,7 +6313,7 @@
           <a:p>
             <a:pPr>
               <a:spcAft>
-                <a:spcPts val="1200"/>
+                <a:spcPts val="1000"/>
               </a:spcAft>
               <a:defRPr sz="1800">
                 <a:solidFill>
@@ -6683,7 +6328,7 @@
           <a:p>
             <a:pPr>
               <a:spcAft>
-                <a:spcPts val="1200"/>
+                <a:spcPts val="1000"/>
               </a:spcAft>
               <a:defRPr sz="1800">
                 <a:solidFill>
@@ -6698,58 +6343,28 @@
           <a:p>
             <a:pPr>
               <a:spcAft>
-                <a:spcPts val="1200"/>
-              </a:spcAft>
-              <a:defRPr sz="1800">
-                <a:solidFill>
-                  <a:srgbClr val="323232"/>
-                </a:solidFill>
-              </a:defRPr>
-            </a:pPr>
-          </a:p>
-          <a:p>
-            <a:pPr>
-              <a:spcAft>
-                <a:spcPts val="1200"/>
-              </a:spcAft>
-              <a:defRPr sz="1800">
-                <a:solidFill>
-                  <a:srgbClr val="323232"/>
-                </a:solidFill>
-              </a:defRPr>
-            </a:pPr>
-            <a:r>
-              <a:t>Compare actual vs target:</a:t>
-            </a:r>
-          </a:p>
-          <a:p>
-            <a:pPr>
-              <a:spcAft>
-                <a:spcPts val="1200"/>
-              </a:spcAft>
-              <a:defRPr sz="1800">
-                <a:solidFill>
-                  <a:srgbClr val="323232"/>
-                </a:solidFill>
-              </a:defRPr>
-            </a:pPr>
-            <a:r>
-              <a:t>• Above target = Good ✓</a:t>
-            </a:r>
-          </a:p>
-          <a:p>
-            <a:pPr>
-              <a:spcAft>
-                <a:spcPts val="1200"/>
-              </a:spcAft>
-              <a:defRPr sz="1800">
-                <a:solidFill>
-                  <a:srgbClr val="323232"/>
-                </a:solidFill>
-              </a:defRPr>
-            </a:pPr>
-            <a:r>
-              <a:t>• Below target = Action needed</a:t>
+                <a:spcPts val="1000"/>
+              </a:spcAft>
+              <a:defRPr sz="1800">
+                <a:solidFill>
+                  <a:srgbClr val="323232"/>
+                </a:solidFill>
+              </a:defRPr>
+            </a:pPr>
+          </a:p>
+          <a:p>
+            <a:pPr>
+              <a:spcAft>
+                <a:spcPts val="1000"/>
+              </a:spcAft>
+              <a:defRPr sz="1800">
+                <a:solidFill>
+                  <a:srgbClr val="323232"/>
+                </a:solidFill>
+              </a:defRPr>
+            </a:pPr>
+            <a:r>
+              <a:t>Compare actual vs target to identify gaps</a:t>
             </a:r>
           </a:p>
         </p:txBody>
@@ -6762,18 +6377,18 @@
         </p:nvSpPr>
         <p:spPr>
           <a:xfrm>
-            <a:off x="5943600" y="1371600"/>
-            <a:ext cx="5760720" cy="5029200"/>
+            <a:off x="5943600" y="1188720"/>
+            <a:ext cx="5760720" cy="5303520"/>
           </a:xfrm>
           <a:prstGeom prst="roundRect">
             <a:avLst/>
           </a:prstGeom>
           <a:solidFill>
-            <a:srgbClr val="F0F0F0"/>
+            <a:srgbClr val="F5F5F5"/>
           </a:solidFill>
           <a:ln>
             <a:solidFill>
-              <a:srgbClr val="969696"/>
+              <a:srgbClr val="B4B4B4"/>
             </a:solidFill>
           </a:ln>
         </p:spPr>
@@ -6807,8 +6422,8 @@
         </p:nvSpPr>
         <p:spPr>
           <a:xfrm>
-            <a:off x="6126480" y="1554480"/>
-            <a:ext cx="5394960" cy="4663440"/>
+            <a:off x="6126480" y="1371600"/>
+            <a:ext cx="5394960" cy="4937760"/>
           </a:xfrm>
           <a:prstGeom prst="rect">
             <a:avLst/>
@@ -6899,7 +6514,7 @@
 </p:sld>
 </file>
 
-<file path=ppt/slides/slide8.xml><?xml version="1.0" encoding="utf-8"?>
+<file path=ppt/slides/slide9.xml><?xml version="1.0" encoding="utf-8"?>
 <p:sld xmlns:a="http://schemas.openxmlformats.org/drawingml/2006/main" xmlns:p="http://schemas.openxmlformats.org/presentationml/2006/main" xmlns:r="http://schemas.openxmlformats.org/officeDocument/2006/relationships">
   <p:cSld>
     <p:spTree>
@@ -6918,7 +6533,7 @@
         <p:spPr>
           <a:xfrm>
             <a:off x="0" y="0"/>
-            <a:ext cx="12191695" cy="1097280"/>
+            <a:ext cx="12191695" cy="914400"/>
           </a:xfrm>
           <a:prstGeom prst="rect">
             <a:avLst/>
@@ -6960,8 +6575,8 @@
         </p:nvSpPr>
         <p:spPr>
           <a:xfrm>
-            <a:off x="457200" y="274320"/>
-            <a:ext cx="10972800" cy="731520"/>
+            <a:off x="457200" y="228600"/>
+            <a:ext cx="10972800" cy="548640"/>
           </a:xfrm>
           <a:prstGeom prst="rect">
             <a:avLst/>
@@ -6975,7 +6590,7 @@
           <a:lstStyle/>
           <a:p>
             <a:pPr>
-              <a:defRPr sz="3200" b="1">
+              <a:defRPr sz="2800" b="1">
                 <a:solidFill>
                   <a:srgbClr val="FFFFFF"/>
                 </a:solidFill>
@@ -6995,8 +6610,8 @@
         </p:nvSpPr>
         <p:spPr>
           <a:xfrm>
-            <a:off x="457200" y="1371600"/>
-            <a:ext cx="5029200" cy="5029200"/>
+            <a:off x="457200" y="1188720"/>
+            <a:ext cx="5029200" cy="5303520"/>
           </a:xfrm>
           <a:prstGeom prst="rect">
             <a:avLst/>
@@ -7011,7 +6626,7 @@
           <a:p>
             <a:pPr>
               <a:spcAft>
-                <a:spcPts val="1200"/>
+                <a:spcPts val="1000"/>
               </a:spcAft>
               <a:defRPr sz="1800">
                 <a:solidFill>
@@ -7026,19 +6641,19 @@
           <a:p>
             <a:pPr>
               <a:spcAft>
-                <a:spcPts val="1200"/>
-              </a:spcAft>
-              <a:defRPr sz="1800">
-                <a:solidFill>
-                  <a:srgbClr val="323232"/>
-                </a:solidFill>
-              </a:defRPr>
-            </a:pPr>
-          </a:p>
-          <a:p>
-            <a:pPr>
-              <a:spcAft>
-                <a:spcPts val="1200"/>
+                <a:spcPts val="1000"/>
+              </a:spcAft>
+              <a:defRPr sz="1800">
+                <a:solidFill>
+                  <a:srgbClr val="323232"/>
+                </a:solidFill>
+              </a:defRPr>
+            </a:pPr>
+          </a:p>
+          <a:p>
+            <a:pPr>
+              <a:spcAft>
+                <a:spcPts val="1000"/>
               </a:spcAft>
               <a:defRPr sz="1800">
                 <a:solidFill>
@@ -7053,19 +6668,19 @@
           <a:p>
             <a:pPr>
               <a:spcAft>
-                <a:spcPts val="1200"/>
-              </a:spcAft>
-              <a:defRPr sz="1800">
-                <a:solidFill>
-                  <a:srgbClr val="323232"/>
-                </a:solidFill>
-              </a:defRPr>
-            </a:pPr>
-          </a:p>
-          <a:p>
-            <a:pPr>
-              <a:spcAft>
-                <a:spcPts val="1200"/>
+                <a:spcPts val="1000"/>
+              </a:spcAft>
+              <a:defRPr sz="1800">
+                <a:solidFill>
+                  <a:srgbClr val="323232"/>
+                </a:solidFill>
+              </a:defRPr>
+            </a:pPr>
+          </a:p>
+          <a:p>
+            <a:pPr>
+              <a:spcAft>
+                <a:spcPts val="1000"/>
               </a:spcAft>
               <a:defRPr sz="1800">
                 <a:solidFill>
@@ -7080,7 +6695,7 @@
           <a:p>
             <a:pPr>
               <a:spcAft>
-                <a:spcPts val="1200"/>
+                <a:spcPts val="1000"/>
               </a:spcAft>
               <a:defRPr sz="1800">
                 <a:solidFill>
@@ -7095,19 +6710,19 @@
           <a:p>
             <a:pPr>
               <a:spcAft>
-                <a:spcPts val="1200"/>
-              </a:spcAft>
-              <a:defRPr sz="1800">
-                <a:solidFill>
-                  <a:srgbClr val="323232"/>
-                </a:solidFill>
-              </a:defRPr>
-            </a:pPr>
-          </a:p>
-          <a:p>
-            <a:pPr>
-              <a:spcAft>
-                <a:spcPts val="1200"/>
+                <a:spcPts val="1000"/>
+              </a:spcAft>
+              <a:defRPr sz="1800">
+                <a:solidFill>
+                  <a:srgbClr val="323232"/>
+                </a:solidFill>
+              </a:defRPr>
+            </a:pPr>
+          </a:p>
+          <a:p>
+            <a:pPr>
+              <a:spcAft>
+                <a:spcPts val="1000"/>
               </a:spcAft>
               <a:defRPr sz="1800">
                 <a:solidFill>
@@ -7122,7 +6737,7 @@
           <a:p>
             <a:pPr>
               <a:spcAft>
-                <a:spcPts val="1200"/>
+                <a:spcPts val="1000"/>
               </a:spcAft>
               <a:defRPr sz="1800">
                 <a:solidFill>
@@ -7137,76 +6752,31 @@
           <a:p>
             <a:pPr>
               <a:spcAft>
-                <a:spcPts val="1200"/>
-              </a:spcAft>
-              <a:defRPr sz="1800">
-                <a:solidFill>
-                  <a:srgbClr val="323232"/>
-                </a:solidFill>
-              </a:defRPr>
-            </a:pPr>
-            <a:r>
-              <a:t>2. Uncheck mismatched series</a:t>
-            </a:r>
-          </a:p>
-          <a:p>
-            <a:pPr>
-              <a:spcAft>
-                <a:spcPts val="1200"/>
-              </a:spcAft>
-              <a:defRPr sz="1800">
-                <a:solidFill>
-                  <a:srgbClr val="323232"/>
-                </a:solidFill>
-              </a:defRPr>
-            </a:pPr>
-            <a:r>
-              <a:t>3. Keep only series with same:</a:t>
-            </a:r>
-          </a:p>
-          <a:p>
-            <a:pPr>
-              <a:spcAft>
-                <a:spcPts val="1200"/>
-              </a:spcAft>
-              <a:defRPr sz="1800">
-                <a:solidFill>
-                  <a:srgbClr val="323232"/>
-                </a:solidFill>
-              </a:defRPr>
-            </a:pPr>
-            <a:r>
-              <a:t>   • Design ID</a:t>
-            </a:r>
-          </a:p>
-          <a:p>
-            <a:pPr>
-              <a:spcAft>
-                <a:spcPts val="1200"/>
-              </a:spcAft>
-              <a:defRPr sz="1800">
-                <a:solidFill>
-                  <a:srgbClr val="323232"/>
-                </a:solidFill>
-              </a:defRPr>
-            </a:pPr>
-            <a:r>
-              <a:t>   • Density</a:t>
-            </a:r>
-          </a:p>
-          <a:p>
-            <a:pPr>
-              <a:spcAft>
-                <a:spcPts val="1200"/>
-              </a:spcAft>
-              <a:defRPr sz="1800">
-                <a:solidFill>
-                  <a:srgbClr val="323232"/>
-                </a:solidFill>
-              </a:defRPr>
-            </a:pPr>
-            <a:r>
-              <a:t>   • Speed</a:t>
+                <a:spcPts val="1000"/>
+              </a:spcAft>
+              <a:defRPr sz="1800">
+                <a:solidFill>
+                  <a:srgbClr val="323232"/>
+                </a:solidFill>
+              </a:defRPr>
+            </a:pPr>
+            <a:r>
+              <a:t>2. Keep only series with same</a:t>
+            </a:r>
+          </a:p>
+          <a:p>
+            <a:pPr>
+              <a:spcAft>
+                <a:spcPts val="1000"/>
+              </a:spcAft>
+              <a:defRPr sz="1800">
+                <a:solidFill>
+                  <a:srgbClr val="323232"/>
+                </a:solidFill>
+              </a:defRPr>
+            </a:pPr>
+            <a:r>
+              <a:t>   DID + Density + Speed</a:t>
             </a:r>
           </a:p>
         </p:txBody>
@@ -7219,18 +6789,18 @@
         </p:nvSpPr>
         <p:spPr>
           <a:xfrm>
-            <a:off x="5943600" y="1371600"/>
-            <a:ext cx="5760720" cy="5029200"/>
+            <a:off x="5943600" y="1188720"/>
+            <a:ext cx="5760720" cy="5303520"/>
           </a:xfrm>
           <a:prstGeom prst="roundRect">
             <a:avLst/>
           </a:prstGeom>
           <a:solidFill>
-            <a:srgbClr val="F0F0F0"/>
+            <a:srgbClr val="F5F5F5"/>
           </a:solidFill>
           <a:ln>
             <a:solidFill>
-              <a:srgbClr val="969696"/>
+              <a:srgbClr val="B4B4B4"/>
             </a:solidFill>
           </a:ln>
         </p:spPr>
@@ -7264,8 +6834,8 @@
         </p:nvSpPr>
         <p:spPr>
           <a:xfrm>
-            <a:off x="6126480" y="1554480"/>
-            <a:ext cx="5394960" cy="4663440"/>
+            <a:off x="6126480" y="1371600"/>
+            <a:ext cx="5394960" cy="4937760"/>
           </a:xfrm>
           <a:prstGeom prst="rect">
             <a:avLst/>
@@ -7347,475 +6917,7 @@
             </a:r>
             <a:br/>
             <a:r>
-              <a:t>│  Remove mismatched series to enable targets.    │</a:t>
-            </a:r>
-            <a:br/>
-            <a:r>
-              <a:t>│                                                 │</a:t>
-            </a:r>
-            <a:br/>
-            <a:r>
               <a:t>└─────────────────────────────────────────────────┘</a:t>
-            </a:r>
-          </a:p>
-        </p:txBody>
-      </p:sp>
-    </p:spTree>
-  </p:cSld>
-  <p:clrMapOvr>
-    <a:masterClrMapping/>
-  </p:clrMapOvr>
-</p:sld>
-</file>
-
-<file path=ppt/slides/slide9.xml><?xml version="1.0" encoding="utf-8"?>
-<p:sld xmlns:a="http://schemas.openxmlformats.org/drawingml/2006/main" xmlns:p="http://schemas.openxmlformats.org/presentationml/2006/main" xmlns:r="http://schemas.openxmlformats.org/officeDocument/2006/relationships">
-  <p:cSld>
-    <p:spTree>
-      <p:nvGrpSpPr>
-        <p:cNvPr id="1" name=""/>
-        <p:cNvGrpSpPr/>
-        <p:nvPr/>
-      </p:nvGrpSpPr>
-      <p:grpSpPr/>
-      <p:sp>
-        <p:nvSpPr>
-          <p:cNvPr id="2" name="Rectangle 1"/>
-          <p:cNvSpPr/>
-          <p:nvPr/>
-        </p:nvSpPr>
-        <p:spPr>
-          <a:xfrm>
-            <a:off x="0" y="0"/>
-            <a:ext cx="12191695" cy="1097280"/>
-          </a:xfrm>
-          <a:prstGeom prst="rect">
-            <a:avLst/>
-          </a:prstGeom>
-          <a:solidFill>
-            <a:srgbClr val="003366"/>
-          </a:solidFill>
-          <a:ln>
-            <a:noFill/>
-          </a:ln>
-        </p:spPr>
-        <p:style>
-          <a:lnRef idx="1">
-            <a:schemeClr val="accent1"/>
-          </a:lnRef>
-          <a:fillRef idx="3">
-            <a:schemeClr val="accent1"/>
-          </a:fillRef>
-          <a:effectRef idx="2">
-            <a:schemeClr val="accent1"/>
-          </a:effectRef>
-          <a:fontRef idx="minor">
-            <a:schemeClr val="lt1"/>
-          </a:fontRef>
-        </p:style>
-        <p:txBody>
-          <a:bodyPr rtlCol="0" anchor="ctr"/>
-          <a:lstStyle/>
-          <a:p>
-            <a:pPr algn="ctr"/>
-          </a:p>
-        </p:txBody>
-      </p:sp>
-      <p:sp>
-        <p:nvSpPr>
-          <p:cNvPr id="3" name="TextBox 2"/>
-          <p:cNvSpPr txBox="1"/>
-          <p:nvPr/>
-        </p:nvSpPr>
-        <p:spPr>
-          <a:xfrm>
-            <a:off x="457200" y="274320"/>
-            <a:ext cx="10972800" cy="731520"/>
-          </a:xfrm>
-          <a:prstGeom prst="rect">
-            <a:avLst/>
-          </a:prstGeom>
-          <a:noFill/>
-        </p:spPr>
-        <p:txBody>
-          <a:bodyPr wrap="none">
-            <a:spAutoFit/>
-          </a:bodyPr>
-          <a:lstStyle/>
-          <a:p>
-            <a:pPr>
-              <a:defRPr sz="3200" b="1">
-                <a:solidFill>
-                  <a:srgbClr val="FFFFFF"/>
-                </a:solidFill>
-              </a:defRPr>
-            </a:pPr>
-            <a:r>
-              <a:t>Example: Complete Workflow</a:t>
-            </a:r>
-          </a:p>
-        </p:txBody>
-      </p:sp>
-      <p:sp>
-        <p:nvSpPr>
-          <p:cNvPr id="4" name="TextBox 3"/>
-          <p:cNvSpPr txBox="1"/>
-          <p:nvPr/>
-        </p:nvSpPr>
-        <p:spPr>
-          <a:xfrm>
-            <a:off x="457200" y="1371600"/>
-            <a:ext cx="5029200" cy="5029200"/>
-          </a:xfrm>
-          <a:prstGeom prst="rect">
-            <a:avLst/>
-          </a:prstGeom>
-          <a:noFill/>
-        </p:spPr>
-        <p:txBody>
-          <a:bodyPr wrap="square">
-            <a:spAutoFit/>
-          </a:bodyPr>
-          <a:lstStyle/>
-          <a:p>
-            <a:pPr>
-              <a:spcAft>
-                <a:spcPts val="1200"/>
-              </a:spcAft>
-              <a:defRPr sz="1800">
-                <a:solidFill>
-                  <a:srgbClr val="323232"/>
-                </a:solidFill>
-              </a:defRPr>
-            </a:pPr>
-            <a:r>
-              <a:t>Goal: View Y6CP 192GB 7500MT</a:t>
-            </a:r>
-          </a:p>
-          <a:p>
-            <a:pPr>
-              <a:spcAft>
-                <a:spcPts val="1200"/>
-              </a:spcAft>
-              <a:defRPr sz="1800">
-                <a:solidFill>
-                  <a:srgbClr val="323232"/>
-                </a:solidFill>
-              </a:defRPr>
-            </a:pPr>
-            <a:r>
-              <a:t>      with D1 projection lines</a:t>
-            </a:r>
-          </a:p>
-          <a:p>
-            <a:pPr>
-              <a:spcAft>
-                <a:spcPts val="1200"/>
-              </a:spcAft>
-              <a:defRPr sz="1800">
-                <a:solidFill>
-                  <a:srgbClr val="323232"/>
-                </a:solidFill>
-              </a:defRPr>
-            </a:pPr>
-          </a:p>
-          <a:p>
-            <a:pPr>
-              <a:spcAft>
-                <a:spcPts val="1200"/>
-              </a:spcAft>
-              <a:defRPr sz="1800">
-                <a:solidFill>
-                  <a:srgbClr val="323232"/>
-                </a:solidFill>
-              </a:defRPr>
-            </a:pPr>
-            <a:r>
-              <a:t>Steps:</a:t>
-            </a:r>
-          </a:p>
-          <a:p>
-            <a:pPr>
-              <a:spcAft>
-                <a:spcPts val="1200"/>
-              </a:spcAft>
-              <a:defRPr sz="1800">
-                <a:solidFill>
-                  <a:srgbClr val="323232"/>
-                </a:solidFill>
-              </a:defRPr>
-            </a:pPr>
-            <a:r>
-              <a:t>1. Set sidebar filters</a:t>
-            </a:r>
-          </a:p>
-          <a:p>
-            <a:pPr>
-              <a:spcAft>
-                <a:spcPts val="1200"/>
-              </a:spcAft>
-              <a:defRPr sz="1800">
-                <a:solidFill>
-                  <a:srgbClr val="323232"/>
-                </a:solidFill>
-              </a:defRPr>
-            </a:pPr>
-            <a:r>
-              <a:t>   (Form, Step, DID, Facility, WW)</a:t>
-            </a:r>
-          </a:p>
-          <a:p>
-            <a:pPr>
-              <a:spcAft>
-                <a:spcPts val="1200"/>
-              </a:spcAft>
-              <a:defRPr sz="1800">
-                <a:solidFill>
-                  <a:srgbClr val="323232"/>
-                </a:solidFill>
-              </a:defRPr>
-            </a:pPr>
-          </a:p>
-          <a:p>
-            <a:pPr>
-              <a:spcAft>
-                <a:spcPts val="1200"/>
-              </a:spcAft>
-              <a:defRPr sz="1800">
-                <a:solidFill>
-                  <a:srgbClr val="323232"/>
-                </a:solidFill>
-              </a:defRPr>
-            </a:pPr>
-            <a:r>
-              <a:t>2. Select ONLY matching series</a:t>
-            </a:r>
-          </a:p>
-          <a:p>
-            <a:pPr>
-              <a:spcAft>
-                <a:spcPts val="1200"/>
-              </a:spcAft>
-              <a:defRPr sz="1800">
-                <a:solidFill>
-                  <a:srgbClr val="323232"/>
-                </a:solidFill>
-              </a:defRPr>
-            </a:pPr>
-            <a:r>
-              <a:t>   (same DID+Density+Speed)</a:t>
-            </a:r>
-          </a:p>
-          <a:p>
-            <a:pPr>
-              <a:spcAft>
-                <a:spcPts val="1200"/>
-              </a:spcAft>
-              <a:defRPr sz="1800">
-                <a:solidFill>
-                  <a:srgbClr val="323232"/>
-                </a:solidFill>
-              </a:defRPr>
-            </a:pPr>
-          </a:p>
-          <a:p>
-            <a:pPr>
-              <a:spcAft>
-                <a:spcPts val="1200"/>
-              </a:spcAft>
-              <a:defRPr sz="1800">
-                <a:solidFill>
-                  <a:srgbClr val="323232"/>
-                </a:solidFill>
-              </a:defRPr>
-            </a:pPr>
-            <a:r>
-              <a:t>3. Enable 'Show D1 Target Lines'</a:t>
-            </a:r>
-          </a:p>
-          <a:p>
-            <a:pPr>
-              <a:spcAft>
-                <a:spcPts val="1200"/>
-              </a:spcAft>
-              <a:defRPr sz="1800">
-                <a:solidFill>
-                  <a:srgbClr val="323232"/>
-                </a:solidFill>
-              </a:defRPr>
-            </a:pPr>
-          </a:p>
-          <a:p>
-            <a:pPr>
-              <a:spcAft>
-                <a:spcPts val="1200"/>
-              </a:spcAft>
-              <a:defRPr sz="1800">
-                <a:solidFill>
-                  <a:srgbClr val="323232"/>
-                </a:solidFill>
-              </a:defRPr>
-            </a:pPr>
-            <a:r>
-              <a:t>4. Review chart comparison</a:t>
-            </a:r>
-          </a:p>
-        </p:txBody>
-      </p:sp>
-      <p:sp>
-        <p:nvSpPr>
-          <p:cNvPr id="5" name="Rounded Rectangle 4"/>
-          <p:cNvSpPr/>
-          <p:nvPr/>
-        </p:nvSpPr>
-        <p:spPr>
-          <a:xfrm>
-            <a:off x="5943600" y="1371600"/>
-            <a:ext cx="5760720" cy="5029200"/>
-          </a:xfrm>
-          <a:prstGeom prst="roundRect">
-            <a:avLst/>
-          </a:prstGeom>
-          <a:solidFill>
-            <a:srgbClr val="F0F0F0"/>
-          </a:solidFill>
-          <a:ln>
-            <a:solidFill>
-              <a:srgbClr val="969696"/>
-            </a:solidFill>
-          </a:ln>
-        </p:spPr>
-        <p:style>
-          <a:lnRef idx="1">
-            <a:schemeClr val="accent1"/>
-          </a:lnRef>
-          <a:fillRef idx="3">
-            <a:schemeClr val="accent1"/>
-          </a:fillRef>
-          <a:effectRef idx="2">
-            <a:schemeClr val="accent1"/>
-          </a:effectRef>
-          <a:fontRef idx="minor">
-            <a:schemeClr val="lt1"/>
-          </a:fontRef>
-        </p:style>
-        <p:txBody>
-          <a:bodyPr rtlCol="0" anchor="ctr"/>
-          <a:lstStyle/>
-          <a:p>
-            <a:pPr algn="ctr"/>
-          </a:p>
-        </p:txBody>
-      </p:sp>
-      <p:sp>
-        <p:nvSpPr>
-          <p:cNvPr id="6" name="TextBox 5"/>
-          <p:cNvSpPr txBox="1"/>
-          <p:nvPr/>
-        </p:nvSpPr>
-        <p:spPr>
-          <a:xfrm>
-            <a:off x="6126480" y="1554480"/>
-            <a:ext cx="5394960" cy="4663440"/>
-          </a:xfrm>
-          <a:prstGeom prst="rect">
-            <a:avLst/>
-          </a:prstGeom>
-          <a:noFill/>
-        </p:spPr>
-        <p:txBody>
-          <a:bodyPr wrap="square">
-            <a:spAutoFit/>
-          </a:bodyPr>
-          <a:lstStyle/>
-          <a:p>
-            <a:pPr>
-              <a:defRPr sz="1000">
-                <a:solidFill>
-                  <a:srgbClr val="323232"/>
-                </a:solidFill>
-                <a:latin typeface="Courier New"/>
-              </a:defRPr>
-            </a:pPr>
-            <a:r>
-              <a:t>GOAL: View Y6CP 192GB 7500MTPS with targets</a:t>
-            </a:r>
-            <a:br/>
-            <a:br/>
-            <a:r>
-              <a:t>┌─ SIDEBAR ──────────────────────────────────────┐</a:t>
-            </a:r>
-            <a:br/>
-            <a:r>
-              <a:t>│ Form Factor: [✓] SOCAMM2                       │</a:t>
-            </a:r>
-            <a:br/>
-            <a:r>
-              <a:t>│ Test Step:   [✓] HMFN [✓] HMB1 [✓] QMON        │</a:t>
-            </a:r>
-            <a:br/>
-            <a:r>
-              <a:t>│ Design ID:   [✓] Y6CP                          │</a:t>
-            </a:r>
-            <a:br/>
-            <a:r>
-              <a:t>│ Facility:    [✓] PENANG                        │</a:t>
-            </a:r>
-            <a:br/>
-            <a:r>
-              <a:t>│ Work Week:   2026 WW06-WW15                    │</a:t>
-            </a:r>
-            <a:br/>
-            <a:r>
-              <a:t>└────────────────────────────────────────────────┘</a:t>
-            </a:r>
-            <a:br/>
-            <a:r>
-              <a:t>           ↓</a:t>
-            </a:r>
-            <a:br/>
-            <a:r>
-              <a:t>┌─ SERIES SELECTOR ──────────────────────────────┐</a:t>
-            </a:r>
-            <a:br/>
-            <a:r>
-              <a:t>│ [✓] Y6CP_SOCAMM2_192GB_7500MTPS_HMFN          │</a:t>
-            </a:r>
-            <a:br/>
-            <a:r>
-              <a:t>│ [✓] Y6CP_SOCAMM2_192GB_7500MTPS_SLT           │</a:t>
-            </a:r>
-            <a:br/>
-            <a:r>
-              <a:t>│ [✓] Y6CP_SOCAMM2_192GB_7500MTPS_ELC           │</a:t>
-            </a:r>
-            <a:br/>
-            <a:r>
-              <a:t>│ [ ] Y6CP_SOCAMM2_96GB_9600MTPS_HMFN           │</a:t>
-            </a:r>
-            <a:br/>
-            <a:r>
-              <a:t>│ [ ] ... (other configs unchecked)              │</a:t>
-            </a:r>
-            <a:br/>
-            <a:r>
-              <a:t>└────────────────────────────────────────────────┘</a:t>
-            </a:r>
-            <a:br/>
-            <a:r>
-              <a:t>           ↓</a:t>
-            </a:r>
-            <a:br/>
-            <a:r>
-              <a:t>┌─ ENABLE TARGETS ───────────────────────────────┐</a:t>
-            </a:r>
-            <a:br/>
-            <a:r>
-              <a:t>│ [✓] Show D1 Target Lines  ← Check this!        │</a:t>
-            </a:r>
-            <a:br/>
-            <a:r>
-              <a:t>└────────────────────────────────────────────────┘</a:t>
             </a:r>
           </a:p>
         </p:txBody>
